--- a/Onyx_進度報告_1020.pptx
+++ b/Onyx_進度報告_1020.pptx
@@ -5,13 +5,15 @@
     <p:sldMasterId id="2147483658" r:id="rId1"/>
   </p:sldMasterIdLst>
   <p:notesMasterIdLst>
-    <p:notesMasterId r:id="rId6"/>
+    <p:notesMasterId r:id="rId8"/>
   </p:notesMasterIdLst>
   <p:sldIdLst>
     <p:sldId id="277" r:id="rId2"/>
     <p:sldId id="2042" r:id="rId3"/>
     <p:sldId id="2035" r:id="rId4"/>
-    <p:sldId id="286" r:id="rId5"/>
+    <p:sldId id="2043" r:id="rId5"/>
+    <p:sldId id="2044" r:id="rId6"/>
+    <p:sldId id="286" r:id="rId7"/>
   </p:sldIdLst>
   <p:sldSz cx="9906000" cy="6858000" type="A4"/>
   <p:notesSz cx="7315200" cy="9601200"/>
@@ -260,6 +262,8 @@
         <p14:section name="Video Capture Card" id="{FA8538CB-EEBB-42F8-BEE8-82DA04CEC9C1}">
           <p14:sldIdLst>
             <p14:sldId id="2035"/>
+            <p14:sldId id="2043"/>
+            <p14:sldId id="2044"/>
           </p14:sldIdLst>
         </p14:section>
         <p14:section name="End" id="{33EEDC85-A799-4CB3-BF13-F4955B8630BE}">
@@ -1823,6 +1827,38 @@
           <a:lstStyle/>
           <a:p>
             <a:pPr marL="0" indent="0"/>
+            <a:r>
+              <a:rPr lang="zh-TW" altLang="en-US" dirty="0"/>
+              <a:t>並沒有找到開發版在支援</a:t>
+            </a:r>
+            <a:r>
+              <a:rPr lang="en-US" altLang="zh-TW" dirty="0" err="1"/>
+              <a:t>LiteX</a:t>
+            </a:r>
+            <a:r>
+              <a:rPr lang="zh-TW" altLang="en-US" dirty="0"/>
+              <a:t>的同時也支援</a:t>
+            </a:r>
+            <a:r>
+              <a:rPr lang="en-US" altLang="zh-TW" dirty="0"/>
+              <a:t>SDI</a:t>
+            </a:r>
+            <a:r>
+              <a:rPr lang="zh-TW" altLang="en-US" dirty="0"/>
+              <a:t> </a:t>
+            </a:r>
+            <a:r>
+              <a:rPr lang="en-US" altLang="zh-TW" dirty="0"/>
+              <a:t>HDMI</a:t>
+            </a:r>
+            <a:r>
+              <a:rPr lang="zh-TW" altLang="en-US" dirty="0"/>
+              <a:t> </a:t>
+            </a:r>
+            <a:r>
+              <a:rPr lang="en-US" altLang="zh-TW" dirty="0"/>
+              <a:t>PCIE</a:t>
+            </a:r>
             <a:endParaRPr lang="zh-TW" altLang="en-US" dirty="0"/>
           </a:p>
         </p:txBody>
@@ -1895,6 +1931,274 @@
 </file>
 
 <file path=ppt/notesSlides/notesSlide4.xml><?xml version="1.0" encoding="utf-8"?>
+<p:notes xmlns:a="http://schemas.openxmlformats.org/drawingml/2006/main" xmlns:r="http://schemas.openxmlformats.org/officeDocument/2006/relationships" xmlns:p="http://schemas.openxmlformats.org/presentationml/2006/main">
+  <p:cSld>
+    <p:spTree>
+      <p:nvGrpSpPr>
+        <p:cNvPr id="1" name="">
+          <a:extLst>
+            <a:ext uri="{FF2B5EF4-FFF2-40B4-BE49-F238E27FC236}">
+              <a16:creationId xmlns:a16="http://schemas.microsoft.com/office/drawing/2014/main" id="{9A851A70-D7FF-B69E-2F1F-5276D7F44C59}"/>
+            </a:ext>
+          </a:extLst>
+        </p:cNvPr>
+        <p:cNvGrpSpPr/>
+        <p:nvPr/>
+      </p:nvGrpSpPr>
+      <p:grpSpPr>
+        <a:xfrm>
+          <a:off x="0" y="0"/>
+          <a:ext cx="0" cy="0"/>
+          <a:chOff x="0" y="0"/>
+          <a:chExt cx="0" cy="0"/>
+        </a:xfrm>
+      </p:grpSpPr>
+      <p:sp>
+        <p:nvSpPr>
+          <p:cNvPr id="2" name="投影片影像版面配置區 1">
+            <a:extLst>
+              <a:ext uri="{FF2B5EF4-FFF2-40B4-BE49-F238E27FC236}">
+                <a16:creationId xmlns:a16="http://schemas.microsoft.com/office/drawing/2014/main" id="{4FB2E1DE-40DE-B1BA-7135-64BFFB1631B9}"/>
+              </a:ext>
+            </a:extLst>
+          </p:cNvPr>
+          <p:cNvSpPr>
+            <a:spLocks noGrp="1" noRot="1" noChangeAspect="1"/>
+          </p:cNvSpPr>
+          <p:nvPr>
+            <p:ph type="sldImg"/>
+          </p:nvPr>
+        </p:nvSpPr>
+        <p:spPr/>
+      </p:sp>
+      <p:sp>
+        <p:nvSpPr>
+          <p:cNvPr id="3" name="備忘稿版面配置區 2">
+            <a:extLst>
+              <a:ext uri="{FF2B5EF4-FFF2-40B4-BE49-F238E27FC236}">
+                <a16:creationId xmlns:a16="http://schemas.microsoft.com/office/drawing/2014/main" id="{C4F8DB8E-F5F1-21EB-D41F-2C635FB715D5}"/>
+              </a:ext>
+            </a:extLst>
+          </p:cNvPr>
+          <p:cNvSpPr>
+            <a:spLocks noGrp="1"/>
+          </p:cNvSpPr>
+          <p:nvPr>
+            <p:ph type="body" idx="1"/>
+          </p:nvPr>
+        </p:nvSpPr>
+        <p:spPr/>
+        <p:txBody>
+          <a:bodyPr/>
+          <a:lstStyle/>
+          <a:p>
+            <a:pPr marL="0" indent="0"/>
+            <a:endParaRPr lang="zh-TW" altLang="en-US" dirty="0"/>
+          </a:p>
+        </p:txBody>
+      </p:sp>
+      <p:sp>
+        <p:nvSpPr>
+          <p:cNvPr id="4" name="投影片編號版面配置區 3">
+            <a:extLst>
+              <a:ext uri="{FF2B5EF4-FFF2-40B4-BE49-F238E27FC236}">
+                <a16:creationId xmlns:a16="http://schemas.microsoft.com/office/drawing/2014/main" id="{A81AD260-1FA1-46D2-EEFC-6CE390861C06}"/>
+              </a:ext>
+            </a:extLst>
+          </p:cNvPr>
+          <p:cNvSpPr>
+            <a:spLocks noGrp="1"/>
+          </p:cNvSpPr>
+          <p:nvPr>
+            <p:ph type="sldNum" idx="12"/>
+          </p:nvPr>
+        </p:nvSpPr>
+        <p:spPr/>
+        <p:txBody>
+          <a:bodyPr/>
+          <a:lstStyle/>
+          <a:p>
+            <a:pPr marL="0" marR="0" lvl="0" indent="0" algn="r" rtl="0">
+              <a:spcBef>
+                <a:spcPts val="0"/>
+              </a:spcBef>
+              <a:spcAft>
+                <a:spcPts val="0"/>
+              </a:spcAft>
+              <a:buNone/>
+            </a:pPr>
+            <a:fld id="{00000000-1234-1234-1234-123412341234}" type="slidenum">
+              <a:rPr lang="en-US" sz="2000" b="0" i="0" u="none" strike="noStrike" cap="none" smtClean="0">
+                <a:solidFill>
+                  <a:schemeClr val="dk1"/>
+                </a:solidFill>
+                <a:latin typeface="Times New Roman"/>
+                <a:ea typeface="Times New Roman"/>
+                <a:cs typeface="Times New Roman"/>
+                <a:sym typeface="Times New Roman"/>
+              </a:rPr>
+              <a:t>4</a:t>
+            </a:fld>
+            <a:endParaRPr lang="en-US" sz="2000" b="0" i="0" u="none" strike="noStrike" cap="none" dirty="0">
+              <a:solidFill>
+                <a:schemeClr val="dk1"/>
+              </a:solidFill>
+              <a:latin typeface="Times New Roman"/>
+              <a:ea typeface="Times New Roman"/>
+              <a:cs typeface="Times New Roman"/>
+              <a:sym typeface="Times New Roman"/>
+            </a:endParaRPr>
+          </a:p>
+        </p:txBody>
+      </p:sp>
+    </p:spTree>
+    <p:extLst>
+      <p:ext uri="{BB962C8B-B14F-4D97-AF65-F5344CB8AC3E}">
+        <p14:creationId xmlns:p14="http://schemas.microsoft.com/office/powerpoint/2010/main" val="1411328672"/>
+      </p:ext>
+    </p:extLst>
+  </p:cSld>
+  <p:clrMapOvr>
+    <a:masterClrMapping/>
+  </p:clrMapOvr>
+</p:notes>
+</file>
+
+<file path=ppt/notesSlides/notesSlide5.xml><?xml version="1.0" encoding="utf-8"?>
+<p:notes xmlns:a="http://schemas.openxmlformats.org/drawingml/2006/main" xmlns:r="http://schemas.openxmlformats.org/officeDocument/2006/relationships" xmlns:p="http://schemas.openxmlformats.org/presentationml/2006/main">
+  <p:cSld>
+    <p:spTree>
+      <p:nvGrpSpPr>
+        <p:cNvPr id="1" name="">
+          <a:extLst>
+            <a:ext uri="{FF2B5EF4-FFF2-40B4-BE49-F238E27FC236}">
+              <a16:creationId xmlns:a16="http://schemas.microsoft.com/office/drawing/2014/main" id="{9A851A70-D7FF-B69E-2F1F-5276D7F44C59}"/>
+            </a:ext>
+          </a:extLst>
+        </p:cNvPr>
+        <p:cNvGrpSpPr/>
+        <p:nvPr/>
+      </p:nvGrpSpPr>
+      <p:grpSpPr>
+        <a:xfrm>
+          <a:off x="0" y="0"/>
+          <a:ext cx="0" cy="0"/>
+          <a:chOff x="0" y="0"/>
+          <a:chExt cx="0" cy="0"/>
+        </a:xfrm>
+      </p:grpSpPr>
+      <p:sp>
+        <p:nvSpPr>
+          <p:cNvPr id="2" name="投影片影像版面配置區 1">
+            <a:extLst>
+              <a:ext uri="{FF2B5EF4-FFF2-40B4-BE49-F238E27FC236}">
+                <a16:creationId xmlns:a16="http://schemas.microsoft.com/office/drawing/2014/main" id="{4FB2E1DE-40DE-B1BA-7135-64BFFB1631B9}"/>
+              </a:ext>
+            </a:extLst>
+          </p:cNvPr>
+          <p:cNvSpPr>
+            <a:spLocks noGrp="1" noRot="1" noChangeAspect="1"/>
+          </p:cNvSpPr>
+          <p:nvPr>
+            <p:ph type="sldImg"/>
+          </p:nvPr>
+        </p:nvSpPr>
+        <p:spPr/>
+      </p:sp>
+      <p:sp>
+        <p:nvSpPr>
+          <p:cNvPr id="3" name="備忘稿版面配置區 2">
+            <a:extLst>
+              <a:ext uri="{FF2B5EF4-FFF2-40B4-BE49-F238E27FC236}">
+                <a16:creationId xmlns:a16="http://schemas.microsoft.com/office/drawing/2014/main" id="{C4F8DB8E-F5F1-21EB-D41F-2C635FB715D5}"/>
+              </a:ext>
+            </a:extLst>
+          </p:cNvPr>
+          <p:cNvSpPr>
+            <a:spLocks noGrp="1"/>
+          </p:cNvSpPr>
+          <p:nvPr>
+            <p:ph type="body" idx="1"/>
+          </p:nvPr>
+        </p:nvSpPr>
+        <p:spPr/>
+        <p:txBody>
+          <a:bodyPr/>
+          <a:lstStyle/>
+          <a:p>
+            <a:pPr marL="0" indent="0"/>
+            <a:endParaRPr lang="zh-TW" altLang="en-US" dirty="0"/>
+          </a:p>
+        </p:txBody>
+      </p:sp>
+      <p:sp>
+        <p:nvSpPr>
+          <p:cNvPr id="4" name="投影片編號版面配置區 3">
+            <a:extLst>
+              <a:ext uri="{FF2B5EF4-FFF2-40B4-BE49-F238E27FC236}">
+                <a16:creationId xmlns:a16="http://schemas.microsoft.com/office/drawing/2014/main" id="{A81AD260-1FA1-46D2-EEFC-6CE390861C06}"/>
+              </a:ext>
+            </a:extLst>
+          </p:cNvPr>
+          <p:cNvSpPr>
+            <a:spLocks noGrp="1"/>
+          </p:cNvSpPr>
+          <p:nvPr>
+            <p:ph type="sldNum" idx="12"/>
+          </p:nvPr>
+        </p:nvSpPr>
+        <p:spPr/>
+        <p:txBody>
+          <a:bodyPr/>
+          <a:lstStyle/>
+          <a:p>
+            <a:pPr marL="0" marR="0" lvl="0" indent="0" algn="r" rtl="0">
+              <a:spcBef>
+                <a:spcPts val="0"/>
+              </a:spcBef>
+              <a:spcAft>
+                <a:spcPts val="0"/>
+              </a:spcAft>
+              <a:buNone/>
+            </a:pPr>
+            <a:fld id="{00000000-1234-1234-1234-123412341234}" type="slidenum">
+              <a:rPr lang="en-US" sz="2000" b="0" i="0" u="none" strike="noStrike" cap="none" smtClean="0">
+                <a:solidFill>
+                  <a:schemeClr val="dk1"/>
+                </a:solidFill>
+                <a:latin typeface="Times New Roman"/>
+                <a:ea typeface="Times New Roman"/>
+                <a:cs typeface="Times New Roman"/>
+                <a:sym typeface="Times New Roman"/>
+              </a:rPr>
+              <a:t>5</a:t>
+            </a:fld>
+            <a:endParaRPr lang="en-US" sz="2000" b="0" i="0" u="none" strike="noStrike" cap="none" dirty="0">
+              <a:solidFill>
+                <a:schemeClr val="dk1"/>
+              </a:solidFill>
+              <a:latin typeface="Times New Roman"/>
+              <a:ea typeface="Times New Roman"/>
+              <a:cs typeface="Times New Roman"/>
+              <a:sym typeface="Times New Roman"/>
+            </a:endParaRPr>
+          </a:p>
+        </p:txBody>
+      </p:sp>
+    </p:spTree>
+    <p:extLst>
+      <p:ext uri="{BB962C8B-B14F-4D97-AF65-F5344CB8AC3E}">
+        <p14:creationId xmlns:p14="http://schemas.microsoft.com/office/powerpoint/2010/main" val="1723640653"/>
+      </p:ext>
+    </p:extLst>
+  </p:cSld>
+  <p:clrMapOvr>
+    <a:masterClrMapping/>
+  </p:clrMapOvr>
+</p:notes>
+</file>
+
+<file path=ppt/notesSlides/notesSlide6.xml><?xml version="1.0" encoding="utf-8"?>
 <p:notes xmlns:a="http://schemas.openxmlformats.org/drawingml/2006/main" xmlns:r="http://schemas.openxmlformats.org/officeDocument/2006/relationships" xmlns:p="http://schemas.openxmlformats.org/presentationml/2006/main">
   <p:cSld>
     <p:spTree>
@@ -1962,7 +2266,7 @@
           <a:p>
             <a:fld id="{F5753A29-9D77-4C26-8BEC-432FE5D4B0A4}" type="slidenum">
               <a:rPr lang="en-US" altLang="zh-TW" smtClean="0"/>
-              <a:t>4</a:t>
+              <a:t>6</a:t>
             </a:fld>
             <a:endParaRPr lang="en-US" altLang="zh-TW" dirty="0"/>
           </a:p>
@@ -7795,7 +8099,773 @@
                 <a:ea typeface="標楷體" panose="03000509000000000000" pitchFamily="65" charset="-120"/>
                 <a:cs typeface="Times New Roman" panose="02020603050405020304" pitchFamily="18" charset="0"/>
               </a:rPr>
-              <a:t> </a:t>
+              <a:t> / SDI </a:t>
+            </a:r>
+            <a:endParaRPr lang="zh-TW" altLang="en-US" dirty="0">
+              <a:latin typeface="Times New Roman" panose="02020603050405020304" pitchFamily="18" charset="0"/>
+              <a:ea typeface="標楷體" panose="03000509000000000000" pitchFamily="65" charset="-120"/>
+              <a:cs typeface="Times New Roman" panose="02020603050405020304" pitchFamily="18" charset="0"/>
+            </a:endParaRPr>
+          </a:p>
+        </p:txBody>
+      </p:sp>
+      <p:sp>
+        <p:nvSpPr>
+          <p:cNvPr id="2" name="文字版面配置區 6">
+            <a:extLst>
+              <a:ext uri="{FF2B5EF4-FFF2-40B4-BE49-F238E27FC236}">
+                <a16:creationId xmlns:a16="http://schemas.microsoft.com/office/drawing/2014/main" id="{D929304B-5341-8BBF-E71F-AF5F2FE7268A}"/>
+              </a:ext>
+            </a:extLst>
+          </p:cNvPr>
+          <p:cNvSpPr txBox="1"/>
+          <p:nvPr/>
+        </p:nvSpPr>
+        <p:spPr>
+          <a:xfrm>
+            <a:off x="609602" y="932266"/>
+            <a:ext cx="8686796" cy="4700685"/>
+          </a:xfrm>
+          <a:prstGeom prst="rect">
+            <a:avLst/>
+          </a:prstGeom>
+          <a:noFill/>
+          <a:ln>
+            <a:noFill/>
+          </a:ln>
+        </p:spPr>
+        <p:txBody>
+          <a:bodyPr spcFirstLastPara="1" wrap="square" lIns="91425" tIns="45700" rIns="91425" bIns="45700" anchor="t" anchorCtr="0">
+            <a:noAutofit/>
+          </a:bodyPr>
+          <a:lstStyle>
+            <a:defPPr marR="0" lvl="0" algn="l" rtl="0">
+              <a:lnSpc>
+                <a:spcPct val="100000"/>
+              </a:lnSpc>
+              <a:spcBef>
+                <a:spcPts val="0"/>
+              </a:spcBef>
+              <a:spcAft>
+                <a:spcPts val="0"/>
+              </a:spcAft>
+            </a:defPPr>
+            <a:lvl1pPr marL="457200" marR="0" lvl="0" indent="-406400" algn="l" rtl="0">
+              <a:lnSpc>
+                <a:spcPct val="100000"/>
+              </a:lnSpc>
+              <a:spcBef>
+                <a:spcPts val="560"/>
+              </a:spcBef>
+              <a:spcAft>
+                <a:spcPts val="0"/>
+              </a:spcAft>
+              <a:buClr>
+                <a:schemeClr val="accent2"/>
+              </a:buClr>
+              <a:buSzPts val="2800"/>
+              <a:buFont typeface="Noto Sans Symbols"/>
+              <a:buChar char="❖"/>
+              <a:defRPr sz="2800" b="0" i="0" u="none" strike="noStrike" cap="none">
+                <a:solidFill>
+                  <a:schemeClr val="dk1"/>
+                </a:solidFill>
+                <a:latin typeface="Times New Roman"/>
+                <a:ea typeface="Times New Roman"/>
+                <a:cs typeface="Times New Roman"/>
+                <a:sym typeface="Times New Roman"/>
+              </a:defRPr>
+            </a:lvl1pPr>
+            <a:lvl2pPr marL="914400" marR="0" lvl="1" indent="-381000" algn="l" rtl="0">
+              <a:lnSpc>
+                <a:spcPct val="100000"/>
+              </a:lnSpc>
+              <a:spcBef>
+                <a:spcPts val="480"/>
+              </a:spcBef>
+              <a:spcAft>
+                <a:spcPts val="0"/>
+              </a:spcAft>
+              <a:buClr>
+                <a:srgbClr val="FF5050"/>
+              </a:buClr>
+              <a:buSzPts val="2400"/>
+              <a:buFont typeface="Noto Sans Symbols"/>
+              <a:buChar char="▪"/>
+              <a:defRPr sz="2400" b="0" i="0" u="none" strike="noStrike" cap="none">
+                <a:solidFill>
+                  <a:schemeClr val="dk1"/>
+                </a:solidFill>
+                <a:latin typeface="Times New Roman"/>
+                <a:ea typeface="Times New Roman"/>
+                <a:cs typeface="Times New Roman"/>
+                <a:sym typeface="Times New Roman"/>
+              </a:defRPr>
+            </a:lvl2pPr>
+            <a:lvl3pPr marL="1371600" marR="0" lvl="2" indent="-355600" algn="l" rtl="0">
+              <a:lnSpc>
+                <a:spcPct val="100000"/>
+              </a:lnSpc>
+              <a:spcBef>
+                <a:spcPts val="400"/>
+              </a:spcBef>
+              <a:spcAft>
+                <a:spcPts val="0"/>
+              </a:spcAft>
+              <a:buClr>
+                <a:srgbClr val="6699FF"/>
+              </a:buClr>
+              <a:buSzPts val="2000"/>
+              <a:buFont typeface="Times New Roman"/>
+              <a:buChar char="•"/>
+              <a:defRPr sz="2000" b="0" i="0" u="none" strike="noStrike" cap="none">
+                <a:solidFill>
+                  <a:schemeClr val="dk1"/>
+                </a:solidFill>
+                <a:latin typeface="Times New Roman"/>
+                <a:ea typeface="Times New Roman"/>
+                <a:cs typeface="Times New Roman"/>
+                <a:sym typeface="Times New Roman"/>
+              </a:defRPr>
+            </a:lvl3pPr>
+            <a:lvl4pPr marL="1828800" marR="0" lvl="3" indent="-355600" algn="l" rtl="0">
+              <a:lnSpc>
+                <a:spcPct val="100000"/>
+              </a:lnSpc>
+              <a:spcBef>
+                <a:spcPts val="400"/>
+              </a:spcBef>
+              <a:spcAft>
+                <a:spcPts val="0"/>
+              </a:spcAft>
+              <a:buClr>
+                <a:srgbClr val="FF5050"/>
+              </a:buClr>
+              <a:buSzPts val="2000"/>
+              <a:buFont typeface="Times New Roman"/>
+              <a:buChar char="o"/>
+              <a:defRPr sz="2000" b="0" i="0" u="none" strike="noStrike" cap="none">
+                <a:solidFill>
+                  <a:schemeClr val="dk1"/>
+                </a:solidFill>
+                <a:latin typeface="Times New Roman"/>
+                <a:ea typeface="Times New Roman"/>
+                <a:cs typeface="Times New Roman"/>
+                <a:sym typeface="Times New Roman"/>
+              </a:defRPr>
+            </a:lvl4pPr>
+            <a:lvl5pPr marL="2286000" marR="0" lvl="4" indent="-355600" algn="l" rtl="0">
+              <a:lnSpc>
+                <a:spcPct val="100000"/>
+              </a:lnSpc>
+              <a:spcBef>
+                <a:spcPts val="400"/>
+              </a:spcBef>
+              <a:spcAft>
+                <a:spcPts val="0"/>
+              </a:spcAft>
+              <a:buClr>
+                <a:srgbClr val="FF5050"/>
+              </a:buClr>
+              <a:buSzPts val="2000"/>
+              <a:buFont typeface="Times New Roman"/>
+              <a:buChar char="o"/>
+              <a:defRPr sz="2000" b="0" i="0" u="none" strike="noStrike" cap="none">
+                <a:solidFill>
+                  <a:schemeClr val="dk1"/>
+                </a:solidFill>
+                <a:latin typeface="Times New Roman"/>
+                <a:ea typeface="Times New Roman"/>
+                <a:cs typeface="Times New Roman"/>
+                <a:sym typeface="Times New Roman"/>
+              </a:defRPr>
+            </a:lvl5pPr>
+            <a:lvl6pPr marL="2743200" marR="0" lvl="5" indent="-355600" algn="l" rtl="0">
+              <a:lnSpc>
+                <a:spcPct val="100000"/>
+              </a:lnSpc>
+              <a:spcBef>
+                <a:spcPts val="400"/>
+              </a:spcBef>
+              <a:spcAft>
+                <a:spcPts val="0"/>
+              </a:spcAft>
+              <a:buClr>
+                <a:srgbClr val="FF5050"/>
+              </a:buClr>
+              <a:buSzPts val="2000"/>
+              <a:buFont typeface="Times New Roman"/>
+              <a:buChar char="o"/>
+              <a:defRPr sz="2000" b="0" i="0" u="none" strike="noStrike" cap="none">
+                <a:solidFill>
+                  <a:schemeClr val="dk1"/>
+                </a:solidFill>
+                <a:latin typeface="Times New Roman"/>
+                <a:ea typeface="Times New Roman"/>
+                <a:cs typeface="Times New Roman"/>
+                <a:sym typeface="Times New Roman"/>
+              </a:defRPr>
+            </a:lvl6pPr>
+            <a:lvl7pPr marL="3200400" marR="0" lvl="6" indent="-355600" algn="l" rtl="0">
+              <a:lnSpc>
+                <a:spcPct val="100000"/>
+              </a:lnSpc>
+              <a:spcBef>
+                <a:spcPts val="400"/>
+              </a:spcBef>
+              <a:spcAft>
+                <a:spcPts val="0"/>
+              </a:spcAft>
+              <a:buClr>
+                <a:srgbClr val="FF5050"/>
+              </a:buClr>
+              <a:buSzPts val="2000"/>
+              <a:buFont typeface="Times New Roman"/>
+              <a:buChar char="o"/>
+              <a:defRPr sz="2000" b="0" i="0" u="none" strike="noStrike" cap="none">
+                <a:solidFill>
+                  <a:schemeClr val="dk1"/>
+                </a:solidFill>
+                <a:latin typeface="Times New Roman"/>
+                <a:ea typeface="Times New Roman"/>
+                <a:cs typeface="Times New Roman"/>
+                <a:sym typeface="Times New Roman"/>
+              </a:defRPr>
+            </a:lvl7pPr>
+            <a:lvl8pPr marL="3657600" marR="0" lvl="7" indent="-355600" algn="l" rtl="0">
+              <a:lnSpc>
+                <a:spcPct val="100000"/>
+              </a:lnSpc>
+              <a:spcBef>
+                <a:spcPts val="400"/>
+              </a:spcBef>
+              <a:spcAft>
+                <a:spcPts val="0"/>
+              </a:spcAft>
+              <a:buClr>
+                <a:srgbClr val="FF5050"/>
+              </a:buClr>
+              <a:buSzPts val="2000"/>
+              <a:buFont typeface="Times New Roman"/>
+              <a:buChar char="o"/>
+              <a:defRPr sz="2000" b="0" i="0" u="none" strike="noStrike" cap="none">
+                <a:solidFill>
+                  <a:schemeClr val="dk1"/>
+                </a:solidFill>
+                <a:latin typeface="Times New Roman"/>
+                <a:ea typeface="Times New Roman"/>
+                <a:cs typeface="Times New Roman"/>
+                <a:sym typeface="Times New Roman"/>
+              </a:defRPr>
+            </a:lvl8pPr>
+            <a:lvl9pPr marL="4114800" marR="0" lvl="8" indent="-355600" algn="l" rtl="0">
+              <a:lnSpc>
+                <a:spcPct val="100000"/>
+              </a:lnSpc>
+              <a:spcBef>
+                <a:spcPts val="400"/>
+              </a:spcBef>
+              <a:spcAft>
+                <a:spcPts val="0"/>
+              </a:spcAft>
+              <a:buClr>
+                <a:srgbClr val="FF5050"/>
+              </a:buClr>
+              <a:buSzPts val="2000"/>
+              <a:buFont typeface="Times New Roman"/>
+              <a:buChar char="o"/>
+              <a:defRPr sz="2000" b="0" i="0" u="none" strike="noStrike" cap="none">
+                <a:solidFill>
+                  <a:schemeClr val="dk1"/>
+                </a:solidFill>
+                <a:latin typeface="Times New Roman"/>
+                <a:ea typeface="Times New Roman"/>
+                <a:cs typeface="Times New Roman"/>
+                <a:sym typeface="Times New Roman"/>
+              </a:defRPr>
+            </a:lvl9pPr>
+          </a:lstStyle>
+          <a:p>
+            <a:pPr>
+              <a:lnSpc>
+                <a:spcPts val="3000"/>
+              </a:lnSpc>
+            </a:pPr>
+            <a:r>
+              <a:rPr lang="en-US" altLang="zh-TW" sz="2000" dirty="0">
+                <a:latin typeface="Times New Roman" panose="02020603050405020304" pitchFamily="18" charset="0"/>
+                <a:ea typeface="標楷體" panose="03000509000000000000" pitchFamily="65" charset="-120"/>
+                <a:cs typeface="Times New Roman" panose="02020603050405020304" pitchFamily="18" charset="0"/>
+              </a:rPr>
+              <a:t>SDI to HDMI converter</a:t>
+            </a:r>
+          </a:p>
+          <a:p>
+            <a:pPr lvl="1">
+              <a:lnSpc>
+                <a:spcPts val="3000"/>
+              </a:lnSpc>
+            </a:pPr>
+            <a:r>
+              <a:rPr lang="zh-TW" altLang="en-US" sz="1600" dirty="0">
+                <a:solidFill>
+                  <a:schemeClr val="tx1"/>
+                </a:solidFill>
+                <a:latin typeface="Times New Roman" panose="02020603050405020304" pitchFamily="18" charset="0"/>
+                <a:ea typeface="標楷體" panose="03000509000000000000" pitchFamily="65" charset="-120"/>
+                <a:cs typeface="Times New Roman" panose="02020603050405020304" pitchFamily="18" charset="0"/>
+              </a:rPr>
+              <a:t>優點：</a:t>
+            </a:r>
+            <a:r>
+              <a:rPr lang="zh-TW" altLang="en-US" sz="1600" dirty="0">
+                <a:latin typeface="Times New Roman" panose="02020603050405020304" pitchFamily="18" charset="0"/>
+                <a:ea typeface="標楷體" panose="03000509000000000000" pitchFamily="65" charset="-120"/>
+                <a:cs typeface="Times New Roman" panose="02020603050405020304" pitchFamily="18" charset="0"/>
+              </a:rPr>
+              <a:t>降低 </a:t>
+            </a:r>
+            <a:r>
+              <a:rPr lang="en-US" altLang="zh-TW" sz="1600" dirty="0">
+                <a:latin typeface="Times New Roman" panose="02020603050405020304" pitchFamily="18" charset="0"/>
+                <a:ea typeface="標楷體" panose="03000509000000000000" pitchFamily="65" charset="-120"/>
+                <a:cs typeface="Times New Roman" panose="02020603050405020304" pitchFamily="18" charset="0"/>
+              </a:rPr>
+              <a:t>FPGA </a:t>
+            </a:r>
+            <a:r>
+              <a:rPr lang="zh-TW" altLang="en-US" sz="1600" dirty="0">
+                <a:latin typeface="Times New Roman" panose="02020603050405020304" pitchFamily="18" charset="0"/>
+                <a:ea typeface="標楷體" panose="03000509000000000000" pitchFamily="65" charset="-120"/>
+                <a:cs typeface="Times New Roman" panose="02020603050405020304" pitchFamily="18" charset="0"/>
+              </a:rPr>
+              <a:t>高速接收端的整合難度</a:t>
+            </a:r>
+            <a:endParaRPr lang="en-US" altLang="zh-TW" sz="1600" dirty="0">
+              <a:solidFill>
+                <a:schemeClr val="tx1"/>
+              </a:solidFill>
+              <a:latin typeface="Times New Roman" panose="02020603050405020304" pitchFamily="18" charset="0"/>
+              <a:ea typeface="標楷體" panose="03000509000000000000" pitchFamily="65" charset="-120"/>
+              <a:cs typeface="Times New Roman" panose="02020603050405020304" pitchFamily="18" charset="0"/>
+            </a:endParaRPr>
+          </a:p>
+          <a:p>
+            <a:pPr lvl="1">
+              <a:lnSpc>
+                <a:spcPts val="3000"/>
+              </a:lnSpc>
+            </a:pPr>
+            <a:r>
+              <a:rPr lang="zh-TW" altLang="en-US" sz="1600" dirty="0">
+                <a:solidFill>
+                  <a:schemeClr val="tx1"/>
+                </a:solidFill>
+                <a:latin typeface="Times New Roman" panose="02020603050405020304" pitchFamily="18" charset="0"/>
+                <a:ea typeface="標楷體" panose="03000509000000000000" pitchFamily="65" charset="-120"/>
+                <a:cs typeface="Times New Roman" panose="02020603050405020304" pitchFamily="18" charset="0"/>
+              </a:rPr>
+              <a:t>缺點：</a:t>
+            </a:r>
+            <a:r>
+              <a:rPr lang="zh-TW" altLang="en-US" sz="1600" dirty="0">
+                <a:latin typeface="Times New Roman" panose="02020603050405020304" pitchFamily="18" charset="0"/>
+                <a:ea typeface="標楷體" panose="03000509000000000000" pitchFamily="65" charset="-120"/>
+                <a:cs typeface="Times New Roman" panose="02020603050405020304" pitchFamily="18" charset="0"/>
+              </a:rPr>
+              <a:t>轉換器可能改變原始 </a:t>
+            </a:r>
+            <a:r>
+              <a:rPr lang="en-US" altLang="zh-TW" sz="1600" dirty="0">
+                <a:latin typeface="Times New Roman" panose="02020603050405020304" pitchFamily="18" charset="0"/>
+                <a:ea typeface="標楷體" panose="03000509000000000000" pitchFamily="65" charset="-120"/>
+                <a:cs typeface="Times New Roman" panose="02020603050405020304" pitchFamily="18" charset="0"/>
+              </a:rPr>
+              <a:t>SDI </a:t>
+            </a:r>
+            <a:r>
+              <a:rPr lang="zh-TW" altLang="en-US" sz="1600" dirty="0">
+                <a:latin typeface="Times New Roman" panose="02020603050405020304" pitchFamily="18" charset="0"/>
+                <a:ea typeface="標楷體" panose="03000509000000000000" pitchFamily="65" charset="-120"/>
+                <a:cs typeface="Times New Roman" panose="02020603050405020304" pitchFamily="18" charset="0"/>
+              </a:rPr>
+              <a:t>資料或出現延遲</a:t>
+            </a:r>
+            <a:endParaRPr lang="en-US" altLang="zh-TW" sz="1600" dirty="0">
+              <a:solidFill>
+                <a:schemeClr val="tx1"/>
+              </a:solidFill>
+              <a:latin typeface="Times New Roman" panose="02020603050405020304" pitchFamily="18" charset="0"/>
+              <a:ea typeface="標楷體" panose="03000509000000000000" pitchFamily="65" charset="-120"/>
+              <a:cs typeface="Times New Roman" panose="02020603050405020304" pitchFamily="18" charset="0"/>
+            </a:endParaRPr>
+          </a:p>
+          <a:p>
+            <a:pPr lvl="1">
+              <a:lnSpc>
+                <a:spcPts val="3000"/>
+              </a:lnSpc>
+            </a:pPr>
+            <a:r>
+              <a:rPr lang="zh-TW" altLang="en-US" sz="1600" dirty="0">
+                <a:solidFill>
+                  <a:schemeClr val="tx1"/>
+                </a:solidFill>
+                <a:latin typeface="Times New Roman" panose="02020603050405020304" pitchFamily="18" charset="0"/>
+                <a:ea typeface="標楷體" panose="03000509000000000000" pitchFamily="65" charset="-120"/>
+                <a:cs typeface="Times New Roman" panose="02020603050405020304" pitchFamily="18" charset="0"/>
+              </a:rPr>
+              <a:t>架構</a:t>
+            </a:r>
+            <a:endParaRPr lang="en-US" altLang="zh-TW" sz="1600" dirty="0">
+              <a:solidFill>
+                <a:schemeClr val="tx1"/>
+              </a:solidFill>
+              <a:latin typeface="Times New Roman" panose="02020603050405020304" pitchFamily="18" charset="0"/>
+              <a:ea typeface="標楷體" panose="03000509000000000000" pitchFamily="65" charset="-120"/>
+              <a:cs typeface="Times New Roman" panose="02020603050405020304" pitchFamily="18" charset="0"/>
+            </a:endParaRPr>
+          </a:p>
+          <a:p>
+            <a:pPr lvl="1">
+              <a:lnSpc>
+                <a:spcPts val="3000"/>
+              </a:lnSpc>
+            </a:pPr>
+            <a:endParaRPr lang="en-US" altLang="zh-TW" sz="1600" dirty="0">
+              <a:solidFill>
+                <a:schemeClr val="tx1"/>
+              </a:solidFill>
+              <a:latin typeface="Times New Roman" panose="02020603050405020304" pitchFamily="18" charset="0"/>
+              <a:ea typeface="標楷體" panose="03000509000000000000" pitchFamily="65" charset="-120"/>
+              <a:cs typeface="Times New Roman" panose="02020603050405020304" pitchFamily="18" charset="0"/>
+            </a:endParaRPr>
+          </a:p>
+          <a:p>
+            <a:pPr lvl="1">
+              <a:lnSpc>
+                <a:spcPts val="3000"/>
+              </a:lnSpc>
+            </a:pPr>
+            <a:endParaRPr lang="en-US" altLang="zh-TW" sz="1600" dirty="0">
+              <a:solidFill>
+                <a:schemeClr val="tx1"/>
+              </a:solidFill>
+              <a:latin typeface="Times New Roman" panose="02020603050405020304" pitchFamily="18" charset="0"/>
+              <a:ea typeface="標楷體" panose="03000509000000000000" pitchFamily="65" charset="-120"/>
+              <a:cs typeface="Times New Roman" panose="02020603050405020304" pitchFamily="18" charset="0"/>
+            </a:endParaRPr>
+          </a:p>
+          <a:p>
+            <a:pPr>
+              <a:lnSpc>
+                <a:spcPts val="3000"/>
+              </a:lnSpc>
+            </a:pPr>
+            <a:r>
+              <a:rPr lang="en-US" altLang="zh-TW" sz="2000" dirty="0">
+                <a:solidFill>
+                  <a:schemeClr val="tx1"/>
+                </a:solidFill>
+                <a:latin typeface="Times New Roman" panose="02020603050405020304" pitchFamily="18" charset="0"/>
+                <a:ea typeface="標楷體" panose="03000509000000000000" pitchFamily="65" charset="-120"/>
+                <a:cs typeface="Times New Roman" panose="02020603050405020304" pitchFamily="18" charset="0"/>
+              </a:rPr>
+              <a:t>SDI daughter board</a:t>
+            </a:r>
+            <a:endParaRPr lang="en-US" altLang="zh-TW" sz="1600" dirty="0">
+              <a:solidFill>
+                <a:schemeClr val="tx1"/>
+              </a:solidFill>
+              <a:latin typeface="Times New Roman" panose="02020603050405020304" pitchFamily="18" charset="0"/>
+              <a:ea typeface="標楷體" panose="03000509000000000000" pitchFamily="65" charset="-120"/>
+              <a:cs typeface="Times New Roman" panose="02020603050405020304" pitchFamily="18" charset="0"/>
+            </a:endParaRPr>
+          </a:p>
+          <a:p>
+            <a:pPr lvl="1">
+              <a:lnSpc>
+                <a:spcPts val="3000"/>
+              </a:lnSpc>
+            </a:pPr>
+            <a:r>
+              <a:rPr lang="zh-TW" altLang="en-US" sz="1600" dirty="0">
+                <a:solidFill>
+                  <a:schemeClr val="tx1"/>
+                </a:solidFill>
+                <a:latin typeface="Times New Roman" panose="02020603050405020304" pitchFamily="18" charset="0"/>
+                <a:ea typeface="標楷體" panose="03000509000000000000" pitchFamily="65" charset="-120"/>
+                <a:cs typeface="Times New Roman" panose="02020603050405020304" pitchFamily="18" charset="0"/>
+              </a:rPr>
+              <a:t>優點：能直接</a:t>
+            </a:r>
+            <a:r>
+              <a:rPr lang="zh-TW" altLang="en-US" sz="1600" dirty="0">
+                <a:latin typeface="Times New Roman" panose="02020603050405020304" pitchFamily="18" charset="0"/>
+                <a:ea typeface="標楷體" panose="03000509000000000000" pitchFamily="65" charset="-120"/>
+                <a:cs typeface="Times New Roman" panose="02020603050405020304" pitchFamily="18" charset="0"/>
+              </a:rPr>
+              <a:t>控制資料格式及 </a:t>
+            </a:r>
+            <a:r>
+              <a:rPr lang="en-US" altLang="zh-TW" sz="1600" dirty="0">
+                <a:latin typeface="Times New Roman" panose="02020603050405020304" pitchFamily="18" charset="0"/>
+                <a:ea typeface="標楷體" panose="03000509000000000000" pitchFamily="65" charset="-120"/>
+                <a:cs typeface="Times New Roman" panose="02020603050405020304" pitchFamily="18" charset="0"/>
+              </a:rPr>
+              <a:t>FPGA </a:t>
+            </a:r>
+            <a:r>
+              <a:rPr lang="zh-TW" altLang="en-US" sz="1600" dirty="0">
+                <a:latin typeface="Times New Roman" panose="02020603050405020304" pitchFamily="18" charset="0"/>
+                <a:ea typeface="標楷體" panose="03000509000000000000" pitchFamily="65" charset="-120"/>
+                <a:cs typeface="Times New Roman" panose="02020603050405020304" pitchFamily="18" charset="0"/>
+              </a:rPr>
+              <a:t>內的影像處理流程</a:t>
+            </a:r>
+            <a:endParaRPr lang="en-US" altLang="zh-TW" sz="1600" dirty="0">
+              <a:solidFill>
+                <a:schemeClr val="tx1"/>
+              </a:solidFill>
+              <a:latin typeface="Times New Roman" panose="02020603050405020304" pitchFamily="18" charset="0"/>
+              <a:ea typeface="標楷體" panose="03000509000000000000" pitchFamily="65" charset="-120"/>
+              <a:cs typeface="Times New Roman" panose="02020603050405020304" pitchFamily="18" charset="0"/>
+            </a:endParaRPr>
+          </a:p>
+          <a:p>
+            <a:pPr lvl="1">
+              <a:lnSpc>
+                <a:spcPts val="3000"/>
+              </a:lnSpc>
+            </a:pPr>
+            <a:r>
+              <a:rPr lang="zh-TW" altLang="en-US" sz="1600" dirty="0">
+                <a:solidFill>
+                  <a:schemeClr val="tx1"/>
+                </a:solidFill>
+                <a:latin typeface="Times New Roman" panose="02020603050405020304" pitchFamily="18" charset="0"/>
+                <a:ea typeface="標楷體" panose="03000509000000000000" pitchFamily="65" charset="-120"/>
+                <a:cs typeface="Times New Roman" panose="02020603050405020304" pitchFamily="18" charset="0"/>
+              </a:rPr>
+              <a:t>缺點：</a:t>
+            </a:r>
+            <a:r>
+              <a:rPr lang="zh-TW" altLang="en-US" sz="1600" dirty="0">
+                <a:latin typeface="Times New Roman" panose="02020603050405020304" pitchFamily="18" charset="0"/>
+                <a:ea typeface="標楷體" panose="03000509000000000000" pitchFamily="65" charset="-120"/>
+                <a:cs typeface="Times New Roman" panose="02020603050405020304" pitchFamily="18" charset="0"/>
+              </a:rPr>
+              <a:t>需要處理 </a:t>
+            </a:r>
+            <a:r>
+              <a:rPr lang="en-US" altLang="zh-TW" sz="1600" dirty="0">
+                <a:latin typeface="Times New Roman" panose="02020603050405020304" pitchFamily="18" charset="0"/>
+                <a:ea typeface="標楷體" panose="03000509000000000000" pitchFamily="65" charset="-120"/>
+                <a:cs typeface="Times New Roman" panose="02020603050405020304" pitchFamily="18" charset="0"/>
+              </a:rPr>
+              <a:t>SDI </a:t>
+            </a:r>
+            <a:r>
+              <a:rPr lang="zh-TW" altLang="en-US" sz="1600" dirty="0">
+                <a:latin typeface="Times New Roman" panose="02020603050405020304" pitchFamily="18" charset="0"/>
+                <a:ea typeface="標楷體" panose="03000509000000000000" pitchFamily="65" charset="-120"/>
+                <a:cs typeface="Times New Roman" panose="02020603050405020304" pitchFamily="18" charset="0"/>
+              </a:rPr>
+              <a:t>接收器的配置、時脈同步、資料打包</a:t>
+            </a:r>
+            <a:endParaRPr lang="en-US" altLang="zh-TW" sz="1600" dirty="0">
+              <a:solidFill>
+                <a:schemeClr val="tx1"/>
+              </a:solidFill>
+              <a:latin typeface="Times New Roman" panose="02020603050405020304" pitchFamily="18" charset="0"/>
+              <a:ea typeface="標楷體" panose="03000509000000000000" pitchFamily="65" charset="-120"/>
+              <a:cs typeface="Times New Roman" panose="02020603050405020304" pitchFamily="18" charset="0"/>
+            </a:endParaRPr>
+          </a:p>
+          <a:p>
+            <a:pPr lvl="1">
+              <a:lnSpc>
+                <a:spcPts val="3000"/>
+              </a:lnSpc>
+            </a:pPr>
+            <a:r>
+              <a:rPr lang="zh-TW" altLang="en-US" sz="1600" dirty="0">
+                <a:solidFill>
+                  <a:schemeClr val="tx1"/>
+                </a:solidFill>
+                <a:latin typeface="Times New Roman" panose="02020603050405020304" pitchFamily="18" charset="0"/>
+                <a:ea typeface="標楷體" panose="03000509000000000000" pitchFamily="65" charset="-120"/>
+                <a:cs typeface="Times New Roman" panose="02020603050405020304" pitchFamily="18" charset="0"/>
+              </a:rPr>
+              <a:t>架構</a:t>
+            </a:r>
+            <a:endParaRPr lang="en-US" altLang="zh-TW" sz="1600" dirty="0">
+              <a:solidFill>
+                <a:schemeClr val="tx1"/>
+              </a:solidFill>
+              <a:latin typeface="Times New Roman" panose="02020603050405020304" pitchFamily="18" charset="0"/>
+              <a:ea typeface="標楷體" panose="03000509000000000000" pitchFamily="65" charset="-120"/>
+              <a:cs typeface="Times New Roman" panose="02020603050405020304" pitchFamily="18" charset="0"/>
+            </a:endParaRPr>
+          </a:p>
+        </p:txBody>
+      </p:sp>
+      <p:pic>
+        <p:nvPicPr>
+          <p:cNvPr id="9" name="圖片 8">
+            <a:extLst>
+              <a:ext uri="{FF2B5EF4-FFF2-40B4-BE49-F238E27FC236}">
+                <a16:creationId xmlns:a16="http://schemas.microsoft.com/office/drawing/2014/main" id="{555C8227-4C2D-4909-A366-EE527F91B4B6}"/>
+              </a:ext>
+            </a:extLst>
+          </p:cNvPr>
+          <p:cNvPicPr>
+            <a:picLocks noChangeAspect="1"/>
+          </p:cNvPicPr>
+          <p:nvPr/>
+        </p:nvPicPr>
+        <p:blipFill>
+          <a:blip r:embed="rId3"/>
+          <a:stretch>
+            <a:fillRect/>
+          </a:stretch>
+        </p:blipFill>
+        <p:spPr>
+          <a:xfrm>
+            <a:off x="786305" y="2732900"/>
+            <a:ext cx="8333390" cy="892273"/>
+          </a:xfrm>
+          <a:prstGeom prst="rect">
+            <a:avLst/>
+          </a:prstGeom>
+        </p:spPr>
+      </p:pic>
+      <p:pic>
+        <p:nvPicPr>
+          <p:cNvPr id="11" name="圖片 10">
+            <a:extLst>
+              <a:ext uri="{FF2B5EF4-FFF2-40B4-BE49-F238E27FC236}">
+                <a16:creationId xmlns:a16="http://schemas.microsoft.com/office/drawing/2014/main" id="{2B683808-EBB6-CB75-3915-CE3556387D05}"/>
+              </a:ext>
+            </a:extLst>
+          </p:cNvPr>
+          <p:cNvPicPr>
+            <a:picLocks noChangeAspect="1"/>
+          </p:cNvPicPr>
+          <p:nvPr/>
+        </p:nvPicPr>
+        <p:blipFill>
+          <a:blip r:embed="rId4"/>
+          <a:stretch>
+            <a:fillRect/>
+          </a:stretch>
+        </p:blipFill>
+        <p:spPr>
+          <a:xfrm>
+            <a:off x="786305" y="5422216"/>
+            <a:ext cx="8333390" cy="874016"/>
+          </a:xfrm>
+          <a:prstGeom prst="rect">
+            <a:avLst/>
+          </a:prstGeom>
+        </p:spPr>
+      </p:pic>
+    </p:spTree>
+    <p:extLst>
+      <p:ext uri="{BB962C8B-B14F-4D97-AF65-F5344CB8AC3E}">
+        <p14:creationId xmlns:p14="http://schemas.microsoft.com/office/powerpoint/2010/main" val="377023877"/>
+      </p:ext>
+    </p:extLst>
+  </p:cSld>
+  <p:clrMapOvr>
+    <a:masterClrMapping/>
+  </p:clrMapOvr>
+</p:sld>
+</file>
+
+<file path=ppt/slides/slide4.xml><?xml version="1.0" encoding="utf-8"?>
+<p:sld xmlns:a="http://schemas.openxmlformats.org/drawingml/2006/main" xmlns:r="http://schemas.openxmlformats.org/officeDocument/2006/relationships" xmlns:p="http://schemas.openxmlformats.org/presentationml/2006/main">
+  <p:cSld>
+    <p:spTree>
+      <p:nvGrpSpPr>
+        <p:cNvPr id="1" name="">
+          <a:extLst>
+            <a:ext uri="{FF2B5EF4-FFF2-40B4-BE49-F238E27FC236}">
+              <a16:creationId xmlns:a16="http://schemas.microsoft.com/office/drawing/2014/main" id="{C25E9AAA-7E36-1E17-83F9-FD3A18A28BE9}"/>
+            </a:ext>
+          </a:extLst>
+        </p:cNvPr>
+        <p:cNvGrpSpPr/>
+        <p:nvPr/>
+      </p:nvGrpSpPr>
+      <p:grpSpPr>
+        <a:xfrm>
+          <a:off x="0" y="0"/>
+          <a:ext cx="0" cy="0"/>
+          <a:chOff x="0" y="0"/>
+          <a:chExt cx="0" cy="0"/>
+        </a:xfrm>
+      </p:grpSpPr>
+      <p:sp>
+        <p:nvSpPr>
+          <p:cNvPr id="15" name="標題 1">
+            <a:extLst>
+              <a:ext uri="{FF2B5EF4-FFF2-40B4-BE49-F238E27FC236}">
+                <a16:creationId xmlns:a16="http://schemas.microsoft.com/office/drawing/2014/main" id="{142C8726-E890-9988-40FC-8984FDA21FEE}"/>
+              </a:ext>
+            </a:extLst>
+          </p:cNvPr>
+          <p:cNvSpPr>
+            <a:spLocks noGrp="1"/>
+          </p:cNvSpPr>
+          <p:nvPr>
+            <p:ph type="title"/>
+          </p:nvPr>
+        </p:nvSpPr>
+        <p:spPr>
+          <a:xfrm>
+            <a:off x="609602" y="609600"/>
+            <a:ext cx="8077200" cy="533400"/>
+          </a:xfrm>
+          <a:ln>
+            <a:noFill/>
+          </a:ln>
+        </p:spPr>
+        <p:txBody>
+          <a:bodyPr/>
+          <a:lstStyle/>
+          <a:p>
+            <a:r>
+              <a:rPr lang="zh-TW" altLang="en-US" dirty="0">
+                <a:latin typeface="Times New Roman" panose="02020603050405020304" pitchFamily="18" charset="0"/>
+                <a:ea typeface="標楷體" panose="03000509000000000000" pitchFamily="65" charset="-120"/>
+                <a:cs typeface="Times New Roman" panose="02020603050405020304" pitchFamily="18" charset="0"/>
+              </a:rPr>
+              <a:t>本次進度</a:t>
+            </a:r>
+            <a:r>
+              <a:rPr lang="en-US" altLang="zh-TW" dirty="0">
+                <a:latin typeface="Times New Roman" panose="02020603050405020304" pitchFamily="18" charset="0"/>
+                <a:ea typeface="標楷體" panose="03000509000000000000" pitchFamily="65" charset="-120"/>
+                <a:cs typeface="Times New Roman" panose="02020603050405020304" pitchFamily="18" charset="0"/>
+              </a:rPr>
+              <a:t>: </a:t>
+            </a:r>
+            <a:r>
+              <a:rPr lang="en-US" altLang="zh-TW" dirty="0" err="1">
+                <a:latin typeface="Times New Roman" panose="02020603050405020304" pitchFamily="18" charset="0"/>
+                <a:ea typeface="標楷體" panose="03000509000000000000" pitchFamily="65" charset="-120"/>
+                <a:cs typeface="Times New Roman" panose="02020603050405020304" pitchFamily="18" charset="0"/>
+              </a:rPr>
+              <a:t>LiteX</a:t>
+            </a:r>
+            <a:r>
+              <a:rPr lang="en-US" altLang="zh-TW" dirty="0">
+                <a:latin typeface="Times New Roman" panose="02020603050405020304" pitchFamily="18" charset="0"/>
+                <a:ea typeface="標楷體" panose="03000509000000000000" pitchFamily="65" charset="-120"/>
+                <a:cs typeface="Times New Roman" panose="02020603050405020304" pitchFamily="18" charset="0"/>
+              </a:rPr>
+              <a:t> / SDI </a:t>
             </a:r>
             <a:endParaRPr lang="zh-TW" altLang="en-US" dirty="0">
               <a:latin typeface="Times New Roman" panose="02020603050405020304" pitchFamily="18" charset="0"/>
@@ -8096,7 +9166,7 @@
                 <a:ea typeface="標楷體" panose="03000509000000000000" pitchFamily="65" charset="-120"/>
                 <a:cs typeface="Times New Roman" panose="02020603050405020304" pitchFamily="18" charset="0"/>
               </a:rPr>
-              <a:t>定位</a:t>
+              <a:t> </a:t>
             </a:r>
             <a:endParaRPr lang="en-US" altLang="zh-TW" sz="2000" dirty="0">
               <a:solidFill>
@@ -8204,55 +9274,40 @@
           </a:p>
         </p:txBody>
       </p:sp>
-      <p:sp>
-        <p:nvSpPr>
-          <p:cNvPr id="5" name="文字方塊 4">
+      <p:pic>
+        <p:nvPicPr>
+          <p:cNvPr id="9" name="圖片 8">
             <a:extLst>
               <a:ext uri="{FF2B5EF4-FFF2-40B4-BE49-F238E27FC236}">
-                <a16:creationId xmlns:a16="http://schemas.microsoft.com/office/drawing/2014/main" id="{DB8BF237-AE2C-BCBD-03CB-07C643D7BB9F}"/>
+                <a16:creationId xmlns:a16="http://schemas.microsoft.com/office/drawing/2014/main" id="{D05EC9F3-3B1F-0804-ABB2-FED1F868223B}"/>
               </a:ext>
             </a:extLst>
           </p:cNvPr>
-          <p:cNvSpPr txBox="1"/>
+          <p:cNvPicPr>
+            <a:picLocks noChangeAspect="1"/>
+          </p:cNvPicPr>
           <p:nvPr/>
-        </p:nvSpPr>
+        </p:nvPicPr>
+        <p:blipFill>
+          <a:blip r:embed="rId3"/>
+          <a:stretch>
+            <a:fillRect/>
+          </a:stretch>
+        </p:blipFill>
         <p:spPr>
           <a:xfrm>
-            <a:off x="1787236" y="6384072"/>
-            <a:ext cx="5802283" cy="276999"/>
+            <a:off x="5383924" y="2318143"/>
+            <a:ext cx="3518336" cy="4355484"/>
           </a:xfrm>
           <a:prstGeom prst="rect">
             <a:avLst/>
           </a:prstGeom>
-          <a:noFill/>
         </p:spPr>
-        <p:txBody>
-          <a:bodyPr wrap="square">
-            <a:spAutoFit/>
-          </a:bodyPr>
-          <a:lstStyle/>
-          <a:p>
-            <a:r>
-              <a:rPr lang="en-US" altLang="zh-TW" sz="1200" dirty="0">
-                <a:latin typeface="Times New Roman" panose="02020603050405020304" pitchFamily="18" charset="0"/>
-                <a:cs typeface="Times New Roman" panose="02020603050405020304" pitchFamily="18" charset="0"/>
-              </a:rPr>
-              <a:t>[1] </a:t>
-            </a:r>
-            <a:r>
-              <a:rPr lang="zh-TW" altLang="en-US" sz="1200" dirty="0">
-                <a:latin typeface="Times New Roman" panose="02020603050405020304" pitchFamily="18" charset="0"/>
-                <a:cs typeface="Times New Roman" panose="02020603050405020304" pitchFamily="18" charset="0"/>
-              </a:rPr>
-              <a:t>https://github.com/enjoy-digital/litex?utm_source=chatgpt.com</a:t>
-            </a:r>
-          </a:p>
-        </p:txBody>
-      </p:sp>
+      </p:pic>
     </p:spTree>
     <p:extLst>
       <p:ext uri="{BB962C8B-B14F-4D97-AF65-F5344CB8AC3E}">
-        <p14:creationId xmlns:p14="http://schemas.microsoft.com/office/powerpoint/2010/main" val="377023877"/>
+        <p14:creationId xmlns:p14="http://schemas.microsoft.com/office/powerpoint/2010/main" val="1685642597"/>
       </p:ext>
     </p:extLst>
   </p:cSld>
@@ -8262,7 +9317,560 @@
 </p:sld>
 </file>
 
-<file path=ppt/slides/slide4.xml><?xml version="1.0" encoding="utf-8"?>
+<file path=ppt/slides/slide5.xml><?xml version="1.0" encoding="utf-8"?>
+<p:sld xmlns:a="http://schemas.openxmlformats.org/drawingml/2006/main" xmlns:r="http://schemas.openxmlformats.org/officeDocument/2006/relationships" xmlns:p="http://schemas.openxmlformats.org/presentationml/2006/main">
+  <p:cSld>
+    <p:spTree>
+      <p:nvGrpSpPr>
+        <p:cNvPr id="1" name="">
+          <a:extLst>
+            <a:ext uri="{FF2B5EF4-FFF2-40B4-BE49-F238E27FC236}">
+              <a16:creationId xmlns:a16="http://schemas.microsoft.com/office/drawing/2014/main" id="{C25E9AAA-7E36-1E17-83F9-FD3A18A28BE9}"/>
+            </a:ext>
+          </a:extLst>
+        </p:cNvPr>
+        <p:cNvGrpSpPr/>
+        <p:nvPr/>
+      </p:nvGrpSpPr>
+      <p:grpSpPr>
+        <a:xfrm>
+          <a:off x="0" y="0"/>
+          <a:ext cx="0" cy="0"/>
+          <a:chOff x="0" y="0"/>
+          <a:chExt cx="0" cy="0"/>
+        </a:xfrm>
+      </p:grpSpPr>
+      <p:sp>
+        <p:nvSpPr>
+          <p:cNvPr id="15" name="標題 1">
+            <a:extLst>
+              <a:ext uri="{FF2B5EF4-FFF2-40B4-BE49-F238E27FC236}">
+                <a16:creationId xmlns:a16="http://schemas.microsoft.com/office/drawing/2014/main" id="{142C8726-E890-9988-40FC-8984FDA21FEE}"/>
+              </a:ext>
+            </a:extLst>
+          </p:cNvPr>
+          <p:cNvSpPr>
+            <a:spLocks noGrp="1"/>
+          </p:cNvSpPr>
+          <p:nvPr>
+            <p:ph type="title"/>
+          </p:nvPr>
+        </p:nvSpPr>
+        <p:spPr>
+          <a:xfrm>
+            <a:off x="609602" y="609600"/>
+            <a:ext cx="8077200" cy="533400"/>
+          </a:xfrm>
+          <a:ln>
+            <a:noFill/>
+          </a:ln>
+        </p:spPr>
+        <p:txBody>
+          <a:bodyPr/>
+          <a:lstStyle/>
+          <a:p>
+            <a:r>
+              <a:rPr lang="zh-TW" altLang="en-US" dirty="0">
+                <a:latin typeface="Times New Roman" panose="02020603050405020304" pitchFamily="18" charset="0"/>
+                <a:ea typeface="標楷體" panose="03000509000000000000" pitchFamily="65" charset="-120"/>
+                <a:cs typeface="Times New Roman" panose="02020603050405020304" pitchFamily="18" charset="0"/>
+              </a:rPr>
+              <a:t>本次進度</a:t>
+            </a:r>
+            <a:r>
+              <a:rPr lang="en-US" altLang="zh-TW" dirty="0">
+                <a:latin typeface="Times New Roman" panose="02020603050405020304" pitchFamily="18" charset="0"/>
+                <a:ea typeface="標楷體" panose="03000509000000000000" pitchFamily="65" charset="-120"/>
+                <a:cs typeface="Times New Roman" panose="02020603050405020304" pitchFamily="18" charset="0"/>
+              </a:rPr>
+              <a:t>: </a:t>
+            </a:r>
+            <a:r>
+              <a:rPr lang="en-US" altLang="zh-TW" dirty="0" err="1">
+                <a:latin typeface="Times New Roman" panose="02020603050405020304" pitchFamily="18" charset="0"/>
+                <a:ea typeface="標楷體" panose="03000509000000000000" pitchFamily="65" charset="-120"/>
+                <a:cs typeface="Times New Roman" panose="02020603050405020304" pitchFamily="18" charset="0"/>
+              </a:rPr>
+              <a:t>LiteX</a:t>
+            </a:r>
+            <a:r>
+              <a:rPr lang="en-US" altLang="zh-TW" dirty="0">
+                <a:latin typeface="Times New Roman" panose="02020603050405020304" pitchFamily="18" charset="0"/>
+                <a:ea typeface="標楷體" panose="03000509000000000000" pitchFamily="65" charset="-120"/>
+                <a:cs typeface="Times New Roman" panose="02020603050405020304" pitchFamily="18" charset="0"/>
+              </a:rPr>
+              <a:t> / SDI </a:t>
+            </a:r>
+            <a:endParaRPr lang="zh-TW" altLang="en-US" dirty="0">
+              <a:latin typeface="Times New Roman" panose="02020603050405020304" pitchFamily="18" charset="0"/>
+              <a:ea typeface="標楷體" panose="03000509000000000000" pitchFamily="65" charset="-120"/>
+              <a:cs typeface="Times New Roman" panose="02020603050405020304" pitchFamily="18" charset="0"/>
+            </a:endParaRPr>
+          </a:p>
+        </p:txBody>
+      </p:sp>
+      <p:sp>
+        <p:nvSpPr>
+          <p:cNvPr id="2" name="文字版面配置區 6">
+            <a:extLst>
+              <a:ext uri="{FF2B5EF4-FFF2-40B4-BE49-F238E27FC236}">
+                <a16:creationId xmlns:a16="http://schemas.microsoft.com/office/drawing/2014/main" id="{D929304B-5341-8BBF-E71F-AF5F2FE7268A}"/>
+              </a:ext>
+            </a:extLst>
+          </p:cNvPr>
+          <p:cNvSpPr txBox="1"/>
+          <p:nvPr/>
+        </p:nvSpPr>
+        <p:spPr>
+          <a:xfrm>
+            <a:off x="609602" y="935857"/>
+            <a:ext cx="8686796" cy="4700685"/>
+          </a:xfrm>
+          <a:prstGeom prst="rect">
+            <a:avLst/>
+          </a:prstGeom>
+          <a:noFill/>
+          <a:ln>
+            <a:noFill/>
+          </a:ln>
+        </p:spPr>
+        <p:txBody>
+          <a:bodyPr spcFirstLastPara="1" wrap="square" lIns="91425" tIns="45700" rIns="91425" bIns="45700" anchor="t" anchorCtr="0">
+            <a:noAutofit/>
+          </a:bodyPr>
+          <a:lstStyle>
+            <a:defPPr marR="0" lvl="0" algn="l" rtl="0">
+              <a:lnSpc>
+                <a:spcPct val="100000"/>
+              </a:lnSpc>
+              <a:spcBef>
+                <a:spcPts val="0"/>
+              </a:spcBef>
+              <a:spcAft>
+                <a:spcPts val="0"/>
+              </a:spcAft>
+            </a:defPPr>
+            <a:lvl1pPr marL="457200" marR="0" lvl="0" indent="-406400" algn="l" rtl="0">
+              <a:lnSpc>
+                <a:spcPct val="100000"/>
+              </a:lnSpc>
+              <a:spcBef>
+                <a:spcPts val="560"/>
+              </a:spcBef>
+              <a:spcAft>
+                <a:spcPts val="0"/>
+              </a:spcAft>
+              <a:buClr>
+                <a:schemeClr val="accent2"/>
+              </a:buClr>
+              <a:buSzPts val="2800"/>
+              <a:buFont typeface="Noto Sans Symbols"/>
+              <a:buChar char="❖"/>
+              <a:defRPr sz="2800" b="0" i="0" u="none" strike="noStrike" cap="none">
+                <a:solidFill>
+                  <a:schemeClr val="dk1"/>
+                </a:solidFill>
+                <a:latin typeface="Times New Roman"/>
+                <a:ea typeface="Times New Roman"/>
+                <a:cs typeface="Times New Roman"/>
+                <a:sym typeface="Times New Roman"/>
+              </a:defRPr>
+            </a:lvl1pPr>
+            <a:lvl2pPr marL="914400" marR="0" lvl="1" indent="-381000" algn="l" rtl="0">
+              <a:lnSpc>
+                <a:spcPct val="100000"/>
+              </a:lnSpc>
+              <a:spcBef>
+                <a:spcPts val="480"/>
+              </a:spcBef>
+              <a:spcAft>
+                <a:spcPts val="0"/>
+              </a:spcAft>
+              <a:buClr>
+                <a:srgbClr val="FF5050"/>
+              </a:buClr>
+              <a:buSzPts val="2400"/>
+              <a:buFont typeface="Noto Sans Symbols"/>
+              <a:buChar char="▪"/>
+              <a:defRPr sz="2400" b="0" i="0" u="none" strike="noStrike" cap="none">
+                <a:solidFill>
+                  <a:schemeClr val="dk1"/>
+                </a:solidFill>
+                <a:latin typeface="Times New Roman"/>
+                <a:ea typeface="Times New Roman"/>
+                <a:cs typeface="Times New Roman"/>
+                <a:sym typeface="Times New Roman"/>
+              </a:defRPr>
+            </a:lvl2pPr>
+            <a:lvl3pPr marL="1371600" marR="0" lvl="2" indent="-355600" algn="l" rtl="0">
+              <a:lnSpc>
+                <a:spcPct val="100000"/>
+              </a:lnSpc>
+              <a:spcBef>
+                <a:spcPts val="400"/>
+              </a:spcBef>
+              <a:spcAft>
+                <a:spcPts val="0"/>
+              </a:spcAft>
+              <a:buClr>
+                <a:srgbClr val="6699FF"/>
+              </a:buClr>
+              <a:buSzPts val="2000"/>
+              <a:buFont typeface="Times New Roman"/>
+              <a:buChar char="•"/>
+              <a:defRPr sz="2000" b="0" i="0" u="none" strike="noStrike" cap="none">
+                <a:solidFill>
+                  <a:schemeClr val="dk1"/>
+                </a:solidFill>
+                <a:latin typeface="Times New Roman"/>
+                <a:ea typeface="Times New Roman"/>
+                <a:cs typeface="Times New Roman"/>
+                <a:sym typeface="Times New Roman"/>
+              </a:defRPr>
+            </a:lvl3pPr>
+            <a:lvl4pPr marL="1828800" marR="0" lvl="3" indent="-355600" algn="l" rtl="0">
+              <a:lnSpc>
+                <a:spcPct val="100000"/>
+              </a:lnSpc>
+              <a:spcBef>
+                <a:spcPts val="400"/>
+              </a:spcBef>
+              <a:spcAft>
+                <a:spcPts val="0"/>
+              </a:spcAft>
+              <a:buClr>
+                <a:srgbClr val="FF5050"/>
+              </a:buClr>
+              <a:buSzPts val="2000"/>
+              <a:buFont typeface="Times New Roman"/>
+              <a:buChar char="o"/>
+              <a:defRPr sz="2000" b="0" i="0" u="none" strike="noStrike" cap="none">
+                <a:solidFill>
+                  <a:schemeClr val="dk1"/>
+                </a:solidFill>
+                <a:latin typeface="Times New Roman"/>
+                <a:ea typeface="Times New Roman"/>
+                <a:cs typeface="Times New Roman"/>
+                <a:sym typeface="Times New Roman"/>
+              </a:defRPr>
+            </a:lvl4pPr>
+            <a:lvl5pPr marL="2286000" marR="0" lvl="4" indent="-355600" algn="l" rtl="0">
+              <a:lnSpc>
+                <a:spcPct val="100000"/>
+              </a:lnSpc>
+              <a:spcBef>
+                <a:spcPts val="400"/>
+              </a:spcBef>
+              <a:spcAft>
+                <a:spcPts val="0"/>
+              </a:spcAft>
+              <a:buClr>
+                <a:srgbClr val="FF5050"/>
+              </a:buClr>
+              <a:buSzPts val="2000"/>
+              <a:buFont typeface="Times New Roman"/>
+              <a:buChar char="o"/>
+              <a:defRPr sz="2000" b="0" i="0" u="none" strike="noStrike" cap="none">
+                <a:solidFill>
+                  <a:schemeClr val="dk1"/>
+                </a:solidFill>
+                <a:latin typeface="Times New Roman"/>
+                <a:ea typeface="Times New Roman"/>
+                <a:cs typeface="Times New Roman"/>
+                <a:sym typeface="Times New Roman"/>
+              </a:defRPr>
+            </a:lvl5pPr>
+            <a:lvl6pPr marL="2743200" marR="0" lvl="5" indent="-355600" algn="l" rtl="0">
+              <a:lnSpc>
+                <a:spcPct val="100000"/>
+              </a:lnSpc>
+              <a:spcBef>
+                <a:spcPts val="400"/>
+              </a:spcBef>
+              <a:spcAft>
+                <a:spcPts val="0"/>
+              </a:spcAft>
+              <a:buClr>
+                <a:srgbClr val="FF5050"/>
+              </a:buClr>
+              <a:buSzPts val="2000"/>
+              <a:buFont typeface="Times New Roman"/>
+              <a:buChar char="o"/>
+              <a:defRPr sz="2000" b="0" i="0" u="none" strike="noStrike" cap="none">
+                <a:solidFill>
+                  <a:schemeClr val="dk1"/>
+                </a:solidFill>
+                <a:latin typeface="Times New Roman"/>
+                <a:ea typeface="Times New Roman"/>
+                <a:cs typeface="Times New Roman"/>
+                <a:sym typeface="Times New Roman"/>
+              </a:defRPr>
+            </a:lvl6pPr>
+            <a:lvl7pPr marL="3200400" marR="0" lvl="6" indent="-355600" algn="l" rtl="0">
+              <a:lnSpc>
+                <a:spcPct val="100000"/>
+              </a:lnSpc>
+              <a:spcBef>
+                <a:spcPts val="400"/>
+              </a:spcBef>
+              <a:spcAft>
+                <a:spcPts val="0"/>
+              </a:spcAft>
+              <a:buClr>
+                <a:srgbClr val="FF5050"/>
+              </a:buClr>
+              <a:buSzPts val="2000"/>
+              <a:buFont typeface="Times New Roman"/>
+              <a:buChar char="o"/>
+              <a:defRPr sz="2000" b="0" i="0" u="none" strike="noStrike" cap="none">
+                <a:solidFill>
+                  <a:schemeClr val="dk1"/>
+                </a:solidFill>
+                <a:latin typeface="Times New Roman"/>
+                <a:ea typeface="Times New Roman"/>
+                <a:cs typeface="Times New Roman"/>
+                <a:sym typeface="Times New Roman"/>
+              </a:defRPr>
+            </a:lvl7pPr>
+            <a:lvl8pPr marL="3657600" marR="0" lvl="7" indent="-355600" algn="l" rtl="0">
+              <a:lnSpc>
+                <a:spcPct val="100000"/>
+              </a:lnSpc>
+              <a:spcBef>
+                <a:spcPts val="400"/>
+              </a:spcBef>
+              <a:spcAft>
+                <a:spcPts val="0"/>
+              </a:spcAft>
+              <a:buClr>
+                <a:srgbClr val="FF5050"/>
+              </a:buClr>
+              <a:buSzPts val="2000"/>
+              <a:buFont typeface="Times New Roman"/>
+              <a:buChar char="o"/>
+              <a:defRPr sz="2000" b="0" i="0" u="none" strike="noStrike" cap="none">
+                <a:solidFill>
+                  <a:schemeClr val="dk1"/>
+                </a:solidFill>
+                <a:latin typeface="Times New Roman"/>
+                <a:ea typeface="Times New Roman"/>
+                <a:cs typeface="Times New Roman"/>
+                <a:sym typeface="Times New Roman"/>
+              </a:defRPr>
+            </a:lvl8pPr>
+            <a:lvl9pPr marL="4114800" marR="0" lvl="8" indent="-355600" algn="l" rtl="0">
+              <a:lnSpc>
+                <a:spcPct val="100000"/>
+              </a:lnSpc>
+              <a:spcBef>
+                <a:spcPts val="400"/>
+              </a:spcBef>
+              <a:spcAft>
+                <a:spcPts val="0"/>
+              </a:spcAft>
+              <a:buClr>
+                <a:srgbClr val="FF5050"/>
+              </a:buClr>
+              <a:buSzPts val="2000"/>
+              <a:buFont typeface="Times New Roman"/>
+              <a:buChar char="o"/>
+              <a:defRPr sz="2000" b="0" i="0" u="none" strike="noStrike" cap="none">
+                <a:solidFill>
+                  <a:schemeClr val="dk1"/>
+                </a:solidFill>
+                <a:latin typeface="Times New Roman"/>
+                <a:ea typeface="Times New Roman"/>
+                <a:cs typeface="Times New Roman"/>
+                <a:sym typeface="Times New Roman"/>
+              </a:defRPr>
+            </a:lvl9pPr>
+          </a:lstStyle>
+          <a:p>
+            <a:pPr>
+              <a:lnSpc>
+                <a:spcPts val="3000"/>
+              </a:lnSpc>
+            </a:pPr>
+            <a:endParaRPr lang="en-US" altLang="zh-TW" sz="2000" dirty="0">
+              <a:solidFill>
+                <a:schemeClr val="tx1"/>
+              </a:solidFill>
+              <a:latin typeface="Times New Roman" panose="02020603050405020304" pitchFamily="18" charset="0"/>
+              <a:ea typeface="標楷體" panose="03000509000000000000" pitchFamily="65" charset="-120"/>
+              <a:cs typeface="Times New Roman" panose="02020603050405020304" pitchFamily="18" charset="0"/>
+            </a:endParaRPr>
+          </a:p>
+          <a:p>
+            <a:pPr lvl="1">
+              <a:lnSpc>
+                <a:spcPts val="3000"/>
+              </a:lnSpc>
+            </a:pPr>
+            <a:r>
+              <a:rPr lang="zh-TW" altLang="en-US" sz="1600" dirty="0">
+                <a:latin typeface="Times New Roman" panose="02020603050405020304" pitchFamily="18" charset="0"/>
+                <a:ea typeface="標楷體" panose="03000509000000000000" pitchFamily="65" charset="-120"/>
+                <a:cs typeface="Times New Roman" panose="02020603050405020304" pitchFamily="18" charset="0"/>
+              </a:rPr>
+              <a:t>透過 </a:t>
+            </a:r>
+            <a:r>
+              <a:rPr lang="en-US" altLang="zh-TW" sz="1600" dirty="0">
+                <a:latin typeface="Times New Roman" panose="02020603050405020304" pitchFamily="18" charset="0"/>
+                <a:ea typeface="標楷體" panose="03000509000000000000" pitchFamily="65" charset="-120"/>
+                <a:cs typeface="Times New Roman" panose="02020603050405020304" pitchFamily="18" charset="0"/>
+              </a:rPr>
+              <a:t>Python </a:t>
+            </a:r>
+            <a:r>
+              <a:rPr lang="zh-TW" altLang="en-US" sz="1600" dirty="0">
+                <a:latin typeface="Times New Roman" panose="02020603050405020304" pitchFamily="18" charset="0"/>
+                <a:ea typeface="標楷體" panose="03000509000000000000" pitchFamily="65" charset="-120"/>
+                <a:cs typeface="Times New Roman" panose="02020603050405020304" pitchFamily="18" charset="0"/>
+              </a:rPr>
+              <a:t>描述與整合 </a:t>
+            </a:r>
+            <a:r>
+              <a:rPr lang="en-US" altLang="zh-TW" sz="1600" dirty="0">
+                <a:latin typeface="Times New Roman" panose="02020603050405020304" pitchFamily="18" charset="0"/>
+                <a:ea typeface="標楷體" panose="03000509000000000000" pitchFamily="65" charset="-120"/>
+                <a:cs typeface="Times New Roman" panose="02020603050405020304" pitchFamily="18" charset="0"/>
+              </a:rPr>
+              <a:t>FPGA </a:t>
+            </a:r>
+            <a:r>
+              <a:rPr lang="zh-TW" altLang="en-US" sz="1600" dirty="0">
+                <a:latin typeface="Times New Roman" panose="02020603050405020304" pitchFamily="18" charset="0"/>
+                <a:ea typeface="標楷體" panose="03000509000000000000" pitchFamily="65" charset="-120"/>
+                <a:cs typeface="Times New Roman" panose="02020603050405020304" pitchFamily="18" charset="0"/>
+              </a:rPr>
+              <a:t>硬體模組，建立 </a:t>
+            </a:r>
+            <a:r>
+              <a:rPr lang="en-US" altLang="zh-TW" sz="1600" dirty="0">
+                <a:latin typeface="Times New Roman" panose="02020603050405020304" pitchFamily="18" charset="0"/>
+                <a:ea typeface="標楷體" panose="03000509000000000000" pitchFamily="65" charset="-120"/>
+                <a:cs typeface="Times New Roman" panose="02020603050405020304" pitchFamily="18" charset="0"/>
+              </a:rPr>
+              <a:t>SoC</a:t>
+            </a:r>
+            <a:r>
+              <a:rPr lang="zh-TW" altLang="en-US" sz="1600" dirty="0">
+                <a:latin typeface="Times New Roman" panose="02020603050405020304" pitchFamily="18" charset="0"/>
+                <a:ea typeface="標楷體" panose="03000509000000000000" pitchFamily="65" charset="-120"/>
+                <a:cs typeface="Times New Roman" panose="02020603050405020304" pitchFamily="18" charset="0"/>
+              </a:rPr>
+              <a:t> 設計，並支援產生 </a:t>
+            </a:r>
+            <a:r>
+              <a:rPr lang="en-US" altLang="zh-TW" sz="1600" dirty="0">
+                <a:latin typeface="Times New Roman" panose="02020603050405020304" pitchFamily="18" charset="0"/>
+                <a:ea typeface="標楷體" panose="03000509000000000000" pitchFamily="65" charset="-120"/>
+                <a:cs typeface="Times New Roman" panose="02020603050405020304" pitchFamily="18" charset="0"/>
+              </a:rPr>
+              <a:t>HDL </a:t>
+            </a:r>
+            <a:r>
+              <a:rPr lang="zh-TW" altLang="en-US" sz="1600" dirty="0">
+                <a:latin typeface="Times New Roman" panose="02020603050405020304" pitchFamily="18" charset="0"/>
+                <a:ea typeface="標楷體" panose="03000509000000000000" pitchFamily="65" charset="-120"/>
+                <a:cs typeface="Times New Roman" panose="02020603050405020304" pitchFamily="18" charset="0"/>
+              </a:rPr>
+              <a:t>與呼叫 </a:t>
+            </a:r>
+            <a:r>
+              <a:rPr lang="en-US" altLang="zh-TW" sz="1600" dirty="0">
+                <a:latin typeface="Times New Roman" panose="02020603050405020304" pitchFamily="18" charset="0"/>
+                <a:ea typeface="標楷體" panose="03000509000000000000" pitchFamily="65" charset="-120"/>
+                <a:cs typeface="Times New Roman" panose="02020603050405020304" pitchFamily="18" charset="0"/>
+              </a:rPr>
+              <a:t>FPGA </a:t>
+            </a:r>
+            <a:r>
+              <a:rPr lang="zh-TW" altLang="en-US" sz="1600" dirty="0">
+                <a:latin typeface="Times New Roman" panose="02020603050405020304" pitchFamily="18" charset="0"/>
+                <a:ea typeface="標楷體" panose="03000509000000000000" pitchFamily="65" charset="-120"/>
+                <a:cs typeface="Times New Roman" panose="02020603050405020304" pitchFamily="18" charset="0"/>
+              </a:rPr>
+              <a:t>建置工具</a:t>
+            </a:r>
+          </a:p>
+        </p:txBody>
+      </p:sp>
+      <p:pic>
+        <p:nvPicPr>
+          <p:cNvPr id="4" name="圖片 3">
+            <a:extLst>
+              <a:ext uri="{FF2B5EF4-FFF2-40B4-BE49-F238E27FC236}">
+                <a16:creationId xmlns:a16="http://schemas.microsoft.com/office/drawing/2014/main" id="{17EB3549-39B2-8D39-F9FE-F239173F6642}"/>
+              </a:ext>
+            </a:extLst>
+          </p:cNvPr>
+          <p:cNvPicPr>
+            <a:picLocks noChangeAspect="1"/>
+          </p:cNvPicPr>
+          <p:nvPr/>
+        </p:nvPicPr>
+        <p:blipFill>
+          <a:blip r:embed="rId3"/>
+          <a:stretch>
+            <a:fillRect/>
+          </a:stretch>
+        </p:blipFill>
+        <p:spPr>
+          <a:xfrm>
+            <a:off x="5002255" y="3547242"/>
+            <a:ext cx="4294143" cy="2594378"/>
+          </a:xfrm>
+          <a:prstGeom prst="rect">
+            <a:avLst/>
+          </a:prstGeom>
+        </p:spPr>
+      </p:pic>
+      <p:pic>
+        <p:nvPicPr>
+          <p:cNvPr id="7" name="圖片 6">
+            <a:extLst>
+              <a:ext uri="{FF2B5EF4-FFF2-40B4-BE49-F238E27FC236}">
+                <a16:creationId xmlns:a16="http://schemas.microsoft.com/office/drawing/2014/main" id="{2A146F38-59DE-6890-C656-6D1C3D184645}"/>
+              </a:ext>
+            </a:extLst>
+          </p:cNvPr>
+          <p:cNvPicPr>
+            <a:picLocks noChangeAspect="1"/>
+          </p:cNvPicPr>
+          <p:nvPr/>
+        </p:nvPicPr>
+        <p:blipFill>
+          <a:blip r:embed="rId4"/>
+          <a:stretch>
+            <a:fillRect/>
+          </a:stretch>
+        </p:blipFill>
+        <p:spPr>
+          <a:xfrm>
+            <a:off x="2179494" y="2317532"/>
+            <a:ext cx="2565419" cy="4839314"/>
+          </a:xfrm>
+          <a:prstGeom prst="rect">
+            <a:avLst/>
+          </a:prstGeom>
+        </p:spPr>
+      </p:pic>
+    </p:spTree>
+    <p:extLst>
+      <p:ext uri="{BB962C8B-B14F-4D97-AF65-F5344CB8AC3E}">
+        <p14:creationId xmlns:p14="http://schemas.microsoft.com/office/powerpoint/2010/main" val="4108471032"/>
+      </p:ext>
+    </p:extLst>
+  </p:cSld>
+  <p:clrMapOvr>
+    <a:masterClrMapping/>
+  </p:clrMapOvr>
+</p:sld>
+</file>
+
+<file path=ppt/slides/slide6.xml><?xml version="1.0" encoding="utf-8"?>
 <p:sld xmlns:a="http://schemas.openxmlformats.org/drawingml/2006/main" xmlns:r="http://schemas.openxmlformats.org/officeDocument/2006/relationships" xmlns:p="http://schemas.openxmlformats.org/presentationml/2006/main">
   <p:cSld>
     <p:spTree>

--- a/Onyx_進度報告_1020.pptx
+++ b/Onyx_進度報告_1020.pptx
@@ -5,7 +5,7 @@
     <p:sldMasterId id="2147483658" r:id="rId1"/>
   </p:sldMasterIdLst>
   <p:notesMasterIdLst>
-    <p:notesMasterId r:id="rId8"/>
+    <p:notesMasterId r:id="rId9"/>
   </p:notesMasterIdLst>
   <p:sldIdLst>
     <p:sldId id="277" r:id="rId2"/>
@@ -13,7 +13,8 @@
     <p:sldId id="2035" r:id="rId4"/>
     <p:sldId id="2043" r:id="rId5"/>
     <p:sldId id="2044" r:id="rId6"/>
-    <p:sldId id="286" r:id="rId7"/>
+    <p:sldId id="2045" r:id="rId7"/>
+    <p:sldId id="286" r:id="rId8"/>
   </p:sldIdLst>
   <p:sldSz cx="9906000" cy="6858000" type="A4"/>
   <p:notesSz cx="7315200" cy="9601200"/>
@@ -264,6 +265,7 @@
             <p14:sldId id="2035"/>
             <p14:sldId id="2043"/>
             <p14:sldId id="2044"/>
+            <p14:sldId id="2045"/>
           </p14:sldIdLst>
         </p14:section>
         <p14:section name="End" id="{33EEDC85-A799-4CB3-BF13-F4955B8630BE}">
@@ -1993,7 +1995,86 @@
           <a:lstStyle/>
           <a:p>
             <a:pPr marL="0" indent="0"/>
-            <a:endParaRPr lang="zh-TW" altLang="en-US" dirty="0"/>
+            <a:r>
+              <a:rPr lang="zh-TW" altLang="en-US" dirty="0"/>
+              <a:t>除了</a:t>
+            </a:r>
+            <a:r>
+              <a:rPr lang="en-US" altLang="zh-TW" dirty="0"/>
+              <a:t>HDMI</a:t>
+            </a:r>
+            <a:r>
+              <a:rPr lang="zh-TW" altLang="en-US" dirty="0"/>
+              <a:t> </a:t>
+            </a:r>
+            <a:r>
+              <a:rPr lang="en-US" altLang="zh-TW" dirty="0"/>
+              <a:t>PCIe</a:t>
+            </a:r>
+            <a:r>
+              <a:rPr lang="zh-TW" altLang="en-US" dirty="0"/>
+              <a:t>外，</a:t>
+            </a:r>
+            <a:r>
+              <a:rPr lang="en-US" altLang="zh-TW" dirty="0"/>
+              <a:t>NeTV2</a:t>
+            </a:r>
+            <a:r>
+              <a:rPr lang="zh-TW" altLang="en-US" dirty="0"/>
+              <a:t>能使用的外部介面如下，能使用的 </a:t>
+            </a:r>
+            <a:r>
+              <a:rPr lang="en-US" altLang="zh-TW" dirty="0"/>
+              <a:t>IO</a:t>
+            </a:r>
+            <a:r>
+              <a:rPr lang="zh-TW" altLang="en-US" dirty="0"/>
+              <a:t> 只剩下支援 </a:t>
+            </a:r>
+            <a:r>
+              <a:rPr lang="zh-TW" altLang="zh-TW" sz="1200" dirty="0"/>
+              <a:t>Raspberry Pi</a:t>
+            </a:r>
+            <a:r>
+              <a:rPr lang="zh-TW" altLang="en-US" sz="1200" dirty="0"/>
+              <a:t> 的 </a:t>
+            </a:r>
+            <a:r>
+              <a:rPr lang="en-US" altLang="zh-TW" sz="1200" dirty="0"/>
+              <a:t>20</a:t>
+            </a:r>
+            <a:r>
+              <a:rPr lang="zh-TW" altLang="en-US" sz="1200" dirty="0"/>
+              <a:t>個角位的</a:t>
+            </a:r>
+            <a:r>
+              <a:rPr lang="zh-TW" altLang="en-US" dirty="0"/>
+              <a:t> </a:t>
+            </a:r>
+            <a:r>
+              <a:rPr lang="en-US" altLang="zh-TW" dirty="0"/>
+              <a:t>JTAG</a:t>
+            </a:r>
+            <a:r>
+              <a:rPr lang="zh-TW" altLang="en-US" dirty="0"/>
+              <a:t> </a:t>
+            </a:r>
+            <a:r>
+              <a:rPr lang="en-US" altLang="zh-TW" dirty="0"/>
+              <a:t>UART</a:t>
+            </a:r>
+            <a:r>
+              <a:rPr lang="zh-TW" altLang="en-US" dirty="0"/>
+              <a:t> 等等，但這些腳位基本上無法接收 </a:t>
+            </a:r>
+            <a:r>
+              <a:rPr lang="en-US" altLang="zh-TW" dirty="0"/>
+              <a:t>SDI</a:t>
+            </a:r>
+            <a:r>
+              <a:rPr lang="zh-TW" altLang="en-US" dirty="0"/>
+              <a:t> 訊號，速度與腳位數量嚴重不足</a:t>
+            </a:r>
           </a:p>
         </p:txBody>
       </p:sp>
@@ -2203,6 +2284,140 @@
   <p:cSld>
     <p:spTree>
       <p:nvGrpSpPr>
+        <p:cNvPr id="1" name="">
+          <a:extLst>
+            <a:ext uri="{FF2B5EF4-FFF2-40B4-BE49-F238E27FC236}">
+              <a16:creationId xmlns:a16="http://schemas.microsoft.com/office/drawing/2014/main" id="{CFFE527B-4000-F206-6AFC-75F0676BC382}"/>
+            </a:ext>
+          </a:extLst>
+        </p:cNvPr>
+        <p:cNvGrpSpPr/>
+        <p:nvPr/>
+      </p:nvGrpSpPr>
+      <p:grpSpPr>
+        <a:xfrm>
+          <a:off x="0" y="0"/>
+          <a:ext cx="0" cy="0"/>
+          <a:chOff x="0" y="0"/>
+          <a:chExt cx="0" cy="0"/>
+        </a:xfrm>
+      </p:grpSpPr>
+      <p:sp>
+        <p:nvSpPr>
+          <p:cNvPr id="2" name="投影片影像版面配置區 1">
+            <a:extLst>
+              <a:ext uri="{FF2B5EF4-FFF2-40B4-BE49-F238E27FC236}">
+                <a16:creationId xmlns:a16="http://schemas.microsoft.com/office/drawing/2014/main" id="{16931088-1022-C7B4-813F-6A80201816A0}"/>
+              </a:ext>
+            </a:extLst>
+          </p:cNvPr>
+          <p:cNvSpPr>
+            <a:spLocks noGrp="1" noRot="1" noChangeAspect="1"/>
+          </p:cNvSpPr>
+          <p:nvPr>
+            <p:ph type="sldImg"/>
+          </p:nvPr>
+        </p:nvSpPr>
+        <p:spPr/>
+      </p:sp>
+      <p:sp>
+        <p:nvSpPr>
+          <p:cNvPr id="3" name="備忘稿版面配置區 2">
+            <a:extLst>
+              <a:ext uri="{FF2B5EF4-FFF2-40B4-BE49-F238E27FC236}">
+                <a16:creationId xmlns:a16="http://schemas.microsoft.com/office/drawing/2014/main" id="{2B6387F7-7876-4588-C9D5-16BE657D614D}"/>
+              </a:ext>
+            </a:extLst>
+          </p:cNvPr>
+          <p:cNvSpPr>
+            <a:spLocks noGrp="1"/>
+          </p:cNvSpPr>
+          <p:nvPr>
+            <p:ph type="body" idx="1"/>
+          </p:nvPr>
+        </p:nvSpPr>
+        <p:spPr/>
+        <p:txBody>
+          <a:bodyPr/>
+          <a:lstStyle/>
+          <a:p>
+            <a:pPr marL="0" indent="0"/>
+            <a:endParaRPr lang="zh-TW" altLang="en-US" dirty="0"/>
+          </a:p>
+        </p:txBody>
+      </p:sp>
+      <p:sp>
+        <p:nvSpPr>
+          <p:cNvPr id="4" name="投影片編號版面配置區 3">
+            <a:extLst>
+              <a:ext uri="{FF2B5EF4-FFF2-40B4-BE49-F238E27FC236}">
+                <a16:creationId xmlns:a16="http://schemas.microsoft.com/office/drawing/2014/main" id="{3F188A1F-349F-2C87-FF3E-E7B458B6323C}"/>
+              </a:ext>
+            </a:extLst>
+          </p:cNvPr>
+          <p:cNvSpPr>
+            <a:spLocks noGrp="1"/>
+          </p:cNvSpPr>
+          <p:nvPr>
+            <p:ph type="sldNum" idx="12"/>
+          </p:nvPr>
+        </p:nvSpPr>
+        <p:spPr/>
+        <p:txBody>
+          <a:bodyPr/>
+          <a:lstStyle/>
+          <a:p>
+            <a:pPr marL="0" marR="0" lvl="0" indent="0" algn="r" rtl="0">
+              <a:spcBef>
+                <a:spcPts val="0"/>
+              </a:spcBef>
+              <a:spcAft>
+                <a:spcPts val="0"/>
+              </a:spcAft>
+              <a:buNone/>
+            </a:pPr>
+            <a:fld id="{00000000-1234-1234-1234-123412341234}" type="slidenum">
+              <a:rPr lang="en-US" sz="2000" b="0" i="0" u="none" strike="noStrike" cap="none" smtClean="0">
+                <a:solidFill>
+                  <a:schemeClr val="dk1"/>
+                </a:solidFill>
+                <a:latin typeface="Times New Roman"/>
+                <a:ea typeface="Times New Roman"/>
+                <a:cs typeface="Times New Roman"/>
+                <a:sym typeface="Times New Roman"/>
+              </a:rPr>
+              <a:t>6</a:t>
+            </a:fld>
+            <a:endParaRPr lang="en-US" sz="2000" b="0" i="0" u="none" strike="noStrike" cap="none" dirty="0">
+              <a:solidFill>
+                <a:schemeClr val="dk1"/>
+              </a:solidFill>
+              <a:latin typeface="Times New Roman"/>
+              <a:ea typeface="Times New Roman"/>
+              <a:cs typeface="Times New Roman"/>
+              <a:sym typeface="Times New Roman"/>
+            </a:endParaRPr>
+          </a:p>
+        </p:txBody>
+      </p:sp>
+    </p:spTree>
+    <p:extLst>
+      <p:ext uri="{BB962C8B-B14F-4D97-AF65-F5344CB8AC3E}">
+        <p14:creationId xmlns:p14="http://schemas.microsoft.com/office/powerpoint/2010/main" val="3925958281"/>
+      </p:ext>
+    </p:extLst>
+  </p:cSld>
+  <p:clrMapOvr>
+    <a:masterClrMapping/>
+  </p:clrMapOvr>
+</p:notes>
+</file>
+
+<file path=ppt/notesSlides/notesSlide7.xml><?xml version="1.0" encoding="utf-8"?>
+<p:notes xmlns:a="http://schemas.openxmlformats.org/drawingml/2006/main" xmlns:r="http://schemas.openxmlformats.org/officeDocument/2006/relationships" xmlns:p="http://schemas.openxmlformats.org/presentationml/2006/main">
+  <p:cSld>
+    <p:spTree>
+      <p:nvGrpSpPr>
         <p:cNvPr id="1" name=""/>
         <p:cNvGrpSpPr/>
         <p:nvPr/>
@@ -2266,7 +2481,7 @@
           <a:p>
             <a:fld id="{F5753A29-9D77-4C26-8BEC-432FE5D4B0A4}" type="slidenum">
               <a:rPr lang="en-US" altLang="zh-TW" smtClean="0"/>
-              <a:t>6</a:t>
+              <a:t>7</a:t>
             </a:fld>
             <a:endParaRPr lang="en-US" altLang="zh-TW" dirty="0"/>
           </a:p>
@@ -8439,7 +8654,23 @@
                 <a:ea typeface="標楷體" panose="03000509000000000000" pitchFamily="65" charset="-120"/>
                 <a:cs typeface="Times New Roman" panose="02020603050405020304" pitchFamily="18" charset="0"/>
               </a:rPr>
-              <a:t>高速接收端的整合難度</a:t>
+              <a:t>高速 </a:t>
+            </a:r>
+            <a:r>
+              <a:rPr lang="en-US" altLang="zh-TW" sz="1600" dirty="0">
+                <a:latin typeface="Times New Roman" panose="02020603050405020304" pitchFamily="18" charset="0"/>
+                <a:ea typeface="標楷體" panose="03000509000000000000" pitchFamily="65" charset="-120"/>
+                <a:cs typeface="Times New Roman" panose="02020603050405020304" pitchFamily="18" charset="0"/>
+              </a:rPr>
+              <a:t>SDI</a:t>
+            </a:r>
+            <a:r>
+              <a:rPr lang="zh-TW" altLang="en-US" sz="1600" dirty="0">
+                <a:latin typeface="Times New Roman" panose="02020603050405020304" pitchFamily="18" charset="0"/>
+                <a:ea typeface="標楷體" panose="03000509000000000000" pitchFamily="65" charset="-120"/>
+                <a:cs typeface="Times New Roman" panose="02020603050405020304" pitchFamily="18" charset="0"/>
+              </a:rPr>
+              <a:t> 接收端的整合難度</a:t>
             </a:r>
             <a:endParaRPr lang="en-US" altLang="zh-TW" sz="1600" dirty="0">
               <a:solidFill>
@@ -8732,8 +8963,8 @@
         </p:blipFill>
         <p:spPr>
           <a:xfrm>
-            <a:off x="786305" y="2732900"/>
-            <a:ext cx="8333390" cy="892273"/>
+            <a:off x="1179844" y="2738417"/>
+            <a:ext cx="8265098" cy="884961"/>
           </a:xfrm>
           <a:prstGeom prst="rect">
             <a:avLst/>
@@ -8762,8 +8993,8 @@
         </p:blipFill>
         <p:spPr>
           <a:xfrm>
-            <a:off x="786305" y="5422216"/>
-            <a:ext cx="8333390" cy="874016"/>
+            <a:off x="1179844" y="5429379"/>
+            <a:ext cx="8265098" cy="866853"/>
           </a:xfrm>
           <a:prstGeom prst="rect">
             <a:avLst/>
@@ -8849,23 +9080,7 @@
                 <a:ea typeface="標楷體" panose="03000509000000000000" pitchFamily="65" charset="-120"/>
                 <a:cs typeface="Times New Roman" panose="02020603050405020304" pitchFamily="18" charset="0"/>
               </a:rPr>
-              <a:t>: </a:t>
-            </a:r>
-            <a:r>
-              <a:rPr lang="en-US" altLang="zh-TW" dirty="0" err="1">
-                <a:latin typeface="Times New Roman" panose="02020603050405020304" pitchFamily="18" charset="0"/>
-                <a:ea typeface="標楷體" panose="03000509000000000000" pitchFamily="65" charset="-120"/>
-                <a:cs typeface="Times New Roman" panose="02020603050405020304" pitchFamily="18" charset="0"/>
-              </a:rPr>
-              <a:t>LiteX</a:t>
-            </a:r>
-            <a:r>
-              <a:rPr lang="en-US" altLang="zh-TW" dirty="0">
-                <a:latin typeface="Times New Roman" panose="02020603050405020304" pitchFamily="18" charset="0"/>
-                <a:ea typeface="標楷體" panose="03000509000000000000" pitchFamily="65" charset="-120"/>
-                <a:cs typeface="Times New Roman" panose="02020603050405020304" pitchFamily="18" charset="0"/>
-              </a:rPr>
-              <a:t> / SDI </a:t>
+              <a:t>: NeTV2</a:t>
             </a:r>
             <a:endParaRPr lang="zh-TW" altLang="en-US" dirty="0">
               <a:latin typeface="Times New Roman" panose="02020603050405020304" pitchFamily="18" charset="0"/>
@@ -9158,24 +9373,10 @@
               </a:lnSpc>
             </a:pPr>
             <a:r>
-              <a:rPr lang="zh-TW" altLang="en-US" sz="2000" dirty="0">
-                <a:solidFill>
-                  <a:schemeClr val="tx1"/>
-                </a:solidFill>
-                <a:latin typeface="Times New Roman" panose="02020603050405020304" pitchFamily="18" charset="0"/>
-                <a:ea typeface="標楷體" panose="03000509000000000000" pitchFamily="65" charset="-120"/>
-                <a:cs typeface="Times New Roman" panose="02020603050405020304" pitchFamily="18" charset="0"/>
-              </a:rPr>
-              <a:t> </a:t>
-            </a:r>
-            <a:endParaRPr lang="en-US" altLang="zh-TW" sz="2000" dirty="0">
-              <a:solidFill>
-                <a:schemeClr val="tx1"/>
-              </a:solidFill>
-              <a:latin typeface="Times New Roman" panose="02020603050405020304" pitchFamily="18" charset="0"/>
-              <a:ea typeface="標楷體" panose="03000509000000000000" pitchFamily="65" charset="-120"/>
-              <a:cs typeface="Times New Roman" panose="02020603050405020304" pitchFamily="18" charset="0"/>
-            </a:endParaRPr>
+              <a:rPr lang="zh-TW" altLang="zh-TW" sz="2000" dirty="0"/>
+              <a:t>External Interfaces </a:t>
+            </a:r>
+            <a:endParaRPr lang="en-US" altLang="zh-TW" sz="2000" dirty="0"/>
           </a:p>
           <a:p>
             <a:pPr lvl="1">
@@ -9184,126 +9385,188 @@
               </a:lnSpc>
             </a:pPr>
             <a:r>
-              <a:rPr lang="zh-TW" altLang="en-US" sz="1600" dirty="0">
-                <a:latin typeface="Times New Roman" panose="02020603050405020304" pitchFamily="18" charset="0"/>
-                <a:ea typeface="標楷體" panose="03000509000000000000" pitchFamily="65" charset="-120"/>
-                <a:cs typeface="Times New Roman" panose="02020603050405020304" pitchFamily="18" charset="0"/>
-              </a:rPr>
-              <a:t>透過 </a:t>
-            </a:r>
-            <a:r>
-              <a:rPr lang="en-US" altLang="zh-TW" sz="1600" dirty="0">
-                <a:latin typeface="Times New Roman" panose="02020603050405020304" pitchFamily="18" charset="0"/>
-                <a:ea typeface="標楷體" panose="03000509000000000000" pitchFamily="65" charset="-120"/>
-                <a:cs typeface="Times New Roman" panose="02020603050405020304" pitchFamily="18" charset="0"/>
-              </a:rPr>
-              <a:t>Python </a:t>
-            </a:r>
-            <a:r>
-              <a:rPr lang="zh-TW" altLang="en-US" sz="1600" dirty="0">
-                <a:latin typeface="Times New Roman" panose="02020603050405020304" pitchFamily="18" charset="0"/>
-                <a:ea typeface="標楷體" panose="03000509000000000000" pitchFamily="65" charset="-120"/>
-                <a:cs typeface="Times New Roman" panose="02020603050405020304" pitchFamily="18" charset="0"/>
-              </a:rPr>
-              <a:t>描述與整合 </a:t>
-            </a:r>
-            <a:r>
-              <a:rPr lang="en-US" altLang="zh-TW" sz="1600" dirty="0">
-                <a:latin typeface="Times New Roman" panose="02020603050405020304" pitchFamily="18" charset="0"/>
-                <a:ea typeface="標楷體" panose="03000509000000000000" pitchFamily="65" charset="-120"/>
-                <a:cs typeface="Times New Roman" panose="02020603050405020304" pitchFamily="18" charset="0"/>
-              </a:rPr>
-              <a:t>FPGA </a:t>
-            </a:r>
-            <a:r>
-              <a:rPr lang="zh-TW" altLang="en-US" sz="1600" dirty="0">
-                <a:latin typeface="Times New Roman" panose="02020603050405020304" pitchFamily="18" charset="0"/>
-                <a:ea typeface="標楷體" panose="03000509000000000000" pitchFamily="65" charset="-120"/>
-                <a:cs typeface="Times New Roman" panose="02020603050405020304" pitchFamily="18" charset="0"/>
-              </a:rPr>
-              <a:t>硬體模組，建立 </a:t>
-            </a:r>
-            <a:r>
-              <a:rPr lang="en-US" altLang="zh-TW" sz="1600" dirty="0">
-                <a:latin typeface="Times New Roman" panose="02020603050405020304" pitchFamily="18" charset="0"/>
-                <a:ea typeface="標楷體" panose="03000509000000000000" pitchFamily="65" charset="-120"/>
-                <a:cs typeface="Times New Roman" panose="02020603050405020304" pitchFamily="18" charset="0"/>
-              </a:rPr>
-              <a:t>SoC</a:t>
-            </a:r>
-            <a:r>
-              <a:rPr lang="zh-TW" altLang="en-US" sz="1600" dirty="0">
-                <a:latin typeface="Times New Roman" panose="02020603050405020304" pitchFamily="18" charset="0"/>
-                <a:ea typeface="標楷體" panose="03000509000000000000" pitchFamily="65" charset="-120"/>
-                <a:cs typeface="Times New Roman" panose="02020603050405020304" pitchFamily="18" charset="0"/>
-              </a:rPr>
-              <a:t> 設計，並支援產生 </a:t>
-            </a:r>
-            <a:r>
-              <a:rPr lang="en-US" altLang="zh-TW" sz="1600" dirty="0">
-                <a:latin typeface="Times New Roman" panose="02020603050405020304" pitchFamily="18" charset="0"/>
-                <a:ea typeface="標楷體" panose="03000509000000000000" pitchFamily="65" charset="-120"/>
-                <a:cs typeface="Times New Roman" panose="02020603050405020304" pitchFamily="18" charset="0"/>
-              </a:rPr>
-              <a:t>HDL </a:t>
-            </a:r>
-            <a:r>
-              <a:rPr lang="zh-TW" altLang="en-US" sz="1600" dirty="0">
-                <a:latin typeface="Times New Roman" panose="02020603050405020304" pitchFamily="18" charset="0"/>
-                <a:ea typeface="標楷體" panose="03000509000000000000" pitchFamily="65" charset="-120"/>
-                <a:cs typeface="Times New Roman" panose="02020603050405020304" pitchFamily="18" charset="0"/>
-              </a:rPr>
-              <a:t>與呼叫 </a:t>
-            </a:r>
-            <a:r>
-              <a:rPr lang="en-US" altLang="zh-TW" sz="1600" dirty="0">
-                <a:latin typeface="Times New Roman" panose="02020603050405020304" pitchFamily="18" charset="0"/>
-                <a:ea typeface="標楷體" panose="03000509000000000000" pitchFamily="65" charset="-120"/>
-                <a:cs typeface="Times New Roman" panose="02020603050405020304" pitchFamily="18" charset="0"/>
-              </a:rPr>
-              <a:t>FPGA </a:t>
-            </a:r>
-            <a:r>
-              <a:rPr lang="zh-TW" altLang="en-US" sz="1600" dirty="0">
-                <a:latin typeface="Times New Roman" panose="02020603050405020304" pitchFamily="18" charset="0"/>
-                <a:ea typeface="標楷體" panose="03000509000000000000" pitchFamily="65" charset="-120"/>
-                <a:cs typeface="Times New Roman" panose="02020603050405020304" pitchFamily="18" charset="0"/>
-              </a:rPr>
-              <a:t>建置工具</a:t>
-            </a:r>
+              <a:rPr lang="zh-TW" altLang="zh-TW" sz="1600" dirty="0"/>
+              <a:t>2 x HDMI type A inputs, 1 x HDMI type A output, 1 x HDMI type D output</a:t>
+            </a:r>
+            <a:endParaRPr lang="en-US" altLang="zh-TW" sz="1600" dirty="0"/>
+          </a:p>
+          <a:p>
+            <a:pPr lvl="1">
+              <a:lnSpc>
+                <a:spcPts val="3000"/>
+              </a:lnSpc>
+            </a:pPr>
+            <a:r>
+              <a:rPr lang="zh-TW" altLang="zh-TW" sz="1600" dirty="0"/>
+              <a:t>PCI-express 2.0 x4</a:t>
+            </a:r>
+            <a:endParaRPr lang="en-US" altLang="zh-TW" sz="1600" dirty="0"/>
+          </a:p>
+          <a:p>
+            <a:pPr lvl="1">
+              <a:lnSpc>
+                <a:spcPts val="3000"/>
+              </a:lnSpc>
+            </a:pPr>
+            <a:r>
+              <a:rPr lang="zh-TW" altLang="zh-TW" sz="1600" dirty="0"/>
+              <a:t>100 Mbps Ethernet</a:t>
+            </a:r>
+            <a:endParaRPr lang="en-US" altLang="zh-TW" sz="1600" dirty="0"/>
+          </a:p>
+          <a:p>
+            <a:pPr lvl="1">
+              <a:lnSpc>
+                <a:spcPts val="3000"/>
+              </a:lnSpc>
+            </a:pPr>
+            <a:r>
+              <a:rPr lang="zh-TW" altLang="zh-TW" sz="1600" dirty="0"/>
+              <a:t>Full-size microSD</a:t>
+            </a:r>
+            <a:r>
+              <a:rPr lang="en-US" altLang="zh-TW" sz="1600" dirty="0"/>
+              <a:t> </a:t>
+            </a:r>
+            <a:r>
+              <a:rPr lang="zh-TW" altLang="zh-TW" sz="1600" dirty="0"/>
+              <a:t>/</a:t>
+            </a:r>
+            <a:r>
+              <a:rPr lang="en-US" altLang="zh-TW" sz="1600" dirty="0"/>
+              <a:t> </a:t>
+            </a:r>
+            <a:r>
+              <a:rPr lang="zh-TW" altLang="zh-TW" sz="1600" dirty="0"/>
+              <a:t>SD card slot</a:t>
+            </a:r>
+            <a:endParaRPr lang="en-US" altLang="zh-TW" sz="1600" dirty="0"/>
+          </a:p>
+          <a:p>
+            <a:pPr lvl="1">
+              <a:lnSpc>
+                <a:spcPts val="3000"/>
+              </a:lnSpc>
+            </a:pPr>
+            <a:r>
+              <a:rPr lang="zh-TW" altLang="zh-TW" sz="1600" dirty="0"/>
+              <a:t>Raspberry Pi </a:t>
+            </a:r>
+            <a:r>
+              <a:rPr lang="en-US" altLang="zh-TW" sz="1600" dirty="0"/>
+              <a:t>2</a:t>
+            </a:r>
+            <a:r>
+              <a:rPr lang="zh-TW" altLang="zh-TW" sz="1600" dirty="0"/>
+              <a:t>0-pin GPIO Header</a:t>
+            </a:r>
+            <a:endParaRPr lang="en-US" altLang="zh-TW" sz="1600" dirty="0"/>
           </a:p>
         </p:txBody>
       </p:sp>
-      <p:pic>
-        <p:nvPicPr>
-          <p:cNvPr id="9" name="圖片 8">
+      <p:grpSp>
+        <p:nvGrpSpPr>
+          <p:cNvPr id="4" name="群組 3">
             <a:extLst>
               <a:ext uri="{FF2B5EF4-FFF2-40B4-BE49-F238E27FC236}">
-                <a16:creationId xmlns:a16="http://schemas.microsoft.com/office/drawing/2014/main" id="{D05EC9F3-3B1F-0804-ABB2-FED1F868223B}"/>
+                <a16:creationId xmlns:a16="http://schemas.microsoft.com/office/drawing/2014/main" id="{04CB93EC-70F9-C156-B0D6-865566297A52}"/>
               </a:ext>
             </a:extLst>
           </p:cNvPr>
-          <p:cNvPicPr>
-            <a:picLocks noChangeAspect="1"/>
-          </p:cNvPicPr>
+          <p:cNvGrpSpPr/>
           <p:nvPr/>
-        </p:nvPicPr>
-        <p:blipFill>
-          <a:blip r:embed="rId3"/>
-          <a:stretch>
-            <a:fillRect/>
-          </a:stretch>
-        </p:blipFill>
-        <p:spPr>
+        </p:nvGrpSpPr>
+        <p:grpSpPr>
           <a:xfrm>
-            <a:off x="5383924" y="2318143"/>
-            <a:ext cx="3518336" cy="4355484"/>
+            <a:off x="4786971" y="2118206"/>
+            <a:ext cx="4355484" cy="3518336"/>
+            <a:chOff x="4919051" y="2311490"/>
+            <a:chExt cx="4355484" cy="3518336"/>
           </a:xfrm>
-          <a:prstGeom prst="rect">
-            <a:avLst/>
-          </a:prstGeom>
-        </p:spPr>
-      </p:pic>
+        </p:grpSpPr>
+        <p:pic>
+          <p:nvPicPr>
+            <p:cNvPr id="9" name="圖片 8">
+              <a:extLst>
+                <a:ext uri="{FF2B5EF4-FFF2-40B4-BE49-F238E27FC236}">
+                  <a16:creationId xmlns:a16="http://schemas.microsoft.com/office/drawing/2014/main" id="{D05EC9F3-3B1F-0804-ABB2-FED1F868223B}"/>
+                </a:ext>
+              </a:extLst>
+            </p:cNvPr>
+            <p:cNvPicPr>
+              <a:picLocks noChangeAspect="1"/>
+            </p:cNvPicPr>
+            <p:nvPr/>
+          </p:nvPicPr>
+          <p:blipFill>
+            <a:blip r:embed="rId3"/>
+            <a:stretch>
+              <a:fillRect/>
+            </a:stretch>
+          </p:blipFill>
+          <p:spPr>
+            <a:xfrm rot="16200000">
+              <a:off x="5337625" y="1892916"/>
+              <a:ext cx="3518336" cy="4355484"/>
+            </a:xfrm>
+            <a:prstGeom prst="rect">
+              <a:avLst/>
+            </a:prstGeom>
+          </p:spPr>
+        </p:pic>
+        <p:sp>
+          <p:nvSpPr>
+            <p:cNvPr id="3" name="矩形 2">
+              <a:extLst>
+                <a:ext uri="{FF2B5EF4-FFF2-40B4-BE49-F238E27FC236}">
+                  <a16:creationId xmlns:a16="http://schemas.microsoft.com/office/drawing/2014/main" id="{F30A8529-FFAB-930A-5539-9FFE9096171A}"/>
+                </a:ext>
+              </a:extLst>
+            </p:cNvPr>
+            <p:cNvSpPr/>
+            <p:nvPr/>
+          </p:nvSpPr>
+          <p:spPr>
+            <a:xfrm>
+              <a:off x="7073900" y="4549140"/>
+              <a:ext cx="1046480" cy="381000"/>
+            </a:xfrm>
+            <a:prstGeom prst="rect">
+              <a:avLst/>
+            </a:prstGeom>
+            <a:noFill/>
+            <a:ln>
+              <a:solidFill>
+                <a:srgbClr val="FF0000"/>
+              </a:solidFill>
+            </a:ln>
+          </p:spPr>
+          <p:style>
+            <a:lnRef idx="2">
+              <a:schemeClr val="accent1">
+                <a:shade val="15000"/>
+              </a:schemeClr>
+            </a:lnRef>
+            <a:fillRef idx="1">
+              <a:schemeClr val="accent1"/>
+            </a:fillRef>
+            <a:effectRef idx="0">
+              <a:schemeClr val="accent1"/>
+            </a:effectRef>
+            <a:fontRef idx="minor">
+              <a:schemeClr val="lt1"/>
+            </a:fontRef>
+          </p:style>
+          <p:txBody>
+            <a:bodyPr rtlCol="0" anchor="ctr"/>
+            <a:lstStyle/>
+            <a:p>
+              <a:pPr algn="ctr"/>
+              <a:endParaRPr lang="zh-TW" altLang="en-US"/>
+            </a:p>
+          </p:txBody>
+        </p:sp>
+      </p:grpSp>
     </p:spTree>
     <p:extLst>
       <p:ext uri="{BB962C8B-B14F-4D97-AF65-F5344CB8AC3E}">
@@ -9383,23 +9646,7 @@
                 <a:ea typeface="標楷體" panose="03000509000000000000" pitchFamily="65" charset="-120"/>
                 <a:cs typeface="Times New Roman" panose="02020603050405020304" pitchFamily="18" charset="0"/>
               </a:rPr>
-              <a:t>: </a:t>
-            </a:r>
-            <a:r>
-              <a:rPr lang="en-US" altLang="zh-TW" dirty="0" err="1">
-                <a:latin typeface="Times New Roman" panose="02020603050405020304" pitchFamily="18" charset="0"/>
-                <a:ea typeface="標楷體" panose="03000509000000000000" pitchFamily="65" charset="-120"/>
-                <a:cs typeface="Times New Roman" panose="02020603050405020304" pitchFamily="18" charset="0"/>
-              </a:rPr>
-              <a:t>LiteX</a:t>
-            </a:r>
-            <a:r>
-              <a:rPr lang="en-US" altLang="zh-TW" dirty="0">
-                <a:latin typeface="Times New Roman" panose="02020603050405020304" pitchFamily="18" charset="0"/>
-                <a:ea typeface="標楷體" panose="03000509000000000000" pitchFamily="65" charset="-120"/>
-                <a:cs typeface="Times New Roman" panose="02020603050405020304" pitchFamily="18" charset="0"/>
-              </a:rPr>
-              <a:t> / SDI </a:t>
+              <a:t>: NeTV2</a:t>
             </a:r>
             <a:endParaRPr lang="zh-TW" altLang="en-US" dirty="0">
               <a:latin typeface="Times New Roman" panose="02020603050405020304" pitchFamily="18" charset="0"/>
@@ -9691,6 +9938,50 @@
                 <a:spcPts val="3000"/>
               </a:lnSpc>
             </a:pPr>
+            <a:r>
+              <a:rPr lang="en-US" altLang="zh-TW" sz="2000" dirty="0">
+                <a:solidFill>
+                  <a:schemeClr val="tx1"/>
+                </a:solidFill>
+                <a:latin typeface="Times New Roman" panose="02020603050405020304" pitchFamily="18" charset="0"/>
+                <a:ea typeface="標楷體" panose="03000509000000000000" pitchFamily="65" charset="-120"/>
+                <a:cs typeface="Times New Roman" panose="02020603050405020304" pitchFamily="18" charset="0"/>
+              </a:rPr>
+              <a:t> HDMI</a:t>
+            </a:r>
+            <a:r>
+              <a:rPr lang="zh-TW" altLang="en-US" sz="2000" dirty="0">
+                <a:solidFill>
+                  <a:schemeClr val="tx1"/>
+                </a:solidFill>
+                <a:latin typeface="Times New Roman" panose="02020603050405020304" pitchFamily="18" charset="0"/>
+                <a:ea typeface="標楷體" panose="03000509000000000000" pitchFamily="65" charset="-120"/>
+                <a:cs typeface="Times New Roman" panose="02020603050405020304" pitchFamily="18" charset="0"/>
+              </a:rPr>
+              <a:t> 作為 </a:t>
+            </a:r>
+            <a:r>
+              <a:rPr lang="en-US" altLang="zh-TW" sz="2000" dirty="0">
+                <a:solidFill>
+                  <a:schemeClr val="tx1"/>
+                </a:solidFill>
+                <a:latin typeface="Times New Roman" panose="02020603050405020304" pitchFamily="18" charset="0"/>
+                <a:ea typeface="標楷體" panose="03000509000000000000" pitchFamily="65" charset="-120"/>
+                <a:cs typeface="Times New Roman" panose="02020603050405020304" pitchFamily="18" charset="0"/>
+              </a:rPr>
+              <a:t>SDI</a:t>
+            </a:r>
+            <a:r>
+              <a:rPr lang="zh-TW" altLang="en-US" sz="2000" dirty="0">
+                <a:solidFill>
+                  <a:schemeClr val="tx1"/>
+                </a:solidFill>
+                <a:latin typeface="Times New Roman" panose="02020603050405020304" pitchFamily="18" charset="0"/>
+                <a:ea typeface="標楷體" panose="03000509000000000000" pitchFamily="65" charset="-120"/>
+                <a:cs typeface="Times New Roman" panose="02020603050405020304" pitchFamily="18" charset="0"/>
+              </a:rPr>
+              <a:t> 信號入口的可能性</a:t>
+            </a:r>
             <a:endParaRPr lang="en-US" altLang="zh-TW" sz="2000" dirty="0">
               <a:solidFill>
                 <a:schemeClr val="tx1"/>
@@ -9707,156 +9998,318 @@
               </a:lnSpc>
             </a:pPr>
             <a:r>
-              <a:rPr lang="zh-TW" altLang="en-US" sz="1600" dirty="0">
+              <a:rPr lang="zh-TW" altLang="zh-TW" sz="1600" dirty="0">
                 <a:latin typeface="Times New Roman" panose="02020603050405020304" pitchFamily="18" charset="0"/>
                 <a:ea typeface="標楷體" panose="03000509000000000000" pitchFamily="65" charset="-120"/>
                 <a:cs typeface="Times New Roman" panose="02020603050405020304" pitchFamily="18" charset="0"/>
               </a:rPr>
-              <a:t>透過 </a:t>
-            </a:r>
-            <a:r>
-              <a:rPr lang="en-US" altLang="zh-TW" sz="1600" dirty="0">
+              <a:t>SDI 與 HDMI 的資料速率相近</a:t>
+            </a:r>
+            <a:endParaRPr lang="en-US" altLang="zh-TW" sz="1600" dirty="0">
+              <a:solidFill>
+                <a:schemeClr val="tx1"/>
+              </a:solidFill>
+              <a:latin typeface="Times New Roman" panose="02020603050405020304" pitchFamily="18" charset="0"/>
+              <a:ea typeface="標楷體" panose="03000509000000000000" pitchFamily="65" charset="-120"/>
+              <a:cs typeface="Times New Roman" panose="02020603050405020304" pitchFamily="18" charset="0"/>
+            </a:endParaRPr>
+          </a:p>
+          <a:p>
+            <a:pPr lvl="1">
+              <a:lnSpc>
+                <a:spcPts val="3000"/>
+              </a:lnSpc>
+            </a:pPr>
+            <a:r>
+              <a:rPr lang="zh-TW" altLang="en-US" sz="1600" dirty="0">
+                <a:solidFill>
+                  <a:schemeClr val="tx1"/>
+                </a:solidFill>
                 <a:latin typeface="Times New Roman" panose="02020603050405020304" pitchFamily="18" charset="0"/>
                 <a:ea typeface="標楷體" panose="03000509000000000000" pitchFamily="65" charset="-120"/>
                 <a:cs typeface="Times New Roman" panose="02020603050405020304" pitchFamily="18" charset="0"/>
               </a:rPr>
-              <a:t>Python </a:t>
-            </a:r>
-            <a:r>
-              <a:rPr lang="zh-TW" altLang="en-US" sz="1600" dirty="0">
+              <a:t>硬體電路直通晶片</a:t>
+            </a:r>
+            <a:endParaRPr lang="en-US" altLang="zh-TW" sz="1600" dirty="0">
+              <a:solidFill>
+                <a:schemeClr val="tx1"/>
+              </a:solidFill>
+              <a:latin typeface="Times New Roman" panose="02020603050405020304" pitchFamily="18" charset="0"/>
+              <a:ea typeface="標楷體" panose="03000509000000000000" pitchFamily="65" charset="-120"/>
+              <a:cs typeface="Times New Roman" panose="02020603050405020304" pitchFamily="18" charset="0"/>
+            </a:endParaRPr>
+          </a:p>
+          <a:p>
+            <a:pPr>
+              <a:lnSpc>
+                <a:spcPts val="3000"/>
+              </a:lnSpc>
+            </a:pPr>
+            <a:r>
+              <a:rPr lang="zh-TW" altLang="en-US" sz="2000" dirty="0">
+                <a:solidFill>
+                  <a:schemeClr val="tx1"/>
+                </a:solidFill>
                 <a:latin typeface="Times New Roman" panose="02020603050405020304" pitchFamily="18" charset="0"/>
                 <a:ea typeface="標楷體" panose="03000509000000000000" pitchFamily="65" charset="-120"/>
                 <a:cs typeface="Times New Roman" panose="02020603050405020304" pitchFamily="18" charset="0"/>
               </a:rPr>
-              <a:t>描述與整合 </a:t>
-            </a:r>
-            <a:r>
-              <a:rPr lang="en-US" altLang="zh-TW" sz="1600" dirty="0">
+              <a:t>風險</a:t>
+            </a:r>
+            <a:endParaRPr lang="en-US" altLang="zh-TW" sz="2000" dirty="0">
+              <a:solidFill>
+                <a:schemeClr val="tx1"/>
+              </a:solidFill>
+              <a:latin typeface="Times New Roman" panose="02020603050405020304" pitchFamily="18" charset="0"/>
+              <a:ea typeface="標楷體" panose="03000509000000000000" pitchFamily="65" charset="-120"/>
+              <a:cs typeface="Times New Roman" panose="02020603050405020304" pitchFamily="18" charset="0"/>
+            </a:endParaRPr>
+          </a:p>
+          <a:p>
+            <a:pPr lvl="1">
+              <a:lnSpc>
+                <a:spcPts val="3000"/>
+              </a:lnSpc>
+            </a:pPr>
+            <a:r>
+              <a:rPr lang="zh-TW" altLang="zh-TW" sz="1600" dirty="0">
                 <a:latin typeface="Times New Roman" panose="02020603050405020304" pitchFamily="18" charset="0"/>
                 <a:ea typeface="標楷體" panose="03000509000000000000" pitchFamily="65" charset="-120"/>
                 <a:cs typeface="Times New Roman" panose="02020603050405020304" pitchFamily="18" charset="0"/>
               </a:rPr>
-              <a:t>FPGA </a:t>
-            </a:r>
-            <a:r>
-              <a:rPr lang="zh-TW" altLang="en-US" sz="1600" dirty="0">
+              <a:t>3.3 V 直流偏壓與輸出電壓不一致</a:t>
+            </a:r>
+            <a:endParaRPr lang="en-US" altLang="zh-TW" sz="1600" dirty="0">
+              <a:latin typeface="Times New Roman" panose="02020603050405020304" pitchFamily="18" charset="0"/>
+              <a:ea typeface="標楷體" panose="03000509000000000000" pitchFamily="65" charset="-120"/>
+              <a:cs typeface="Times New Roman" panose="02020603050405020304" pitchFamily="18" charset="0"/>
+            </a:endParaRPr>
+          </a:p>
+          <a:p>
+            <a:pPr lvl="1">
+              <a:lnSpc>
+                <a:spcPts val="3000"/>
+              </a:lnSpc>
+            </a:pPr>
+            <a:r>
+              <a:rPr lang="zh-TW" altLang="zh-TW" sz="1600" dirty="0">
                 <a:latin typeface="Times New Roman" panose="02020603050405020304" pitchFamily="18" charset="0"/>
                 <a:ea typeface="標楷體" panose="03000509000000000000" pitchFamily="65" charset="-120"/>
                 <a:cs typeface="Times New Roman" panose="02020603050405020304" pitchFamily="18" charset="0"/>
               </a:rPr>
-              <a:t>硬體模組，建立 </a:t>
-            </a:r>
-            <a:r>
-              <a:rPr lang="en-US" altLang="zh-TW" sz="1600" dirty="0">
-                <a:latin typeface="Times New Roman" panose="02020603050405020304" pitchFamily="18" charset="0"/>
-                <a:ea typeface="標楷體" panose="03000509000000000000" pitchFamily="65" charset="-120"/>
-                <a:cs typeface="Times New Roman" panose="02020603050405020304" pitchFamily="18" charset="0"/>
-              </a:rPr>
-              <a:t>SoC</a:t>
-            </a:r>
-            <a:r>
-              <a:rPr lang="zh-TW" altLang="en-US" sz="1600" dirty="0">
-                <a:latin typeface="Times New Roman" panose="02020603050405020304" pitchFamily="18" charset="0"/>
-                <a:ea typeface="標楷體" panose="03000509000000000000" pitchFamily="65" charset="-120"/>
-                <a:cs typeface="Times New Roman" panose="02020603050405020304" pitchFamily="18" charset="0"/>
-              </a:rPr>
-              <a:t> 設計，並支援產生 </a:t>
-            </a:r>
-            <a:r>
-              <a:rPr lang="en-US" altLang="zh-TW" sz="1600" dirty="0">
-                <a:latin typeface="Times New Roman" panose="02020603050405020304" pitchFamily="18" charset="0"/>
-                <a:ea typeface="標楷體" panose="03000509000000000000" pitchFamily="65" charset="-120"/>
-                <a:cs typeface="Times New Roman" panose="02020603050405020304" pitchFamily="18" charset="0"/>
-              </a:rPr>
-              <a:t>HDL </a:t>
-            </a:r>
-            <a:r>
-              <a:rPr lang="zh-TW" altLang="en-US" sz="1600" dirty="0">
-                <a:latin typeface="Times New Roman" panose="02020603050405020304" pitchFamily="18" charset="0"/>
-                <a:ea typeface="標楷體" panose="03000509000000000000" pitchFamily="65" charset="-120"/>
-                <a:cs typeface="Times New Roman" panose="02020603050405020304" pitchFamily="18" charset="0"/>
-              </a:rPr>
-              <a:t>與呼叫 </a:t>
-            </a:r>
-            <a:r>
-              <a:rPr lang="en-US" altLang="zh-TW" sz="1600" dirty="0">
-                <a:latin typeface="Times New Roman" panose="02020603050405020304" pitchFamily="18" charset="0"/>
-                <a:ea typeface="標楷體" panose="03000509000000000000" pitchFamily="65" charset="-120"/>
-                <a:cs typeface="Times New Roman" panose="02020603050405020304" pitchFamily="18" charset="0"/>
-              </a:rPr>
-              <a:t>FPGA </a:t>
-            </a:r>
-            <a:r>
-              <a:rPr lang="zh-TW" altLang="en-US" sz="1600" dirty="0">
-                <a:latin typeface="Times New Roman" panose="02020603050405020304" pitchFamily="18" charset="0"/>
-                <a:ea typeface="標楷體" panose="03000509000000000000" pitchFamily="65" charset="-120"/>
-                <a:cs typeface="Times New Roman" panose="02020603050405020304" pitchFamily="18" charset="0"/>
-              </a:rPr>
-              <a:t>建置工具</a:t>
+              <a:t>阻抗不匹配與高頻訊號反射</a:t>
             </a:r>
           </a:p>
         </p:txBody>
       </p:sp>
-      <p:pic>
-        <p:nvPicPr>
-          <p:cNvPr id="4" name="圖片 3">
+      <p:grpSp>
+        <p:nvGrpSpPr>
+          <p:cNvPr id="9" name="群組 8">
             <a:extLst>
               <a:ext uri="{FF2B5EF4-FFF2-40B4-BE49-F238E27FC236}">
-                <a16:creationId xmlns:a16="http://schemas.microsoft.com/office/drawing/2014/main" id="{17EB3549-39B2-8D39-F9FE-F239173F6642}"/>
+                <a16:creationId xmlns:a16="http://schemas.microsoft.com/office/drawing/2014/main" id="{76975124-E8E3-08DF-BBB4-363F9CD7646B}"/>
               </a:ext>
             </a:extLst>
           </p:cNvPr>
-          <p:cNvPicPr>
-            <a:picLocks noChangeAspect="1"/>
-          </p:cNvPicPr>
+          <p:cNvGrpSpPr/>
           <p:nvPr/>
-        </p:nvPicPr>
-        <p:blipFill>
-          <a:blip r:embed="rId3"/>
-          <a:stretch>
-            <a:fillRect/>
-          </a:stretch>
-        </p:blipFill>
-        <p:spPr>
+        </p:nvGrpSpPr>
+        <p:grpSpPr>
           <a:xfrm>
-            <a:off x="5002255" y="3547242"/>
-            <a:ext cx="4294143" cy="2594378"/>
+            <a:off x="2456182" y="3866261"/>
+            <a:ext cx="3713480" cy="2382139"/>
+            <a:chOff x="2791462" y="3600175"/>
+            <a:chExt cx="3713480" cy="2382139"/>
           </a:xfrm>
-          <a:prstGeom prst="rect">
-            <a:avLst/>
-          </a:prstGeom>
-        </p:spPr>
-      </p:pic>
-      <p:pic>
-        <p:nvPicPr>
-          <p:cNvPr id="7" name="圖片 6">
+        </p:grpSpPr>
+        <p:pic>
+          <p:nvPicPr>
+            <p:cNvPr id="4" name="圖片 3">
+              <a:extLst>
+                <a:ext uri="{FF2B5EF4-FFF2-40B4-BE49-F238E27FC236}">
+                  <a16:creationId xmlns:a16="http://schemas.microsoft.com/office/drawing/2014/main" id="{17EB3549-39B2-8D39-F9FE-F239173F6642}"/>
+                </a:ext>
+              </a:extLst>
+            </p:cNvPr>
+            <p:cNvPicPr>
+              <a:picLocks noChangeAspect="1"/>
+            </p:cNvPicPr>
+            <p:nvPr/>
+          </p:nvPicPr>
+          <p:blipFill>
+            <a:blip r:embed="rId3"/>
+            <a:srcRect l="6306" r="7217" b="8181"/>
+            <a:stretch>
+              <a:fillRect/>
+            </a:stretch>
+          </p:blipFill>
+          <p:spPr>
+            <a:xfrm>
+              <a:off x="2791462" y="3600175"/>
+              <a:ext cx="3713480" cy="2382139"/>
+            </a:xfrm>
+            <a:prstGeom prst="rect">
+              <a:avLst/>
+            </a:prstGeom>
+          </p:spPr>
+        </p:pic>
+        <p:sp>
+          <p:nvSpPr>
+            <p:cNvPr id="3" name="矩形 2">
+              <a:extLst>
+                <a:ext uri="{FF2B5EF4-FFF2-40B4-BE49-F238E27FC236}">
+                  <a16:creationId xmlns:a16="http://schemas.microsoft.com/office/drawing/2014/main" id="{296711C8-3760-FF99-F549-AE06B8734FE4}"/>
+                </a:ext>
+              </a:extLst>
+            </p:cNvPr>
+            <p:cNvSpPr/>
+            <p:nvPr/>
+          </p:nvSpPr>
+          <p:spPr>
+            <a:xfrm>
+              <a:off x="4676140" y="4697074"/>
+              <a:ext cx="500380" cy="165100"/>
+            </a:xfrm>
+            <a:prstGeom prst="rect">
+              <a:avLst/>
+            </a:prstGeom>
+            <a:noFill/>
+            <a:ln>
+              <a:solidFill>
+                <a:srgbClr val="FF0000"/>
+              </a:solidFill>
+            </a:ln>
+          </p:spPr>
+          <p:style>
+            <a:lnRef idx="2">
+              <a:schemeClr val="accent1">
+                <a:shade val="15000"/>
+              </a:schemeClr>
+            </a:lnRef>
+            <a:fillRef idx="1">
+              <a:schemeClr val="accent1"/>
+            </a:fillRef>
+            <a:effectRef idx="0">
+              <a:schemeClr val="accent1"/>
+            </a:effectRef>
+            <a:fontRef idx="minor">
+              <a:schemeClr val="lt1"/>
+            </a:fontRef>
+          </p:style>
+          <p:txBody>
+            <a:bodyPr rtlCol="0" anchor="ctr"/>
+            <a:lstStyle/>
+            <a:p>
+              <a:pPr algn="ctr"/>
+              <a:endParaRPr lang="zh-TW" altLang="en-US"/>
+            </a:p>
+          </p:txBody>
+        </p:sp>
+      </p:grpSp>
+      <p:grpSp>
+        <p:nvGrpSpPr>
+          <p:cNvPr id="8" name="群組 7">
             <a:extLst>
               <a:ext uri="{FF2B5EF4-FFF2-40B4-BE49-F238E27FC236}">
-                <a16:creationId xmlns:a16="http://schemas.microsoft.com/office/drawing/2014/main" id="{2A146F38-59DE-6890-C656-6D1C3D184645}"/>
+                <a16:creationId xmlns:a16="http://schemas.microsoft.com/office/drawing/2014/main" id="{90913244-4751-3518-901A-D963712D6AE5}"/>
               </a:ext>
             </a:extLst>
           </p:cNvPr>
-          <p:cNvPicPr>
-            <a:picLocks noChangeAspect="1"/>
-          </p:cNvPicPr>
+          <p:cNvGrpSpPr/>
           <p:nvPr/>
-        </p:nvPicPr>
-        <p:blipFill>
-          <a:blip r:embed="rId4"/>
-          <a:stretch>
-            <a:fillRect/>
-          </a:stretch>
-        </p:blipFill>
-        <p:spPr>
+        </p:nvGrpSpPr>
+        <p:grpSpPr>
           <a:xfrm>
-            <a:off x="2179494" y="2317532"/>
+            <a:off x="6395699" y="1409086"/>
             <a:ext cx="2565419" cy="4839314"/>
+            <a:chOff x="6730979" y="1143000"/>
+            <a:chExt cx="2565419" cy="4839314"/>
           </a:xfrm>
-          <a:prstGeom prst="rect">
-            <a:avLst/>
-          </a:prstGeom>
-        </p:spPr>
-      </p:pic>
+        </p:grpSpPr>
+        <p:pic>
+          <p:nvPicPr>
+            <p:cNvPr id="7" name="圖片 6">
+              <a:extLst>
+                <a:ext uri="{FF2B5EF4-FFF2-40B4-BE49-F238E27FC236}">
+                  <a16:creationId xmlns:a16="http://schemas.microsoft.com/office/drawing/2014/main" id="{2A146F38-59DE-6890-C656-6D1C3D184645}"/>
+                </a:ext>
+              </a:extLst>
+            </p:cNvPr>
+            <p:cNvPicPr>
+              <a:picLocks noChangeAspect="1"/>
+            </p:cNvPicPr>
+            <p:nvPr/>
+          </p:nvPicPr>
+          <p:blipFill>
+            <a:blip r:embed="rId4"/>
+            <a:stretch>
+              <a:fillRect/>
+            </a:stretch>
+          </p:blipFill>
+          <p:spPr>
+            <a:xfrm>
+              <a:off x="6730979" y="1143000"/>
+              <a:ext cx="2565419" cy="4839314"/>
+            </a:xfrm>
+            <a:prstGeom prst="rect">
+              <a:avLst/>
+            </a:prstGeom>
+          </p:spPr>
+        </p:pic>
+        <p:sp>
+          <p:nvSpPr>
+            <p:cNvPr id="6" name="矩形 5">
+              <a:extLst>
+                <a:ext uri="{FF2B5EF4-FFF2-40B4-BE49-F238E27FC236}">
+                  <a16:creationId xmlns:a16="http://schemas.microsoft.com/office/drawing/2014/main" id="{12F990E7-7D23-D5CC-3EF0-83A44E289218}"/>
+                </a:ext>
+              </a:extLst>
+            </p:cNvPr>
+            <p:cNvSpPr/>
+            <p:nvPr/>
+          </p:nvSpPr>
+          <p:spPr>
+            <a:xfrm>
+              <a:off x="8355330" y="3738224"/>
+              <a:ext cx="571500" cy="197506"/>
+            </a:xfrm>
+            <a:prstGeom prst="rect">
+              <a:avLst/>
+            </a:prstGeom>
+            <a:noFill/>
+            <a:ln>
+              <a:solidFill>
+                <a:srgbClr val="FF0000"/>
+              </a:solidFill>
+            </a:ln>
+          </p:spPr>
+          <p:style>
+            <a:lnRef idx="2">
+              <a:schemeClr val="accent1">
+                <a:shade val="15000"/>
+              </a:schemeClr>
+            </a:lnRef>
+            <a:fillRef idx="1">
+              <a:schemeClr val="accent1"/>
+            </a:fillRef>
+            <a:effectRef idx="0">
+              <a:schemeClr val="accent1"/>
+            </a:effectRef>
+            <a:fontRef idx="minor">
+              <a:schemeClr val="lt1"/>
+            </a:fontRef>
+          </p:style>
+          <p:txBody>
+            <a:bodyPr rtlCol="0" anchor="ctr"/>
+            <a:lstStyle/>
+            <a:p>
+              <a:pPr algn="ctr"/>
+              <a:endParaRPr lang="zh-TW" altLang="en-US"/>
+            </a:p>
+          </p:txBody>
+        </p:sp>
+      </p:grpSp>
     </p:spTree>
     <p:extLst>
       <p:ext uri="{BB962C8B-B14F-4D97-AF65-F5344CB8AC3E}">
@@ -9871,6 +10324,542 @@
 </file>
 
 <file path=ppt/slides/slide6.xml><?xml version="1.0" encoding="utf-8"?>
+<p:sld xmlns:a="http://schemas.openxmlformats.org/drawingml/2006/main" xmlns:r="http://schemas.openxmlformats.org/officeDocument/2006/relationships" xmlns:p="http://schemas.openxmlformats.org/presentationml/2006/main">
+  <p:cSld>
+    <p:spTree>
+      <p:nvGrpSpPr>
+        <p:cNvPr id="1" name="">
+          <a:extLst>
+            <a:ext uri="{FF2B5EF4-FFF2-40B4-BE49-F238E27FC236}">
+              <a16:creationId xmlns:a16="http://schemas.microsoft.com/office/drawing/2014/main" id="{1FD8BDF0-8203-5101-5AD7-8123D67DB439}"/>
+            </a:ext>
+          </a:extLst>
+        </p:cNvPr>
+        <p:cNvGrpSpPr/>
+        <p:nvPr/>
+      </p:nvGrpSpPr>
+      <p:grpSpPr>
+        <a:xfrm>
+          <a:off x="0" y="0"/>
+          <a:ext cx="0" cy="0"/>
+          <a:chOff x="0" y="0"/>
+          <a:chExt cx="0" cy="0"/>
+        </a:xfrm>
+      </p:grpSpPr>
+      <p:sp>
+        <p:nvSpPr>
+          <p:cNvPr id="15" name="標題 1">
+            <a:extLst>
+              <a:ext uri="{FF2B5EF4-FFF2-40B4-BE49-F238E27FC236}">
+                <a16:creationId xmlns:a16="http://schemas.microsoft.com/office/drawing/2014/main" id="{EC9E0606-7D9A-7A5E-BEE9-FE41BD691F6D}"/>
+              </a:ext>
+            </a:extLst>
+          </p:cNvPr>
+          <p:cNvSpPr>
+            <a:spLocks noGrp="1"/>
+          </p:cNvSpPr>
+          <p:nvPr>
+            <p:ph type="title"/>
+          </p:nvPr>
+        </p:nvSpPr>
+        <p:spPr>
+          <a:xfrm>
+            <a:off x="609602" y="609600"/>
+            <a:ext cx="8077200" cy="533400"/>
+          </a:xfrm>
+          <a:ln>
+            <a:noFill/>
+          </a:ln>
+        </p:spPr>
+        <p:txBody>
+          <a:bodyPr/>
+          <a:lstStyle/>
+          <a:p>
+            <a:r>
+              <a:rPr lang="zh-TW" altLang="en-US" dirty="0">
+                <a:latin typeface="Times New Roman" panose="02020603050405020304" pitchFamily="18" charset="0"/>
+                <a:ea typeface="標楷體" panose="03000509000000000000" pitchFamily="65" charset="-120"/>
+                <a:cs typeface="Times New Roman" panose="02020603050405020304" pitchFamily="18" charset="0"/>
+              </a:rPr>
+              <a:t>本次進度</a:t>
+            </a:r>
+            <a:r>
+              <a:rPr lang="en-US" altLang="zh-TW" dirty="0">
+                <a:latin typeface="Times New Roman" panose="02020603050405020304" pitchFamily="18" charset="0"/>
+                <a:ea typeface="標楷體" panose="03000509000000000000" pitchFamily="65" charset="-120"/>
+                <a:cs typeface="Times New Roman" panose="02020603050405020304" pitchFamily="18" charset="0"/>
+              </a:rPr>
+              <a:t>: NeTV2</a:t>
+            </a:r>
+            <a:endParaRPr lang="zh-TW" altLang="en-US" dirty="0">
+              <a:latin typeface="Times New Roman" panose="02020603050405020304" pitchFamily="18" charset="0"/>
+              <a:ea typeface="標楷體" panose="03000509000000000000" pitchFamily="65" charset="-120"/>
+              <a:cs typeface="Times New Roman" panose="02020603050405020304" pitchFamily="18" charset="0"/>
+            </a:endParaRPr>
+          </a:p>
+        </p:txBody>
+      </p:sp>
+      <p:sp>
+        <p:nvSpPr>
+          <p:cNvPr id="2" name="文字版面配置區 6">
+            <a:extLst>
+              <a:ext uri="{FF2B5EF4-FFF2-40B4-BE49-F238E27FC236}">
+                <a16:creationId xmlns:a16="http://schemas.microsoft.com/office/drawing/2014/main" id="{F11FE19D-395D-C6BE-38FF-AD4C02E0FA80}"/>
+              </a:ext>
+            </a:extLst>
+          </p:cNvPr>
+          <p:cNvSpPr txBox="1"/>
+          <p:nvPr/>
+        </p:nvSpPr>
+        <p:spPr>
+          <a:xfrm>
+            <a:off x="609602" y="935857"/>
+            <a:ext cx="8686796" cy="4700685"/>
+          </a:xfrm>
+          <a:prstGeom prst="rect">
+            <a:avLst/>
+          </a:prstGeom>
+          <a:noFill/>
+          <a:ln>
+            <a:noFill/>
+          </a:ln>
+        </p:spPr>
+        <p:txBody>
+          <a:bodyPr spcFirstLastPara="1" wrap="square" lIns="91425" tIns="45700" rIns="91425" bIns="45700" anchor="t" anchorCtr="0">
+            <a:noAutofit/>
+          </a:bodyPr>
+          <a:lstStyle>
+            <a:defPPr marR="0" lvl="0" algn="l" rtl="0">
+              <a:lnSpc>
+                <a:spcPct val="100000"/>
+              </a:lnSpc>
+              <a:spcBef>
+                <a:spcPts val="0"/>
+              </a:spcBef>
+              <a:spcAft>
+                <a:spcPts val="0"/>
+              </a:spcAft>
+            </a:defPPr>
+            <a:lvl1pPr marL="457200" marR="0" lvl="0" indent="-406400" algn="l" rtl="0">
+              <a:lnSpc>
+                <a:spcPct val="100000"/>
+              </a:lnSpc>
+              <a:spcBef>
+                <a:spcPts val="560"/>
+              </a:spcBef>
+              <a:spcAft>
+                <a:spcPts val="0"/>
+              </a:spcAft>
+              <a:buClr>
+                <a:schemeClr val="accent2"/>
+              </a:buClr>
+              <a:buSzPts val="2800"/>
+              <a:buFont typeface="Noto Sans Symbols"/>
+              <a:buChar char="❖"/>
+              <a:defRPr sz="2800" b="0" i="0" u="none" strike="noStrike" cap="none">
+                <a:solidFill>
+                  <a:schemeClr val="dk1"/>
+                </a:solidFill>
+                <a:latin typeface="Times New Roman"/>
+                <a:ea typeface="Times New Roman"/>
+                <a:cs typeface="Times New Roman"/>
+                <a:sym typeface="Times New Roman"/>
+              </a:defRPr>
+            </a:lvl1pPr>
+            <a:lvl2pPr marL="914400" marR="0" lvl="1" indent="-381000" algn="l" rtl="0">
+              <a:lnSpc>
+                <a:spcPct val="100000"/>
+              </a:lnSpc>
+              <a:spcBef>
+                <a:spcPts val="480"/>
+              </a:spcBef>
+              <a:spcAft>
+                <a:spcPts val="0"/>
+              </a:spcAft>
+              <a:buClr>
+                <a:srgbClr val="FF5050"/>
+              </a:buClr>
+              <a:buSzPts val="2400"/>
+              <a:buFont typeface="Noto Sans Symbols"/>
+              <a:buChar char="▪"/>
+              <a:defRPr sz="2400" b="0" i="0" u="none" strike="noStrike" cap="none">
+                <a:solidFill>
+                  <a:schemeClr val="dk1"/>
+                </a:solidFill>
+                <a:latin typeface="Times New Roman"/>
+                <a:ea typeface="Times New Roman"/>
+                <a:cs typeface="Times New Roman"/>
+                <a:sym typeface="Times New Roman"/>
+              </a:defRPr>
+            </a:lvl2pPr>
+            <a:lvl3pPr marL="1371600" marR="0" lvl="2" indent="-355600" algn="l" rtl="0">
+              <a:lnSpc>
+                <a:spcPct val="100000"/>
+              </a:lnSpc>
+              <a:spcBef>
+                <a:spcPts val="400"/>
+              </a:spcBef>
+              <a:spcAft>
+                <a:spcPts val="0"/>
+              </a:spcAft>
+              <a:buClr>
+                <a:srgbClr val="6699FF"/>
+              </a:buClr>
+              <a:buSzPts val="2000"/>
+              <a:buFont typeface="Times New Roman"/>
+              <a:buChar char="•"/>
+              <a:defRPr sz="2000" b="0" i="0" u="none" strike="noStrike" cap="none">
+                <a:solidFill>
+                  <a:schemeClr val="dk1"/>
+                </a:solidFill>
+                <a:latin typeface="Times New Roman"/>
+                <a:ea typeface="Times New Roman"/>
+                <a:cs typeface="Times New Roman"/>
+                <a:sym typeface="Times New Roman"/>
+              </a:defRPr>
+            </a:lvl3pPr>
+            <a:lvl4pPr marL="1828800" marR="0" lvl="3" indent="-355600" algn="l" rtl="0">
+              <a:lnSpc>
+                <a:spcPct val="100000"/>
+              </a:lnSpc>
+              <a:spcBef>
+                <a:spcPts val="400"/>
+              </a:spcBef>
+              <a:spcAft>
+                <a:spcPts val="0"/>
+              </a:spcAft>
+              <a:buClr>
+                <a:srgbClr val="FF5050"/>
+              </a:buClr>
+              <a:buSzPts val="2000"/>
+              <a:buFont typeface="Times New Roman"/>
+              <a:buChar char="o"/>
+              <a:defRPr sz="2000" b="0" i="0" u="none" strike="noStrike" cap="none">
+                <a:solidFill>
+                  <a:schemeClr val="dk1"/>
+                </a:solidFill>
+                <a:latin typeface="Times New Roman"/>
+                <a:ea typeface="Times New Roman"/>
+                <a:cs typeface="Times New Roman"/>
+                <a:sym typeface="Times New Roman"/>
+              </a:defRPr>
+            </a:lvl4pPr>
+            <a:lvl5pPr marL="2286000" marR="0" lvl="4" indent="-355600" algn="l" rtl="0">
+              <a:lnSpc>
+                <a:spcPct val="100000"/>
+              </a:lnSpc>
+              <a:spcBef>
+                <a:spcPts val="400"/>
+              </a:spcBef>
+              <a:spcAft>
+                <a:spcPts val="0"/>
+              </a:spcAft>
+              <a:buClr>
+                <a:srgbClr val="FF5050"/>
+              </a:buClr>
+              <a:buSzPts val="2000"/>
+              <a:buFont typeface="Times New Roman"/>
+              <a:buChar char="o"/>
+              <a:defRPr sz="2000" b="0" i="0" u="none" strike="noStrike" cap="none">
+                <a:solidFill>
+                  <a:schemeClr val="dk1"/>
+                </a:solidFill>
+                <a:latin typeface="Times New Roman"/>
+                <a:ea typeface="Times New Roman"/>
+                <a:cs typeface="Times New Roman"/>
+                <a:sym typeface="Times New Roman"/>
+              </a:defRPr>
+            </a:lvl5pPr>
+            <a:lvl6pPr marL="2743200" marR="0" lvl="5" indent="-355600" algn="l" rtl="0">
+              <a:lnSpc>
+                <a:spcPct val="100000"/>
+              </a:lnSpc>
+              <a:spcBef>
+                <a:spcPts val="400"/>
+              </a:spcBef>
+              <a:spcAft>
+                <a:spcPts val="0"/>
+              </a:spcAft>
+              <a:buClr>
+                <a:srgbClr val="FF5050"/>
+              </a:buClr>
+              <a:buSzPts val="2000"/>
+              <a:buFont typeface="Times New Roman"/>
+              <a:buChar char="o"/>
+              <a:defRPr sz="2000" b="0" i="0" u="none" strike="noStrike" cap="none">
+                <a:solidFill>
+                  <a:schemeClr val="dk1"/>
+                </a:solidFill>
+                <a:latin typeface="Times New Roman"/>
+                <a:ea typeface="Times New Roman"/>
+                <a:cs typeface="Times New Roman"/>
+                <a:sym typeface="Times New Roman"/>
+              </a:defRPr>
+            </a:lvl6pPr>
+            <a:lvl7pPr marL="3200400" marR="0" lvl="6" indent="-355600" algn="l" rtl="0">
+              <a:lnSpc>
+                <a:spcPct val="100000"/>
+              </a:lnSpc>
+              <a:spcBef>
+                <a:spcPts val="400"/>
+              </a:spcBef>
+              <a:spcAft>
+                <a:spcPts val="0"/>
+              </a:spcAft>
+              <a:buClr>
+                <a:srgbClr val="FF5050"/>
+              </a:buClr>
+              <a:buSzPts val="2000"/>
+              <a:buFont typeface="Times New Roman"/>
+              <a:buChar char="o"/>
+              <a:defRPr sz="2000" b="0" i="0" u="none" strike="noStrike" cap="none">
+                <a:solidFill>
+                  <a:schemeClr val="dk1"/>
+                </a:solidFill>
+                <a:latin typeface="Times New Roman"/>
+                <a:ea typeface="Times New Roman"/>
+                <a:cs typeface="Times New Roman"/>
+                <a:sym typeface="Times New Roman"/>
+              </a:defRPr>
+            </a:lvl7pPr>
+            <a:lvl8pPr marL="3657600" marR="0" lvl="7" indent="-355600" algn="l" rtl="0">
+              <a:lnSpc>
+                <a:spcPct val="100000"/>
+              </a:lnSpc>
+              <a:spcBef>
+                <a:spcPts val="400"/>
+              </a:spcBef>
+              <a:spcAft>
+                <a:spcPts val="0"/>
+              </a:spcAft>
+              <a:buClr>
+                <a:srgbClr val="FF5050"/>
+              </a:buClr>
+              <a:buSzPts val="2000"/>
+              <a:buFont typeface="Times New Roman"/>
+              <a:buChar char="o"/>
+              <a:defRPr sz="2000" b="0" i="0" u="none" strike="noStrike" cap="none">
+                <a:solidFill>
+                  <a:schemeClr val="dk1"/>
+                </a:solidFill>
+                <a:latin typeface="Times New Roman"/>
+                <a:ea typeface="Times New Roman"/>
+                <a:cs typeface="Times New Roman"/>
+                <a:sym typeface="Times New Roman"/>
+              </a:defRPr>
+            </a:lvl8pPr>
+            <a:lvl9pPr marL="4114800" marR="0" lvl="8" indent="-355600" algn="l" rtl="0">
+              <a:lnSpc>
+                <a:spcPct val="100000"/>
+              </a:lnSpc>
+              <a:spcBef>
+                <a:spcPts val="400"/>
+              </a:spcBef>
+              <a:spcAft>
+                <a:spcPts val="0"/>
+              </a:spcAft>
+              <a:buClr>
+                <a:srgbClr val="FF5050"/>
+              </a:buClr>
+              <a:buSzPts val="2000"/>
+              <a:buFont typeface="Times New Roman"/>
+              <a:buChar char="o"/>
+              <a:defRPr sz="2000" b="0" i="0" u="none" strike="noStrike" cap="none">
+                <a:solidFill>
+                  <a:schemeClr val="dk1"/>
+                </a:solidFill>
+                <a:latin typeface="Times New Roman"/>
+                <a:ea typeface="Times New Roman"/>
+                <a:cs typeface="Times New Roman"/>
+                <a:sym typeface="Times New Roman"/>
+              </a:defRPr>
+            </a:lvl9pPr>
+          </a:lstStyle>
+          <a:p>
+            <a:pPr>
+              <a:lnSpc>
+                <a:spcPts val="3000"/>
+              </a:lnSpc>
+            </a:pPr>
+            <a:r>
+              <a:rPr lang="en-US" altLang="zh-TW" sz="2000" dirty="0">
+                <a:solidFill>
+                  <a:schemeClr val="tx1"/>
+                </a:solidFill>
+                <a:latin typeface="Times New Roman" panose="02020603050405020304" pitchFamily="18" charset="0"/>
+                <a:ea typeface="標楷體" panose="03000509000000000000" pitchFamily="65" charset="-120"/>
+                <a:cs typeface="Times New Roman" panose="02020603050405020304" pitchFamily="18" charset="0"/>
+              </a:rPr>
+              <a:t> HDMI</a:t>
+            </a:r>
+            <a:r>
+              <a:rPr lang="zh-TW" altLang="en-US" sz="2000" dirty="0">
+                <a:solidFill>
+                  <a:schemeClr val="tx1"/>
+                </a:solidFill>
+                <a:latin typeface="Times New Roman" panose="02020603050405020304" pitchFamily="18" charset="0"/>
+                <a:ea typeface="標楷體" panose="03000509000000000000" pitchFamily="65" charset="-120"/>
+                <a:cs typeface="Times New Roman" panose="02020603050405020304" pitchFamily="18" charset="0"/>
+              </a:rPr>
+              <a:t> 作為 </a:t>
+            </a:r>
+            <a:r>
+              <a:rPr lang="en-US" altLang="zh-TW" sz="2000" dirty="0">
+                <a:solidFill>
+                  <a:schemeClr val="tx1"/>
+                </a:solidFill>
+                <a:latin typeface="Times New Roman" panose="02020603050405020304" pitchFamily="18" charset="0"/>
+                <a:ea typeface="標楷體" panose="03000509000000000000" pitchFamily="65" charset="-120"/>
+                <a:cs typeface="Times New Roman" panose="02020603050405020304" pitchFamily="18" charset="0"/>
+              </a:rPr>
+              <a:t>SDI</a:t>
+            </a:r>
+            <a:r>
+              <a:rPr lang="zh-TW" altLang="en-US" sz="2000" dirty="0">
+                <a:solidFill>
+                  <a:schemeClr val="tx1"/>
+                </a:solidFill>
+                <a:latin typeface="Times New Roman" panose="02020603050405020304" pitchFamily="18" charset="0"/>
+                <a:ea typeface="標楷體" panose="03000509000000000000" pitchFamily="65" charset="-120"/>
+                <a:cs typeface="Times New Roman" panose="02020603050405020304" pitchFamily="18" charset="0"/>
+              </a:rPr>
+              <a:t> 信號入口的可能性</a:t>
+            </a:r>
+            <a:endParaRPr lang="en-US" altLang="zh-TW" sz="2000" dirty="0">
+              <a:solidFill>
+                <a:schemeClr val="tx1"/>
+              </a:solidFill>
+              <a:latin typeface="Times New Roman" panose="02020603050405020304" pitchFamily="18" charset="0"/>
+              <a:ea typeface="標楷體" panose="03000509000000000000" pitchFamily="65" charset="-120"/>
+              <a:cs typeface="Times New Roman" panose="02020603050405020304" pitchFamily="18" charset="0"/>
+            </a:endParaRPr>
+          </a:p>
+          <a:p>
+            <a:pPr lvl="1">
+              <a:lnSpc>
+                <a:spcPts val="3000"/>
+              </a:lnSpc>
+            </a:pPr>
+            <a:r>
+              <a:rPr lang="zh-TW" altLang="zh-TW" sz="1600" dirty="0">
+                <a:latin typeface="Times New Roman" panose="02020603050405020304" pitchFamily="18" charset="0"/>
+                <a:ea typeface="標楷體" panose="03000509000000000000" pitchFamily="65" charset="-120"/>
+                <a:cs typeface="Times New Roman" panose="02020603050405020304" pitchFamily="18" charset="0"/>
+              </a:rPr>
+              <a:t>SDI 與 HDMI 的資料速率相近</a:t>
+            </a:r>
+            <a:endParaRPr lang="en-US" altLang="zh-TW" sz="1600" dirty="0">
+              <a:solidFill>
+                <a:schemeClr val="tx1"/>
+              </a:solidFill>
+              <a:latin typeface="Times New Roman" panose="02020603050405020304" pitchFamily="18" charset="0"/>
+              <a:ea typeface="標楷體" panose="03000509000000000000" pitchFamily="65" charset="-120"/>
+              <a:cs typeface="Times New Roman" panose="02020603050405020304" pitchFamily="18" charset="0"/>
+            </a:endParaRPr>
+          </a:p>
+          <a:p>
+            <a:pPr lvl="1">
+              <a:lnSpc>
+                <a:spcPts val="3000"/>
+              </a:lnSpc>
+            </a:pPr>
+            <a:r>
+              <a:rPr lang="zh-TW" altLang="en-US" sz="1600" dirty="0">
+                <a:solidFill>
+                  <a:schemeClr val="tx1"/>
+                </a:solidFill>
+                <a:latin typeface="Times New Roman" panose="02020603050405020304" pitchFamily="18" charset="0"/>
+                <a:ea typeface="標楷體" panose="03000509000000000000" pitchFamily="65" charset="-120"/>
+                <a:cs typeface="Times New Roman" panose="02020603050405020304" pitchFamily="18" charset="0"/>
+              </a:rPr>
+              <a:t>硬體電路直通晶片</a:t>
+            </a:r>
+            <a:endParaRPr lang="en-US" altLang="zh-TW" sz="1600" dirty="0">
+              <a:solidFill>
+                <a:schemeClr val="tx1"/>
+              </a:solidFill>
+              <a:latin typeface="Times New Roman" panose="02020603050405020304" pitchFamily="18" charset="0"/>
+              <a:ea typeface="標楷體" panose="03000509000000000000" pitchFamily="65" charset="-120"/>
+              <a:cs typeface="Times New Roman" panose="02020603050405020304" pitchFamily="18" charset="0"/>
+            </a:endParaRPr>
+          </a:p>
+          <a:p>
+            <a:pPr>
+              <a:lnSpc>
+                <a:spcPts val="3000"/>
+              </a:lnSpc>
+            </a:pPr>
+            <a:r>
+              <a:rPr lang="zh-TW" altLang="en-US" sz="2000" dirty="0">
+                <a:solidFill>
+                  <a:schemeClr val="tx1"/>
+                </a:solidFill>
+                <a:latin typeface="Times New Roman" panose="02020603050405020304" pitchFamily="18" charset="0"/>
+                <a:ea typeface="標楷體" panose="03000509000000000000" pitchFamily="65" charset="-120"/>
+                <a:cs typeface="Times New Roman" panose="02020603050405020304" pitchFamily="18" charset="0"/>
+              </a:rPr>
+              <a:t>風險</a:t>
+            </a:r>
+            <a:endParaRPr lang="en-US" altLang="zh-TW" sz="2000" dirty="0">
+              <a:solidFill>
+                <a:schemeClr val="tx1"/>
+              </a:solidFill>
+              <a:latin typeface="Times New Roman" panose="02020603050405020304" pitchFamily="18" charset="0"/>
+              <a:ea typeface="標楷體" panose="03000509000000000000" pitchFamily="65" charset="-120"/>
+              <a:cs typeface="Times New Roman" panose="02020603050405020304" pitchFamily="18" charset="0"/>
+            </a:endParaRPr>
+          </a:p>
+          <a:p>
+            <a:pPr lvl="1">
+              <a:lnSpc>
+                <a:spcPts val="3000"/>
+              </a:lnSpc>
+            </a:pPr>
+            <a:r>
+              <a:rPr lang="zh-TW" altLang="zh-TW" sz="1600" dirty="0">
+                <a:latin typeface="Times New Roman" panose="02020603050405020304" pitchFamily="18" charset="0"/>
+                <a:ea typeface="標楷體" panose="03000509000000000000" pitchFamily="65" charset="-120"/>
+                <a:cs typeface="Times New Roman" panose="02020603050405020304" pitchFamily="18" charset="0"/>
+              </a:rPr>
+              <a:t>3.3 V 直流偏壓與輸出電壓不一致</a:t>
+            </a:r>
+            <a:endParaRPr lang="en-US" altLang="zh-TW" sz="1600" dirty="0">
+              <a:latin typeface="Times New Roman" panose="02020603050405020304" pitchFamily="18" charset="0"/>
+              <a:ea typeface="標楷體" panose="03000509000000000000" pitchFamily="65" charset="-120"/>
+              <a:cs typeface="Times New Roman" panose="02020603050405020304" pitchFamily="18" charset="0"/>
+            </a:endParaRPr>
+          </a:p>
+          <a:p>
+            <a:pPr lvl="1">
+              <a:lnSpc>
+                <a:spcPts val="3000"/>
+              </a:lnSpc>
+            </a:pPr>
+            <a:r>
+              <a:rPr lang="zh-TW" altLang="zh-TW" sz="1600" dirty="0">
+                <a:latin typeface="Times New Roman" panose="02020603050405020304" pitchFamily="18" charset="0"/>
+                <a:ea typeface="標楷體" panose="03000509000000000000" pitchFamily="65" charset="-120"/>
+                <a:cs typeface="Times New Roman" panose="02020603050405020304" pitchFamily="18" charset="0"/>
+              </a:rPr>
+              <a:t>阻抗不匹配與高頻訊號反射</a:t>
+            </a:r>
+          </a:p>
+        </p:txBody>
+      </p:sp>
+    </p:spTree>
+    <p:extLst>
+      <p:ext uri="{BB962C8B-B14F-4D97-AF65-F5344CB8AC3E}">
+        <p14:creationId xmlns:p14="http://schemas.microsoft.com/office/powerpoint/2010/main" val="1762476218"/>
+      </p:ext>
+    </p:extLst>
+  </p:cSld>
+  <p:clrMapOvr>
+    <a:masterClrMapping/>
+  </p:clrMapOvr>
+</p:sld>
+</file>
+
+<file path=ppt/slides/slide7.xml><?xml version="1.0" encoding="utf-8"?>
 <p:sld xmlns:a="http://schemas.openxmlformats.org/drawingml/2006/main" xmlns:r="http://schemas.openxmlformats.org/officeDocument/2006/relationships" xmlns:p="http://schemas.openxmlformats.org/presentationml/2006/main">
   <p:cSld>
     <p:spTree>

--- a/Onyx_進度報告_1020.pptx
+++ b/Onyx_進度報告_1020.pptx
@@ -5,7 +5,7 @@
     <p:sldMasterId id="2147483658" r:id="rId1"/>
   </p:sldMasterIdLst>
   <p:notesMasterIdLst>
-    <p:notesMasterId r:id="rId9"/>
+    <p:notesMasterId r:id="rId10"/>
   </p:notesMasterIdLst>
   <p:sldIdLst>
     <p:sldId id="277" r:id="rId2"/>
@@ -14,7 +14,8 @@
     <p:sldId id="2043" r:id="rId5"/>
     <p:sldId id="2044" r:id="rId6"/>
     <p:sldId id="2045" r:id="rId7"/>
-    <p:sldId id="286" r:id="rId8"/>
+    <p:sldId id="2046" r:id="rId8"/>
+    <p:sldId id="286" r:id="rId9"/>
   </p:sldIdLst>
   <p:sldSz cx="9906000" cy="6858000" type="A4"/>
   <p:notesSz cx="7315200" cy="9601200"/>
@@ -266,6 +267,7 @@
             <p14:sldId id="2043"/>
             <p14:sldId id="2044"/>
             <p14:sldId id="2045"/>
+            <p14:sldId id="2046"/>
           </p14:sldIdLst>
         </p14:section>
         <p14:section name="End" id="{33EEDC85-A799-4CB3-BF13-F4955B8630BE}">
@@ -2418,6 +2420,140 @@
   <p:cSld>
     <p:spTree>
       <p:nvGrpSpPr>
+        <p:cNvPr id="1" name="">
+          <a:extLst>
+            <a:ext uri="{FF2B5EF4-FFF2-40B4-BE49-F238E27FC236}">
+              <a16:creationId xmlns:a16="http://schemas.microsoft.com/office/drawing/2014/main" id="{CFFE527B-4000-F206-6AFC-75F0676BC382}"/>
+            </a:ext>
+          </a:extLst>
+        </p:cNvPr>
+        <p:cNvGrpSpPr/>
+        <p:nvPr/>
+      </p:nvGrpSpPr>
+      <p:grpSpPr>
+        <a:xfrm>
+          <a:off x="0" y="0"/>
+          <a:ext cx="0" cy="0"/>
+          <a:chOff x="0" y="0"/>
+          <a:chExt cx="0" cy="0"/>
+        </a:xfrm>
+      </p:grpSpPr>
+      <p:sp>
+        <p:nvSpPr>
+          <p:cNvPr id="2" name="投影片影像版面配置區 1">
+            <a:extLst>
+              <a:ext uri="{FF2B5EF4-FFF2-40B4-BE49-F238E27FC236}">
+                <a16:creationId xmlns:a16="http://schemas.microsoft.com/office/drawing/2014/main" id="{16931088-1022-C7B4-813F-6A80201816A0}"/>
+              </a:ext>
+            </a:extLst>
+          </p:cNvPr>
+          <p:cNvSpPr>
+            <a:spLocks noGrp="1" noRot="1" noChangeAspect="1"/>
+          </p:cNvSpPr>
+          <p:nvPr>
+            <p:ph type="sldImg"/>
+          </p:nvPr>
+        </p:nvSpPr>
+        <p:spPr/>
+      </p:sp>
+      <p:sp>
+        <p:nvSpPr>
+          <p:cNvPr id="3" name="備忘稿版面配置區 2">
+            <a:extLst>
+              <a:ext uri="{FF2B5EF4-FFF2-40B4-BE49-F238E27FC236}">
+                <a16:creationId xmlns:a16="http://schemas.microsoft.com/office/drawing/2014/main" id="{2B6387F7-7876-4588-C9D5-16BE657D614D}"/>
+              </a:ext>
+            </a:extLst>
+          </p:cNvPr>
+          <p:cNvSpPr>
+            <a:spLocks noGrp="1"/>
+          </p:cNvSpPr>
+          <p:nvPr>
+            <p:ph type="body" idx="1"/>
+          </p:nvPr>
+        </p:nvSpPr>
+        <p:spPr/>
+        <p:txBody>
+          <a:bodyPr/>
+          <a:lstStyle/>
+          <a:p>
+            <a:pPr marL="0" indent="0"/>
+            <a:endParaRPr lang="zh-TW" altLang="en-US" dirty="0"/>
+          </a:p>
+        </p:txBody>
+      </p:sp>
+      <p:sp>
+        <p:nvSpPr>
+          <p:cNvPr id="4" name="投影片編號版面配置區 3">
+            <a:extLst>
+              <a:ext uri="{FF2B5EF4-FFF2-40B4-BE49-F238E27FC236}">
+                <a16:creationId xmlns:a16="http://schemas.microsoft.com/office/drawing/2014/main" id="{3F188A1F-349F-2C87-FF3E-E7B458B6323C}"/>
+              </a:ext>
+            </a:extLst>
+          </p:cNvPr>
+          <p:cNvSpPr>
+            <a:spLocks noGrp="1"/>
+          </p:cNvSpPr>
+          <p:nvPr>
+            <p:ph type="sldNum" idx="12"/>
+          </p:nvPr>
+        </p:nvSpPr>
+        <p:spPr/>
+        <p:txBody>
+          <a:bodyPr/>
+          <a:lstStyle/>
+          <a:p>
+            <a:pPr marL="0" marR="0" lvl="0" indent="0" algn="r" rtl="0">
+              <a:spcBef>
+                <a:spcPts val="0"/>
+              </a:spcBef>
+              <a:spcAft>
+                <a:spcPts val="0"/>
+              </a:spcAft>
+              <a:buNone/>
+            </a:pPr>
+            <a:fld id="{00000000-1234-1234-1234-123412341234}" type="slidenum">
+              <a:rPr lang="en-US" sz="2000" b="0" i="0" u="none" strike="noStrike" cap="none" smtClean="0">
+                <a:solidFill>
+                  <a:schemeClr val="dk1"/>
+                </a:solidFill>
+                <a:latin typeface="Times New Roman"/>
+                <a:ea typeface="Times New Roman"/>
+                <a:cs typeface="Times New Roman"/>
+                <a:sym typeface="Times New Roman"/>
+              </a:rPr>
+              <a:t>7</a:t>
+            </a:fld>
+            <a:endParaRPr lang="en-US" sz="2000" b="0" i="0" u="none" strike="noStrike" cap="none" dirty="0">
+              <a:solidFill>
+                <a:schemeClr val="dk1"/>
+              </a:solidFill>
+              <a:latin typeface="Times New Roman"/>
+              <a:ea typeface="Times New Roman"/>
+              <a:cs typeface="Times New Roman"/>
+              <a:sym typeface="Times New Roman"/>
+            </a:endParaRPr>
+          </a:p>
+        </p:txBody>
+      </p:sp>
+    </p:spTree>
+    <p:extLst>
+      <p:ext uri="{BB962C8B-B14F-4D97-AF65-F5344CB8AC3E}">
+        <p14:creationId xmlns:p14="http://schemas.microsoft.com/office/powerpoint/2010/main" val="3936504129"/>
+      </p:ext>
+    </p:extLst>
+  </p:cSld>
+  <p:clrMapOvr>
+    <a:masterClrMapping/>
+  </p:clrMapOvr>
+</p:notes>
+</file>
+
+<file path=ppt/notesSlides/notesSlide8.xml><?xml version="1.0" encoding="utf-8"?>
+<p:notes xmlns:a="http://schemas.openxmlformats.org/drawingml/2006/main" xmlns:r="http://schemas.openxmlformats.org/officeDocument/2006/relationships" xmlns:p="http://schemas.openxmlformats.org/presentationml/2006/main">
+  <p:cSld>
+    <p:spTree>
+      <p:nvGrpSpPr>
         <p:cNvPr id="1" name=""/>
         <p:cNvGrpSpPr/>
         <p:nvPr/>
@@ -2481,7 +2617,7 @@
           <a:p>
             <a:fld id="{F5753A29-9D77-4C26-8BEC-432FE5D4B0A4}" type="slidenum">
               <a:rPr lang="en-US" altLang="zh-TW" smtClean="0"/>
-              <a:t>7</a:t>
+              <a:t>8</a:t>
             </a:fld>
             <a:endParaRPr lang="en-US" altLang="zh-TW" dirty="0"/>
           </a:p>
@@ -9940,47 +10076,35 @@
             </a:pPr>
             <a:r>
               <a:rPr lang="en-US" altLang="zh-TW" sz="2000" dirty="0">
-                <a:solidFill>
-                  <a:schemeClr val="tx1"/>
-                </a:solidFill>
                 <a:latin typeface="Times New Roman" panose="02020603050405020304" pitchFamily="18" charset="0"/>
                 <a:ea typeface="標楷體" panose="03000509000000000000" pitchFamily="65" charset="-120"/>
                 <a:cs typeface="Times New Roman" panose="02020603050405020304" pitchFamily="18" charset="0"/>
               </a:rPr>
-              <a:t> HDMI</a:t>
+              <a:t>HDMI RX </a:t>
             </a:r>
             <a:r>
               <a:rPr lang="zh-TW" altLang="en-US" sz="2000" dirty="0">
-                <a:solidFill>
-                  <a:schemeClr val="tx1"/>
-                </a:solidFill>
                 <a:latin typeface="Times New Roman" panose="02020603050405020304" pitchFamily="18" charset="0"/>
                 <a:ea typeface="標楷體" panose="03000509000000000000" pitchFamily="65" charset="-120"/>
                 <a:cs typeface="Times New Roman" panose="02020603050405020304" pitchFamily="18" charset="0"/>
               </a:rPr>
-              <a:t> 作為 </a:t>
+              <a:t>作為 </a:t>
             </a:r>
             <a:r>
               <a:rPr lang="en-US" altLang="zh-TW" sz="2000" dirty="0">
-                <a:solidFill>
-                  <a:schemeClr val="tx1"/>
-                </a:solidFill>
                 <a:latin typeface="Times New Roman" panose="02020603050405020304" pitchFamily="18" charset="0"/>
                 <a:ea typeface="標楷體" panose="03000509000000000000" pitchFamily="65" charset="-120"/>
                 <a:cs typeface="Times New Roman" panose="02020603050405020304" pitchFamily="18" charset="0"/>
               </a:rPr>
-              <a:t>SDI</a:t>
+              <a:t>SDI </a:t>
             </a:r>
             <a:r>
               <a:rPr lang="zh-TW" altLang="en-US" sz="2000" dirty="0">
-                <a:solidFill>
-                  <a:schemeClr val="tx1"/>
-                </a:solidFill>
                 <a:latin typeface="Times New Roman" panose="02020603050405020304" pitchFamily="18" charset="0"/>
                 <a:ea typeface="標楷體" panose="03000509000000000000" pitchFamily="65" charset="-120"/>
                 <a:cs typeface="Times New Roman" panose="02020603050405020304" pitchFamily="18" charset="0"/>
               </a:rPr>
-              <a:t> 信號入口的可能性</a:t>
+              <a:t>子卡輸入通道之可行性</a:t>
             </a:r>
             <a:endParaRPr lang="en-US" altLang="zh-TW" sz="2000" dirty="0">
               <a:solidFill>
@@ -10003,7 +10127,23 @@
                 <a:ea typeface="標楷體" panose="03000509000000000000" pitchFamily="65" charset="-120"/>
                 <a:cs typeface="Times New Roman" panose="02020603050405020304" pitchFamily="18" charset="0"/>
               </a:rPr>
-              <a:t>SDI 與 HDMI 的資料速率相近</a:t>
+              <a:t>SDI 與 HDMI 的</a:t>
+            </a:r>
+            <a:r>
+              <a:rPr lang="zh-TW" altLang="en-US" sz="1600" dirty="0">
+                <a:latin typeface="Times New Roman" panose="02020603050405020304" pitchFamily="18" charset="0"/>
+                <a:ea typeface="標楷體" panose="03000509000000000000" pitchFamily="65" charset="-120"/>
+                <a:cs typeface="Times New Roman" panose="02020603050405020304" pitchFamily="18" charset="0"/>
+              </a:rPr>
+              <a:t>影像總資料量</a:t>
+            </a:r>
+            <a:r>
+              <a:rPr lang="zh-TW" altLang="zh-TW" sz="1600" dirty="0">
+                <a:latin typeface="Times New Roman" panose="02020603050405020304" pitchFamily="18" charset="0"/>
+                <a:ea typeface="標楷體" panose="03000509000000000000" pitchFamily="65" charset="-120"/>
+                <a:cs typeface="Times New Roman" panose="02020603050405020304" pitchFamily="18" charset="0"/>
+              </a:rPr>
+              <a:t>相近</a:t>
             </a:r>
             <a:endParaRPr lang="en-US" altLang="zh-TW" sz="1600" dirty="0">
               <a:solidFill>
@@ -10021,15 +10161,36 @@
               </a:lnSpc>
             </a:pPr>
             <a:r>
-              <a:rPr lang="zh-TW" altLang="en-US" sz="1600" dirty="0">
-                <a:solidFill>
-                  <a:schemeClr val="tx1"/>
-                </a:solidFill>
+              <a:rPr lang="en-US" altLang="zh-TW" sz="1600" dirty="0">
                 <a:latin typeface="Times New Roman" panose="02020603050405020304" pitchFamily="18" charset="0"/>
                 <a:ea typeface="標楷體" panose="03000509000000000000" pitchFamily="65" charset="-120"/>
                 <a:cs typeface="Times New Roman" panose="02020603050405020304" pitchFamily="18" charset="0"/>
               </a:rPr>
-              <a:t>硬體電路直通晶片</a:t>
+              <a:t>HDMI RX </a:t>
+            </a:r>
+            <a:r>
+              <a:rPr lang="zh-TW" altLang="en-US" sz="1600" dirty="0">
+                <a:latin typeface="Times New Roman" panose="02020603050405020304" pitchFamily="18" charset="0"/>
+                <a:ea typeface="標楷體" panose="03000509000000000000" pitchFamily="65" charset="-120"/>
+                <a:cs typeface="Times New Roman" panose="02020603050405020304" pitchFamily="18" charset="0"/>
+              </a:rPr>
+              <a:t>除常駐 </a:t>
+            </a:r>
+            <a:r>
+              <a:rPr lang="en-US" altLang="zh-TW" sz="1600" dirty="0">
+                <a:latin typeface="Times New Roman" panose="02020603050405020304" pitchFamily="18" charset="0"/>
+                <a:ea typeface="標楷體" panose="03000509000000000000" pitchFamily="65" charset="-120"/>
+                <a:cs typeface="Times New Roman" panose="02020603050405020304" pitchFamily="18" charset="0"/>
+              </a:rPr>
+              <a:t>3.3V</a:t>
+            </a:r>
+            <a:r>
+              <a:rPr lang="zh-TW" altLang="en-US" sz="1600" dirty="0">
+                <a:latin typeface="Times New Roman" panose="02020603050405020304" pitchFamily="18" charset="0"/>
+                <a:ea typeface="標楷體" panose="03000509000000000000" pitchFamily="65" charset="-120"/>
+                <a:cs typeface="Times New Roman" panose="02020603050405020304" pitchFamily="18" charset="0"/>
+              </a:rPr>
+              <a:t> 上拉電阻外並無經過其他模組</a:t>
             </a:r>
             <a:endParaRPr lang="en-US" altLang="zh-TW" sz="1600" dirty="0">
               <a:solidFill>
@@ -10117,8 +10278,8 @@
         </p:nvGrpSpPr>
         <p:grpSpPr>
           <a:xfrm>
-            <a:off x="2456182" y="3866261"/>
-            <a:ext cx="3713480" cy="2382139"/>
+            <a:off x="2381518" y="3673366"/>
+            <a:ext cx="4014181" cy="2575034"/>
             <a:chOff x="2791462" y="3600175"/>
             <a:chExt cx="3713480" cy="2382139"/>
           </a:xfrm>
@@ -10168,8 +10329,8 @@
           </p:nvSpPr>
           <p:spPr>
             <a:xfrm>
-              <a:off x="4676140" y="4697074"/>
-              <a:ext cx="500380" cy="165100"/>
+              <a:off x="4684705" y="4781994"/>
+              <a:ext cx="485610" cy="229099"/>
             </a:xfrm>
             <a:prstGeom prst="rect">
               <a:avLst/>
@@ -10221,8 +10382,8 @@
         </p:nvGrpSpPr>
         <p:grpSpPr>
           <a:xfrm>
-            <a:off x="6395699" y="1409086"/>
-            <a:ext cx="2565419" cy="4839314"/>
+            <a:off x="6398874" y="1143000"/>
+            <a:ext cx="2706477" cy="5105400"/>
             <a:chOff x="6730979" y="1143000"/>
             <a:chExt cx="2565419" cy="4839314"/>
           </a:xfrm>
@@ -10271,8 +10432,8 @@
           </p:nvSpPr>
           <p:spPr>
             <a:xfrm>
-              <a:off x="8355330" y="3738224"/>
-              <a:ext cx="571500" cy="197506"/>
+              <a:off x="8355330" y="3752256"/>
+              <a:ext cx="571500" cy="183473"/>
             </a:xfrm>
             <a:prstGeom prst="rect">
               <a:avLst/>
@@ -10389,7 +10550,15 @@
                 <a:ea typeface="標楷體" panose="03000509000000000000" pitchFamily="65" charset="-120"/>
                 <a:cs typeface="Times New Roman" panose="02020603050405020304" pitchFamily="18" charset="0"/>
               </a:rPr>
-              <a:t>: NeTV2</a:t>
+              <a:t>: </a:t>
+            </a:r>
+            <a:r>
+              <a:rPr lang="zh-TW" altLang="zh-TW" dirty="0">
+                <a:latin typeface="Times New Roman" panose="02020603050405020304" pitchFamily="18" charset="0"/>
+                <a:ea typeface="標楷體" panose="03000509000000000000" pitchFamily="65" charset="-120"/>
+                <a:cs typeface="Times New Roman" panose="02020603050405020304" pitchFamily="18" charset="0"/>
+              </a:rPr>
+              <a:t>Xilinx ZCU106</a:t>
             </a:r>
             <a:endParaRPr lang="zh-TW" altLang="en-US" dirty="0">
               <a:latin typeface="Times New Roman" panose="02020603050405020304" pitchFamily="18" charset="0"/>
@@ -10690,40 +10859,724 @@
                 <a:ea typeface="標楷體" panose="03000509000000000000" pitchFamily="65" charset="-120"/>
                 <a:cs typeface="Times New Roman" panose="02020603050405020304" pitchFamily="18" charset="0"/>
               </a:rPr>
-              <a:t> HDMI</a:t>
-            </a:r>
-            <a:r>
-              <a:rPr lang="zh-TW" altLang="en-US" sz="2000" dirty="0">
-                <a:solidFill>
-                  <a:schemeClr val="tx1"/>
-                </a:solidFill>
+              <a:t> </a:t>
+            </a:r>
+            <a:endParaRPr lang="zh-TW" altLang="zh-TW" sz="1600" dirty="0">
+              <a:latin typeface="Times New Roman" panose="02020603050405020304" pitchFamily="18" charset="0"/>
+              <a:ea typeface="標楷體" panose="03000509000000000000" pitchFamily="65" charset="-120"/>
+              <a:cs typeface="Times New Roman" panose="02020603050405020304" pitchFamily="18" charset="0"/>
+            </a:endParaRPr>
+          </a:p>
+        </p:txBody>
+      </p:sp>
+      <p:grpSp>
+        <p:nvGrpSpPr>
+          <p:cNvPr id="5" name="群組 4">
+            <a:extLst>
+              <a:ext uri="{FF2B5EF4-FFF2-40B4-BE49-F238E27FC236}">
+                <a16:creationId xmlns:a16="http://schemas.microsoft.com/office/drawing/2014/main" id="{390F4142-C3C7-F585-A6E2-6A7697650EF6}"/>
+              </a:ext>
+            </a:extLst>
+          </p:cNvPr>
+          <p:cNvGrpSpPr/>
+          <p:nvPr/>
+        </p:nvGrpSpPr>
+        <p:grpSpPr>
+          <a:xfrm>
+            <a:off x="7496924" y="1954930"/>
+            <a:ext cx="2125752" cy="1894039"/>
+            <a:chOff x="6986296" y="3782285"/>
+            <a:chExt cx="2310101" cy="2058293"/>
+          </a:xfrm>
+        </p:grpSpPr>
+        <p:pic>
+          <p:nvPicPr>
+            <p:cNvPr id="6" name="圖片 5">
+              <a:extLst>
+                <a:ext uri="{FF2B5EF4-FFF2-40B4-BE49-F238E27FC236}">
+                  <a16:creationId xmlns:a16="http://schemas.microsoft.com/office/drawing/2014/main" id="{8F238F56-B6CF-6D88-8B04-5ED6E671C57A}"/>
+                </a:ext>
+              </a:extLst>
+            </p:cNvPr>
+            <p:cNvPicPr>
+              <a:picLocks noChangeAspect="1"/>
+            </p:cNvPicPr>
+            <p:nvPr/>
+          </p:nvPicPr>
+          <p:blipFill>
+            <a:blip r:embed="rId3"/>
+            <a:stretch>
+              <a:fillRect/>
+            </a:stretch>
+          </p:blipFill>
+          <p:spPr>
+            <a:xfrm>
+              <a:off x="6986296" y="3782285"/>
+              <a:ext cx="2310101" cy="1722787"/>
+            </a:xfrm>
+            <a:prstGeom prst="rect">
+              <a:avLst/>
+            </a:prstGeom>
+          </p:spPr>
+        </p:pic>
+        <p:sp>
+          <p:nvSpPr>
+            <p:cNvPr id="7" name="文字方塊 10">
+              <a:extLst>
+                <a:ext uri="{FF2B5EF4-FFF2-40B4-BE49-F238E27FC236}">
+                  <a16:creationId xmlns:a16="http://schemas.microsoft.com/office/drawing/2014/main" id="{40F7D8C0-1202-F756-2DCE-B5919BFE4893}"/>
+                </a:ext>
+              </a:extLst>
+            </p:cNvPr>
+            <p:cNvSpPr txBox="1"/>
+            <p:nvPr/>
+          </p:nvSpPr>
+          <p:spPr>
+            <a:xfrm>
+              <a:off x="7212168" y="5506110"/>
+              <a:ext cx="1951555" cy="334468"/>
+            </a:xfrm>
+            <a:prstGeom prst="rect">
+              <a:avLst/>
+            </a:prstGeom>
+            <a:noFill/>
+          </p:spPr>
+          <p:txBody>
+            <a:bodyPr wrap="square">
+              <a:spAutoFit/>
+            </a:bodyPr>
+            <a:lstStyle>
+              <a:defPPr marR="0" lvl="0" algn="l" rtl="0">
+                <a:lnSpc>
+                  <a:spcPct val="100000"/>
+                </a:lnSpc>
+                <a:spcBef>
+                  <a:spcPts val="0"/>
+                </a:spcBef>
+                <a:spcAft>
+                  <a:spcPts val="0"/>
+                </a:spcAft>
+              </a:defPPr>
+              <a:lvl1pPr marR="0" lvl="0" algn="l" rtl="0">
+                <a:lnSpc>
+                  <a:spcPct val="100000"/>
+                </a:lnSpc>
+                <a:spcBef>
+                  <a:spcPts val="0"/>
+                </a:spcBef>
+                <a:spcAft>
+                  <a:spcPts val="0"/>
+                </a:spcAft>
+                <a:buClr>
+                  <a:srgbClr val="000000"/>
+                </a:buClr>
+                <a:buFont typeface="Arial"/>
+                <a:defRPr sz="1400" b="0" i="0" u="none" strike="noStrike" cap="none">
+                  <a:solidFill>
+                    <a:srgbClr val="000000"/>
+                  </a:solidFill>
+                  <a:latin typeface="Arial"/>
+                  <a:ea typeface="Arial"/>
+                  <a:cs typeface="Arial"/>
+                  <a:sym typeface="Arial"/>
+                </a:defRPr>
+              </a:lvl1pPr>
+              <a:lvl2pPr marR="0" lvl="1" algn="l" rtl="0">
+                <a:lnSpc>
+                  <a:spcPct val="100000"/>
+                </a:lnSpc>
+                <a:spcBef>
+                  <a:spcPts val="0"/>
+                </a:spcBef>
+                <a:spcAft>
+                  <a:spcPts val="0"/>
+                </a:spcAft>
+                <a:buClr>
+                  <a:srgbClr val="000000"/>
+                </a:buClr>
+                <a:buFont typeface="Arial"/>
+                <a:defRPr sz="1400" b="0" i="0" u="none" strike="noStrike" cap="none">
+                  <a:solidFill>
+                    <a:srgbClr val="000000"/>
+                  </a:solidFill>
+                  <a:latin typeface="Arial"/>
+                  <a:ea typeface="Arial"/>
+                  <a:cs typeface="Arial"/>
+                  <a:sym typeface="Arial"/>
+                </a:defRPr>
+              </a:lvl2pPr>
+              <a:lvl3pPr marR="0" lvl="2" algn="l" rtl="0">
+                <a:lnSpc>
+                  <a:spcPct val="100000"/>
+                </a:lnSpc>
+                <a:spcBef>
+                  <a:spcPts val="0"/>
+                </a:spcBef>
+                <a:spcAft>
+                  <a:spcPts val="0"/>
+                </a:spcAft>
+                <a:buClr>
+                  <a:srgbClr val="000000"/>
+                </a:buClr>
+                <a:buFont typeface="Arial"/>
+                <a:defRPr sz="1400" b="0" i="0" u="none" strike="noStrike" cap="none">
+                  <a:solidFill>
+                    <a:srgbClr val="000000"/>
+                  </a:solidFill>
+                  <a:latin typeface="Arial"/>
+                  <a:ea typeface="Arial"/>
+                  <a:cs typeface="Arial"/>
+                  <a:sym typeface="Arial"/>
+                </a:defRPr>
+              </a:lvl3pPr>
+              <a:lvl4pPr marR="0" lvl="3" algn="l" rtl="0">
+                <a:lnSpc>
+                  <a:spcPct val="100000"/>
+                </a:lnSpc>
+                <a:spcBef>
+                  <a:spcPts val="0"/>
+                </a:spcBef>
+                <a:spcAft>
+                  <a:spcPts val="0"/>
+                </a:spcAft>
+                <a:buClr>
+                  <a:srgbClr val="000000"/>
+                </a:buClr>
+                <a:buFont typeface="Arial"/>
+                <a:defRPr sz="1400" b="0" i="0" u="none" strike="noStrike" cap="none">
+                  <a:solidFill>
+                    <a:srgbClr val="000000"/>
+                  </a:solidFill>
+                  <a:latin typeface="Arial"/>
+                  <a:ea typeface="Arial"/>
+                  <a:cs typeface="Arial"/>
+                  <a:sym typeface="Arial"/>
+                </a:defRPr>
+              </a:lvl4pPr>
+              <a:lvl5pPr marR="0" lvl="4" algn="l" rtl="0">
+                <a:lnSpc>
+                  <a:spcPct val="100000"/>
+                </a:lnSpc>
+                <a:spcBef>
+                  <a:spcPts val="0"/>
+                </a:spcBef>
+                <a:spcAft>
+                  <a:spcPts val="0"/>
+                </a:spcAft>
+                <a:buClr>
+                  <a:srgbClr val="000000"/>
+                </a:buClr>
+                <a:buFont typeface="Arial"/>
+                <a:defRPr sz="1400" b="0" i="0" u="none" strike="noStrike" cap="none">
+                  <a:solidFill>
+                    <a:srgbClr val="000000"/>
+                  </a:solidFill>
+                  <a:latin typeface="Arial"/>
+                  <a:ea typeface="Arial"/>
+                  <a:cs typeface="Arial"/>
+                  <a:sym typeface="Arial"/>
+                </a:defRPr>
+              </a:lvl5pPr>
+              <a:lvl6pPr marR="0" lvl="5" algn="l" rtl="0">
+                <a:lnSpc>
+                  <a:spcPct val="100000"/>
+                </a:lnSpc>
+                <a:spcBef>
+                  <a:spcPts val="0"/>
+                </a:spcBef>
+                <a:spcAft>
+                  <a:spcPts val="0"/>
+                </a:spcAft>
+                <a:buClr>
+                  <a:srgbClr val="000000"/>
+                </a:buClr>
+                <a:buFont typeface="Arial"/>
+                <a:defRPr sz="1400" b="0" i="0" u="none" strike="noStrike" cap="none">
+                  <a:solidFill>
+                    <a:srgbClr val="000000"/>
+                  </a:solidFill>
+                  <a:latin typeface="Arial"/>
+                  <a:ea typeface="Arial"/>
+                  <a:cs typeface="Arial"/>
+                  <a:sym typeface="Arial"/>
+                </a:defRPr>
+              </a:lvl6pPr>
+              <a:lvl7pPr marR="0" lvl="6" algn="l" rtl="0">
+                <a:lnSpc>
+                  <a:spcPct val="100000"/>
+                </a:lnSpc>
+                <a:spcBef>
+                  <a:spcPts val="0"/>
+                </a:spcBef>
+                <a:spcAft>
+                  <a:spcPts val="0"/>
+                </a:spcAft>
+                <a:buClr>
+                  <a:srgbClr val="000000"/>
+                </a:buClr>
+                <a:buFont typeface="Arial"/>
+                <a:defRPr sz="1400" b="0" i="0" u="none" strike="noStrike" cap="none">
+                  <a:solidFill>
+                    <a:srgbClr val="000000"/>
+                  </a:solidFill>
+                  <a:latin typeface="Arial"/>
+                  <a:ea typeface="Arial"/>
+                  <a:cs typeface="Arial"/>
+                  <a:sym typeface="Arial"/>
+                </a:defRPr>
+              </a:lvl7pPr>
+              <a:lvl8pPr marR="0" lvl="7" algn="l" rtl="0">
+                <a:lnSpc>
+                  <a:spcPct val="100000"/>
+                </a:lnSpc>
+                <a:spcBef>
+                  <a:spcPts val="0"/>
+                </a:spcBef>
+                <a:spcAft>
+                  <a:spcPts val="0"/>
+                </a:spcAft>
+                <a:buClr>
+                  <a:srgbClr val="000000"/>
+                </a:buClr>
+                <a:buFont typeface="Arial"/>
+                <a:defRPr sz="1400" b="0" i="0" u="none" strike="noStrike" cap="none">
+                  <a:solidFill>
+                    <a:srgbClr val="000000"/>
+                  </a:solidFill>
+                  <a:latin typeface="Arial"/>
+                  <a:ea typeface="Arial"/>
+                  <a:cs typeface="Arial"/>
+                  <a:sym typeface="Arial"/>
+                </a:defRPr>
+              </a:lvl8pPr>
+              <a:lvl9pPr marR="0" lvl="8" algn="l" rtl="0">
+                <a:lnSpc>
+                  <a:spcPct val="100000"/>
+                </a:lnSpc>
+                <a:spcBef>
+                  <a:spcPts val="0"/>
+                </a:spcBef>
+                <a:spcAft>
+                  <a:spcPts val="0"/>
+                </a:spcAft>
+                <a:buClr>
+                  <a:srgbClr val="000000"/>
+                </a:buClr>
+                <a:buFont typeface="Arial"/>
+                <a:defRPr sz="1400" b="0" i="0" u="none" strike="noStrike" cap="none">
+                  <a:solidFill>
+                    <a:srgbClr val="000000"/>
+                  </a:solidFill>
+                  <a:latin typeface="Arial"/>
+                  <a:ea typeface="Arial"/>
+                  <a:cs typeface="Arial"/>
+                  <a:sym typeface="Arial"/>
+                </a:defRPr>
+              </a:lvl9pPr>
+            </a:lstStyle>
+            <a:p>
+              <a:pPr lvl="1"/>
+              <a:r>
+                <a:rPr lang="zh-TW" altLang="zh-TW" dirty="0">
+                  <a:latin typeface="Times New Roman" panose="02020603050405020304" pitchFamily="18" charset="0"/>
+                  <a:ea typeface="標楷體" panose="03000509000000000000" pitchFamily="65" charset="-120"/>
+                  <a:cs typeface="Times New Roman" panose="02020603050405020304" pitchFamily="18" charset="0"/>
+                </a:rPr>
+                <a:t>AMD Xilinx ZCU106</a:t>
+              </a:r>
+              <a:endParaRPr lang="en-US" altLang="zh-TW" dirty="0">
+                <a:latin typeface="Times New Roman" panose="02020603050405020304" pitchFamily="18" charset="0"/>
+                <a:ea typeface="標楷體" panose="03000509000000000000" pitchFamily="65" charset="-120"/>
+                <a:cs typeface="Times New Roman" panose="02020603050405020304" pitchFamily="18" charset="0"/>
+              </a:endParaRPr>
+            </a:p>
+          </p:txBody>
+        </p:sp>
+      </p:grpSp>
+    </p:spTree>
+    <p:extLst>
+      <p:ext uri="{BB962C8B-B14F-4D97-AF65-F5344CB8AC3E}">
+        <p14:creationId xmlns:p14="http://schemas.microsoft.com/office/powerpoint/2010/main" val="1762476218"/>
+      </p:ext>
+    </p:extLst>
+  </p:cSld>
+  <p:clrMapOvr>
+    <a:masterClrMapping/>
+  </p:clrMapOvr>
+</p:sld>
+</file>
+
+<file path=ppt/slides/slide7.xml><?xml version="1.0" encoding="utf-8"?>
+<p:sld xmlns:a="http://schemas.openxmlformats.org/drawingml/2006/main" xmlns:r="http://schemas.openxmlformats.org/officeDocument/2006/relationships" xmlns:p="http://schemas.openxmlformats.org/presentationml/2006/main">
+  <p:cSld>
+    <p:spTree>
+      <p:nvGrpSpPr>
+        <p:cNvPr id="1" name="">
+          <a:extLst>
+            <a:ext uri="{FF2B5EF4-FFF2-40B4-BE49-F238E27FC236}">
+              <a16:creationId xmlns:a16="http://schemas.microsoft.com/office/drawing/2014/main" id="{1FD8BDF0-8203-5101-5AD7-8123D67DB439}"/>
+            </a:ext>
+          </a:extLst>
+        </p:cNvPr>
+        <p:cNvGrpSpPr/>
+        <p:nvPr/>
+      </p:nvGrpSpPr>
+      <p:grpSpPr>
+        <a:xfrm>
+          <a:off x="0" y="0"/>
+          <a:ext cx="0" cy="0"/>
+          <a:chOff x="0" y="0"/>
+          <a:chExt cx="0" cy="0"/>
+        </a:xfrm>
+      </p:grpSpPr>
+      <p:sp>
+        <p:nvSpPr>
+          <p:cNvPr id="15" name="標題 1">
+            <a:extLst>
+              <a:ext uri="{FF2B5EF4-FFF2-40B4-BE49-F238E27FC236}">
+                <a16:creationId xmlns:a16="http://schemas.microsoft.com/office/drawing/2014/main" id="{EC9E0606-7D9A-7A5E-BEE9-FE41BD691F6D}"/>
+              </a:ext>
+            </a:extLst>
+          </p:cNvPr>
+          <p:cNvSpPr>
+            <a:spLocks noGrp="1"/>
+          </p:cNvSpPr>
+          <p:nvPr>
+            <p:ph type="title"/>
+          </p:nvPr>
+        </p:nvSpPr>
+        <p:spPr>
+          <a:xfrm>
+            <a:off x="609602" y="609600"/>
+            <a:ext cx="8077200" cy="533400"/>
+          </a:xfrm>
+          <a:ln>
+            <a:noFill/>
+          </a:ln>
+        </p:spPr>
+        <p:txBody>
+          <a:bodyPr/>
+          <a:lstStyle/>
+          <a:p>
+            <a:r>
+              <a:rPr lang="zh-TW" altLang="en-US" dirty="0">
                 <a:latin typeface="Times New Roman" panose="02020603050405020304" pitchFamily="18" charset="0"/>
                 <a:ea typeface="標楷體" panose="03000509000000000000" pitchFamily="65" charset="-120"/>
                 <a:cs typeface="Times New Roman" panose="02020603050405020304" pitchFamily="18" charset="0"/>
               </a:rPr>
-              <a:t> 作為 </a:t>
-            </a:r>
-            <a:r>
-              <a:rPr lang="en-US" altLang="zh-TW" sz="2000" dirty="0">
-                <a:solidFill>
-                  <a:schemeClr val="tx1"/>
-                </a:solidFill>
+              <a:t>本次進度</a:t>
+            </a:r>
+            <a:r>
+              <a:rPr lang="en-US" altLang="zh-TW" dirty="0">
                 <a:latin typeface="Times New Roman" panose="02020603050405020304" pitchFamily="18" charset="0"/>
                 <a:ea typeface="標楷體" panose="03000509000000000000" pitchFamily="65" charset="-120"/>
                 <a:cs typeface="Times New Roman" panose="02020603050405020304" pitchFamily="18" charset="0"/>
               </a:rPr>
-              <a:t>SDI</a:t>
-            </a:r>
-            <a:r>
-              <a:rPr lang="zh-TW" altLang="en-US" sz="2000" dirty="0">
-                <a:solidFill>
-                  <a:schemeClr val="tx1"/>
-                </a:solidFill>
+              <a:t>: </a:t>
+            </a:r>
+            <a:r>
+              <a:rPr lang="zh-TW" altLang="en-US" dirty="0">
                 <a:latin typeface="Times New Roman" panose="02020603050405020304" pitchFamily="18" charset="0"/>
                 <a:ea typeface="標楷體" panose="03000509000000000000" pitchFamily="65" charset="-120"/>
                 <a:cs typeface="Times New Roman" panose="02020603050405020304" pitchFamily="18" charset="0"/>
               </a:rPr>
-              <a:t> 信號入口的可能性</a:t>
+              <a:t>總結</a:t>
+            </a:r>
+          </a:p>
+        </p:txBody>
+      </p:sp>
+      <p:sp>
+        <p:nvSpPr>
+          <p:cNvPr id="2" name="文字版面配置區 6">
+            <a:extLst>
+              <a:ext uri="{FF2B5EF4-FFF2-40B4-BE49-F238E27FC236}">
+                <a16:creationId xmlns:a16="http://schemas.microsoft.com/office/drawing/2014/main" id="{F11FE19D-395D-C6BE-38FF-AD4C02E0FA80}"/>
+              </a:ext>
+            </a:extLst>
+          </p:cNvPr>
+          <p:cNvSpPr txBox="1"/>
+          <p:nvPr/>
+        </p:nvSpPr>
+        <p:spPr>
+          <a:xfrm>
+            <a:off x="609602" y="935857"/>
+            <a:ext cx="8686796" cy="4700685"/>
+          </a:xfrm>
+          <a:prstGeom prst="rect">
+            <a:avLst/>
+          </a:prstGeom>
+          <a:noFill/>
+          <a:ln>
+            <a:noFill/>
+          </a:ln>
+        </p:spPr>
+        <p:txBody>
+          <a:bodyPr spcFirstLastPara="1" wrap="square" lIns="91425" tIns="45700" rIns="91425" bIns="45700" anchor="t" anchorCtr="0">
+            <a:noAutofit/>
+          </a:bodyPr>
+          <a:lstStyle>
+            <a:defPPr marR="0" lvl="0" algn="l" rtl="0">
+              <a:lnSpc>
+                <a:spcPct val="100000"/>
+              </a:lnSpc>
+              <a:spcBef>
+                <a:spcPts val="0"/>
+              </a:spcBef>
+              <a:spcAft>
+                <a:spcPts val="0"/>
+              </a:spcAft>
+            </a:defPPr>
+            <a:lvl1pPr marL="457200" marR="0" lvl="0" indent="-406400" algn="l" rtl="0">
+              <a:lnSpc>
+                <a:spcPct val="100000"/>
+              </a:lnSpc>
+              <a:spcBef>
+                <a:spcPts val="560"/>
+              </a:spcBef>
+              <a:spcAft>
+                <a:spcPts val="0"/>
+              </a:spcAft>
+              <a:buClr>
+                <a:schemeClr val="accent2"/>
+              </a:buClr>
+              <a:buSzPts val="2800"/>
+              <a:buFont typeface="Noto Sans Symbols"/>
+              <a:buChar char="❖"/>
+              <a:defRPr sz="2800" b="0" i="0" u="none" strike="noStrike" cap="none">
+                <a:solidFill>
+                  <a:schemeClr val="dk1"/>
+                </a:solidFill>
+                <a:latin typeface="Times New Roman"/>
+                <a:ea typeface="Times New Roman"/>
+                <a:cs typeface="Times New Roman"/>
+                <a:sym typeface="Times New Roman"/>
+              </a:defRPr>
+            </a:lvl1pPr>
+            <a:lvl2pPr marL="914400" marR="0" lvl="1" indent="-381000" algn="l" rtl="0">
+              <a:lnSpc>
+                <a:spcPct val="100000"/>
+              </a:lnSpc>
+              <a:spcBef>
+                <a:spcPts val="480"/>
+              </a:spcBef>
+              <a:spcAft>
+                <a:spcPts val="0"/>
+              </a:spcAft>
+              <a:buClr>
+                <a:srgbClr val="FF5050"/>
+              </a:buClr>
+              <a:buSzPts val="2400"/>
+              <a:buFont typeface="Noto Sans Symbols"/>
+              <a:buChar char="▪"/>
+              <a:defRPr sz="2400" b="0" i="0" u="none" strike="noStrike" cap="none">
+                <a:solidFill>
+                  <a:schemeClr val="dk1"/>
+                </a:solidFill>
+                <a:latin typeface="Times New Roman"/>
+                <a:ea typeface="Times New Roman"/>
+                <a:cs typeface="Times New Roman"/>
+                <a:sym typeface="Times New Roman"/>
+              </a:defRPr>
+            </a:lvl2pPr>
+            <a:lvl3pPr marL="1371600" marR="0" lvl="2" indent="-355600" algn="l" rtl="0">
+              <a:lnSpc>
+                <a:spcPct val="100000"/>
+              </a:lnSpc>
+              <a:spcBef>
+                <a:spcPts val="400"/>
+              </a:spcBef>
+              <a:spcAft>
+                <a:spcPts val="0"/>
+              </a:spcAft>
+              <a:buClr>
+                <a:srgbClr val="6699FF"/>
+              </a:buClr>
+              <a:buSzPts val="2000"/>
+              <a:buFont typeface="Times New Roman"/>
+              <a:buChar char="•"/>
+              <a:defRPr sz="2000" b="0" i="0" u="none" strike="noStrike" cap="none">
+                <a:solidFill>
+                  <a:schemeClr val="dk1"/>
+                </a:solidFill>
+                <a:latin typeface="Times New Roman"/>
+                <a:ea typeface="Times New Roman"/>
+                <a:cs typeface="Times New Roman"/>
+                <a:sym typeface="Times New Roman"/>
+              </a:defRPr>
+            </a:lvl3pPr>
+            <a:lvl4pPr marL="1828800" marR="0" lvl="3" indent="-355600" algn="l" rtl="0">
+              <a:lnSpc>
+                <a:spcPct val="100000"/>
+              </a:lnSpc>
+              <a:spcBef>
+                <a:spcPts val="400"/>
+              </a:spcBef>
+              <a:spcAft>
+                <a:spcPts val="0"/>
+              </a:spcAft>
+              <a:buClr>
+                <a:srgbClr val="FF5050"/>
+              </a:buClr>
+              <a:buSzPts val="2000"/>
+              <a:buFont typeface="Times New Roman"/>
+              <a:buChar char="o"/>
+              <a:defRPr sz="2000" b="0" i="0" u="none" strike="noStrike" cap="none">
+                <a:solidFill>
+                  <a:schemeClr val="dk1"/>
+                </a:solidFill>
+                <a:latin typeface="Times New Roman"/>
+                <a:ea typeface="Times New Roman"/>
+                <a:cs typeface="Times New Roman"/>
+                <a:sym typeface="Times New Roman"/>
+              </a:defRPr>
+            </a:lvl4pPr>
+            <a:lvl5pPr marL="2286000" marR="0" lvl="4" indent="-355600" algn="l" rtl="0">
+              <a:lnSpc>
+                <a:spcPct val="100000"/>
+              </a:lnSpc>
+              <a:spcBef>
+                <a:spcPts val="400"/>
+              </a:spcBef>
+              <a:spcAft>
+                <a:spcPts val="0"/>
+              </a:spcAft>
+              <a:buClr>
+                <a:srgbClr val="FF5050"/>
+              </a:buClr>
+              <a:buSzPts val="2000"/>
+              <a:buFont typeface="Times New Roman"/>
+              <a:buChar char="o"/>
+              <a:defRPr sz="2000" b="0" i="0" u="none" strike="noStrike" cap="none">
+                <a:solidFill>
+                  <a:schemeClr val="dk1"/>
+                </a:solidFill>
+                <a:latin typeface="Times New Roman"/>
+                <a:ea typeface="Times New Roman"/>
+                <a:cs typeface="Times New Roman"/>
+                <a:sym typeface="Times New Roman"/>
+              </a:defRPr>
+            </a:lvl5pPr>
+            <a:lvl6pPr marL="2743200" marR="0" lvl="5" indent="-355600" algn="l" rtl="0">
+              <a:lnSpc>
+                <a:spcPct val="100000"/>
+              </a:lnSpc>
+              <a:spcBef>
+                <a:spcPts val="400"/>
+              </a:spcBef>
+              <a:spcAft>
+                <a:spcPts val="0"/>
+              </a:spcAft>
+              <a:buClr>
+                <a:srgbClr val="FF5050"/>
+              </a:buClr>
+              <a:buSzPts val="2000"/>
+              <a:buFont typeface="Times New Roman"/>
+              <a:buChar char="o"/>
+              <a:defRPr sz="2000" b="0" i="0" u="none" strike="noStrike" cap="none">
+                <a:solidFill>
+                  <a:schemeClr val="dk1"/>
+                </a:solidFill>
+                <a:latin typeface="Times New Roman"/>
+                <a:ea typeface="Times New Roman"/>
+                <a:cs typeface="Times New Roman"/>
+                <a:sym typeface="Times New Roman"/>
+              </a:defRPr>
+            </a:lvl6pPr>
+            <a:lvl7pPr marL="3200400" marR="0" lvl="6" indent="-355600" algn="l" rtl="0">
+              <a:lnSpc>
+                <a:spcPct val="100000"/>
+              </a:lnSpc>
+              <a:spcBef>
+                <a:spcPts val="400"/>
+              </a:spcBef>
+              <a:spcAft>
+                <a:spcPts val="0"/>
+              </a:spcAft>
+              <a:buClr>
+                <a:srgbClr val="FF5050"/>
+              </a:buClr>
+              <a:buSzPts val="2000"/>
+              <a:buFont typeface="Times New Roman"/>
+              <a:buChar char="o"/>
+              <a:defRPr sz="2000" b="0" i="0" u="none" strike="noStrike" cap="none">
+                <a:solidFill>
+                  <a:schemeClr val="dk1"/>
+                </a:solidFill>
+                <a:latin typeface="Times New Roman"/>
+                <a:ea typeface="Times New Roman"/>
+                <a:cs typeface="Times New Roman"/>
+                <a:sym typeface="Times New Roman"/>
+              </a:defRPr>
+            </a:lvl7pPr>
+            <a:lvl8pPr marL="3657600" marR="0" lvl="7" indent="-355600" algn="l" rtl="0">
+              <a:lnSpc>
+                <a:spcPct val="100000"/>
+              </a:lnSpc>
+              <a:spcBef>
+                <a:spcPts val="400"/>
+              </a:spcBef>
+              <a:spcAft>
+                <a:spcPts val="0"/>
+              </a:spcAft>
+              <a:buClr>
+                <a:srgbClr val="FF5050"/>
+              </a:buClr>
+              <a:buSzPts val="2000"/>
+              <a:buFont typeface="Times New Roman"/>
+              <a:buChar char="o"/>
+              <a:defRPr sz="2000" b="0" i="0" u="none" strike="noStrike" cap="none">
+                <a:solidFill>
+                  <a:schemeClr val="dk1"/>
+                </a:solidFill>
+                <a:latin typeface="Times New Roman"/>
+                <a:ea typeface="Times New Roman"/>
+                <a:cs typeface="Times New Roman"/>
+                <a:sym typeface="Times New Roman"/>
+              </a:defRPr>
+            </a:lvl8pPr>
+            <a:lvl9pPr marL="4114800" marR="0" lvl="8" indent="-355600" algn="l" rtl="0">
+              <a:lnSpc>
+                <a:spcPct val="100000"/>
+              </a:lnSpc>
+              <a:spcBef>
+                <a:spcPts val="400"/>
+              </a:spcBef>
+              <a:spcAft>
+                <a:spcPts val="0"/>
+              </a:spcAft>
+              <a:buClr>
+                <a:srgbClr val="FF5050"/>
+              </a:buClr>
+              <a:buSzPts val="2000"/>
+              <a:buFont typeface="Times New Roman"/>
+              <a:buChar char="o"/>
+              <a:defRPr sz="2000" b="0" i="0" u="none" strike="noStrike" cap="none">
+                <a:solidFill>
+                  <a:schemeClr val="dk1"/>
+                </a:solidFill>
+                <a:latin typeface="Times New Roman"/>
+                <a:ea typeface="Times New Roman"/>
+                <a:cs typeface="Times New Roman"/>
+                <a:sym typeface="Times New Roman"/>
+              </a:defRPr>
+            </a:lvl9pPr>
+          </a:lstStyle>
+          <a:p>
+            <a:pPr>
+              <a:lnSpc>
+                <a:spcPts val="3000"/>
+              </a:lnSpc>
+            </a:pPr>
+            <a:r>
+              <a:rPr lang="en-US" altLang="zh-TW" sz="2000" dirty="0" err="1">
+                <a:solidFill>
+                  <a:schemeClr val="tx1"/>
+                </a:solidFill>
+                <a:latin typeface="Times New Roman" panose="02020603050405020304" pitchFamily="18" charset="0"/>
+                <a:ea typeface="標楷體" panose="03000509000000000000" pitchFamily="65" charset="-120"/>
+                <a:cs typeface="Times New Roman" panose="02020603050405020304" pitchFamily="18" charset="0"/>
+              </a:rPr>
+              <a:t>LiteX</a:t>
             </a:r>
             <a:endParaRPr lang="en-US" altLang="zh-TW" sz="2000" dirty="0">
               <a:solidFill>
@@ -10741,115 +11594,83 @@
               </a:lnSpc>
             </a:pPr>
             <a:r>
-              <a:rPr lang="zh-TW" altLang="zh-TW" sz="1600" dirty="0">
+              <a:rPr lang="zh-TW" altLang="en-US" sz="1600" dirty="0">
+                <a:solidFill>
+                  <a:schemeClr val="tx1"/>
+                </a:solidFill>
                 <a:latin typeface="Times New Roman" panose="02020603050405020304" pitchFamily="18" charset="0"/>
                 <a:ea typeface="標楷體" panose="03000509000000000000" pitchFamily="65" charset="-120"/>
                 <a:cs typeface="Times New Roman" panose="02020603050405020304" pitchFamily="18" charset="0"/>
               </a:rPr>
-              <a:t>SDI 與 HDMI 的資料速率相近</a:t>
-            </a:r>
-            <a:endParaRPr lang="en-US" altLang="zh-TW" sz="1600" dirty="0">
-              <a:solidFill>
-                <a:schemeClr val="tx1"/>
-              </a:solidFill>
+              <a:t>目前未找到同時符合硬體具備 </a:t>
+            </a:r>
+            <a:r>
+              <a:rPr lang="en-US" altLang="zh-TW" sz="1600" dirty="0">
+                <a:solidFill>
+                  <a:schemeClr val="tx1"/>
+                </a:solidFill>
+                <a:latin typeface="Times New Roman" panose="02020603050405020304" pitchFamily="18" charset="0"/>
+                <a:ea typeface="標楷體" panose="03000509000000000000" pitchFamily="65" charset="-120"/>
+                <a:cs typeface="Times New Roman" panose="02020603050405020304" pitchFamily="18" charset="0"/>
+              </a:rPr>
+              <a:t>HDMI</a:t>
+            </a:r>
+            <a:r>
+              <a:rPr lang="zh-TW" altLang="en-US" sz="1600" dirty="0">
+                <a:solidFill>
+                  <a:schemeClr val="tx1"/>
+                </a:solidFill>
+                <a:latin typeface="Times New Roman" panose="02020603050405020304" pitchFamily="18" charset="0"/>
+                <a:ea typeface="標楷體" panose="03000509000000000000" pitchFamily="65" charset="-120"/>
+                <a:cs typeface="Times New Roman" panose="02020603050405020304" pitchFamily="18" charset="0"/>
+              </a:rPr>
+              <a:t>、</a:t>
+            </a:r>
+            <a:r>
+              <a:rPr lang="en-US" altLang="zh-TW" sz="1600" dirty="0">
+                <a:solidFill>
+                  <a:schemeClr val="tx1"/>
+                </a:solidFill>
+                <a:latin typeface="Times New Roman" panose="02020603050405020304" pitchFamily="18" charset="0"/>
+                <a:ea typeface="標楷體" panose="03000509000000000000" pitchFamily="65" charset="-120"/>
+                <a:cs typeface="Times New Roman" panose="02020603050405020304" pitchFamily="18" charset="0"/>
+              </a:rPr>
+              <a:t>SDI</a:t>
+            </a:r>
+            <a:r>
+              <a:rPr lang="zh-TW" altLang="en-US" sz="1600" dirty="0">
+                <a:solidFill>
+                  <a:schemeClr val="tx1"/>
+                </a:solidFill>
+                <a:latin typeface="Times New Roman" panose="02020603050405020304" pitchFamily="18" charset="0"/>
+                <a:ea typeface="標楷體" panose="03000509000000000000" pitchFamily="65" charset="-120"/>
+                <a:cs typeface="Times New Roman" panose="02020603050405020304" pitchFamily="18" charset="0"/>
+              </a:rPr>
+              <a:t>、</a:t>
+            </a:r>
+            <a:r>
+              <a:rPr lang="en-US" altLang="zh-TW" sz="1600" dirty="0">
+                <a:solidFill>
+                  <a:schemeClr val="tx1"/>
+                </a:solidFill>
+                <a:latin typeface="Times New Roman" panose="02020603050405020304" pitchFamily="18" charset="0"/>
+                <a:ea typeface="標楷體" panose="03000509000000000000" pitchFamily="65" charset="-120"/>
+                <a:cs typeface="Times New Roman" panose="02020603050405020304" pitchFamily="18" charset="0"/>
+              </a:rPr>
+              <a:t>PCIe</a:t>
+            </a:r>
+            <a:endParaRPr lang="zh-TW" altLang="zh-TW" sz="1600" dirty="0">
               <a:latin typeface="Times New Roman" panose="02020603050405020304" pitchFamily="18" charset="0"/>
               <a:ea typeface="標楷體" panose="03000509000000000000" pitchFamily="65" charset="-120"/>
               <a:cs typeface="Times New Roman" panose="02020603050405020304" pitchFamily="18" charset="0"/>
             </a:endParaRPr>
-          </a:p>
-          <a:p>
-            <a:pPr lvl="1">
-              <a:lnSpc>
-                <a:spcPts val="3000"/>
-              </a:lnSpc>
-            </a:pPr>
-            <a:r>
-              <a:rPr lang="zh-TW" altLang="en-US" sz="1600" dirty="0">
-                <a:solidFill>
-                  <a:schemeClr val="tx1"/>
-                </a:solidFill>
-                <a:latin typeface="Times New Roman" panose="02020603050405020304" pitchFamily="18" charset="0"/>
-                <a:ea typeface="標楷體" panose="03000509000000000000" pitchFamily="65" charset="-120"/>
-                <a:cs typeface="Times New Roman" panose="02020603050405020304" pitchFamily="18" charset="0"/>
-              </a:rPr>
-              <a:t>硬體電路直通晶片</a:t>
-            </a:r>
-            <a:endParaRPr lang="en-US" altLang="zh-TW" sz="1600" dirty="0">
-              <a:solidFill>
-                <a:schemeClr val="tx1"/>
-              </a:solidFill>
-              <a:latin typeface="Times New Roman" panose="02020603050405020304" pitchFamily="18" charset="0"/>
-              <a:ea typeface="標楷體" panose="03000509000000000000" pitchFamily="65" charset="-120"/>
-              <a:cs typeface="Times New Roman" panose="02020603050405020304" pitchFamily="18" charset="0"/>
-            </a:endParaRPr>
-          </a:p>
-          <a:p>
-            <a:pPr>
-              <a:lnSpc>
-                <a:spcPts val="3000"/>
-              </a:lnSpc>
-            </a:pPr>
-            <a:r>
-              <a:rPr lang="zh-TW" altLang="en-US" sz="2000" dirty="0">
-                <a:solidFill>
-                  <a:schemeClr val="tx1"/>
-                </a:solidFill>
-                <a:latin typeface="Times New Roman" panose="02020603050405020304" pitchFamily="18" charset="0"/>
-                <a:ea typeface="標楷體" panose="03000509000000000000" pitchFamily="65" charset="-120"/>
-                <a:cs typeface="Times New Roman" panose="02020603050405020304" pitchFamily="18" charset="0"/>
-              </a:rPr>
-              <a:t>風險</a:t>
-            </a:r>
-            <a:endParaRPr lang="en-US" altLang="zh-TW" sz="2000" dirty="0">
-              <a:solidFill>
-                <a:schemeClr val="tx1"/>
-              </a:solidFill>
-              <a:latin typeface="Times New Roman" panose="02020603050405020304" pitchFamily="18" charset="0"/>
-              <a:ea typeface="標楷體" panose="03000509000000000000" pitchFamily="65" charset="-120"/>
-              <a:cs typeface="Times New Roman" panose="02020603050405020304" pitchFamily="18" charset="0"/>
-            </a:endParaRPr>
-          </a:p>
-          <a:p>
-            <a:pPr lvl="1">
-              <a:lnSpc>
-                <a:spcPts val="3000"/>
-              </a:lnSpc>
-            </a:pPr>
-            <a:r>
-              <a:rPr lang="zh-TW" altLang="zh-TW" sz="1600" dirty="0">
-                <a:latin typeface="Times New Roman" panose="02020603050405020304" pitchFamily="18" charset="0"/>
-                <a:ea typeface="標楷體" panose="03000509000000000000" pitchFamily="65" charset="-120"/>
-                <a:cs typeface="Times New Roman" panose="02020603050405020304" pitchFamily="18" charset="0"/>
-              </a:rPr>
-              <a:t>3.3 V 直流偏壓與輸出電壓不一致</a:t>
-            </a:r>
-            <a:endParaRPr lang="en-US" altLang="zh-TW" sz="1600" dirty="0">
-              <a:latin typeface="Times New Roman" panose="02020603050405020304" pitchFamily="18" charset="0"/>
-              <a:ea typeface="標楷體" panose="03000509000000000000" pitchFamily="65" charset="-120"/>
-              <a:cs typeface="Times New Roman" panose="02020603050405020304" pitchFamily="18" charset="0"/>
-            </a:endParaRPr>
-          </a:p>
-          <a:p>
-            <a:pPr lvl="1">
-              <a:lnSpc>
-                <a:spcPts val="3000"/>
-              </a:lnSpc>
-            </a:pPr>
-            <a:r>
-              <a:rPr lang="zh-TW" altLang="zh-TW" sz="1600" dirty="0">
-                <a:latin typeface="Times New Roman" panose="02020603050405020304" pitchFamily="18" charset="0"/>
-                <a:ea typeface="標楷體" panose="03000509000000000000" pitchFamily="65" charset="-120"/>
-                <a:cs typeface="Times New Roman" panose="02020603050405020304" pitchFamily="18" charset="0"/>
-              </a:rPr>
-              <a:t>阻抗不匹配與高頻訊號反射</a:t>
-            </a:r>
           </a:p>
         </p:txBody>
       </p:sp>
     </p:spTree>
     <p:extLst>
       <p:ext uri="{BB962C8B-B14F-4D97-AF65-F5344CB8AC3E}">
-        <p14:creationId xmlns:p14="http://schemas.microsoft.com/office/powerpoint/2010/main" val="1762476218"/>
+        <p14:creationId xmlns:p14="http://schemas.microsoft.com/office/powerpoint/2010/main" val="4132715826"/>
       </p:ext>
     </p:extLst>
   </p:cSld>
@@ -10859,7 +11680,7 @@
 </p:sld>
 </file>
 
-<file path=ppt/slides/slide7.xml><?xml version="1.0" encoding="utf-8"?>
+<file path=ppt/slides/slide8.xml><?xml version="1.0" encoding="utf-8"?>
 <p:sld xmlns:a="http://schemas.openxmlformats.org/drawingml/2006/main" xmlns:r="http://schemas.openxmlformats.org/officeDocument/2006/relationships" xmlns:p="http://schemas.openxmlformats.org/presentationml/2006/main">
   <p:cSld>
     <p:spTree>

--- a/Onyx_進度報告_1020.pptx
+++ b/Onyx_進度報告_1020.pptx
@@ -5,7 +5,7 @@
     <p:sldMasterId id="2147483658" r:id="rId1"/>
   </p:sldMasterIdLst>
   <p:notesMasterIdLst>
-    <p:notesMasterId r:id="rId10"/>
+    <p:notesMasterId r:id="rId11"/>
   </p:notesMasterIdLst>
   <p:sldIdLst>
     <p:sldId id="277" r:id="rId2"/>
@@ -14,8 +14,9 @@
     <p:sldId id="2043" r:id="rId5"/>
     <p:sldId id="2044" r:id="rId6"/>
     <p:sldId id="2045" r:id="rId7"/>
-    <p:sldId id="2046" r:id="rId8"/>
-    <p:sldId id="286" r:id="rId9"/>
+    <p:sldId id="2047" r:id="rId8"/>
+    <p:sldId id="2046" r:id="rId9"/>
+    <p:sldId id="286" r:id="rId10"/>
   </p:sldIdLst>
   <p:sldSz cx="9906000" cy="6858000" type="A4"/>
   <p:notesSz cx="7315200" cy="9601200"/>
@@ -267,6 +268,7 @@
             <p14:sldId id="2043"/>
             <p14:sldId id="2044"/>
             <p14:sldId id="2045"/>
+            <p14:sldId id="2047"/>
             <p14:sldId id="2046"/>
           </p14:sldIdLst>
         </p14:section>
@@ -2423,6 +2425,140 @@
         <p:cNvPr id="1" name="">
           <a:extLst>
             <a:ext uri="{FF2B5EF4-FFF2-40B4-BE49-F238E27FC236}">
+              <a16:creationId xmlns:a16="http://schemas.microsoft.com/office/drawing/2014/main" id="{C3604A74-706F-9409-1881-C76580330A84}"/>
+            </a:ext>
+          </a:extLst>
+        </p:cNvPr>
+        <p:cNvGrpSpPr/>
+        <p:nvPr/>
+      </p:nvGrpSpPr>
+      <p:grpSpPr>
+        <a:xfrm>
+          <a:off x="0" y="0"/>
+          <a:ext cx="0" cy="0"/>
+          <a:chOff x="0" y="0"/>
+          <a:chExt cx="0" cy="0"/>
+        </a:xfrm>
+      </p:grpSpPr>
+      <p:sp>
+        <p:nvSpPr>
+          <p:cNvPr id="2" name="投影片影像版面配置區 1">
+            <a:extLst>
+              <a:ext uri="{FF2B5EF4-FFF2-40B4-BE49-F238E27FC236}">
+                <a16:creationId xmlns:a16="http://schemas.microsoft.com/office/drawing/2014/main" id="{22D93E6D-88B0-9A32-620E-1457EDADC7DB}"/>
+              </a:ext>
+            </a:extLst>
+          </p:cNvPr>
+          <p:cNvSpPr>
+            <a:spLocks noGrp="1" noRot="1" noChangeAspect="1"/>
+          </p:cNvSpPr>
+          <p:nvPr>
+            <p:ph type="sldImg"/>
+          </p:nvPr>
+        </p:nvSpPr>
+        <p:spPr/>
+      </p:sp>
+      <p:sp>
+        <p:nvSpPr>
+          <p:cNvPr id="3" name="備忘稿版面配置區 2">
+            <a:extLst>
+              <a:ext uri="{FF2B5EF4-FFF2-40B4-BE49-F238E27FC236}">
+                <a16:creationId xmlns:a16="http://schemas.microsoft.com/office/drawing/2014/main" id="{9FD021DC-A751-D308-6E79-769C792F75D3}"/>
+              </a:ext>
+            </a:extLst>
+          </p:cNvPr>
+          <p:cNvSpPr>
+            <a:spLocks noGrp="1"/>
+          </p:cNvSpPr>
+          <p:nvPr>
+            <p:ph type="body" idx="1"/>
+          </p:nvPr>
+        </p:nvSpPr>
+        <p:spPr/>
+        <p:txBody>
+          <a:bodyPr/>
+          <a:lstStyle/>
+          <a:p>
+            <a:pPr marL="0" indent="0"/>
+            <a:endParaRPr lang="zh-TW" altLang="en-US" dirty="0"/>
+          </a:p>
+        </p:txBody>
+      </p:sp>
+      <p:sp>
+        <p:nvSpPr>
+          <p:cNvPr id="4" name="投影片編號版面配置區 3">
+            <a:extLst>
+              <a:ext uri="{FF2B5EF4-FFF2-40B4-BE49-F238E27FC236}">
+                <a16:creationId xmlns:a16="http://schemas.microsoft.com/office/drawing/2014/main" id="{8757B7D5-F5D6-5C3C-E662-21C60AA106A2}"/>
+              </a:ext>
+            </a:extLst>
+          </p:cNvPr>
+          <p:cNvSpPr>
+            <a:spLocks noGrp="1"/>
+          </p:cNvSpPr>
+          <p:nvPr>
+            <p:ph type="sldNum" idx="12"/>
+          </p:nvPr>
+        </p:nvSpPr>
+        <p:spPr/>
+        <p:txBody>
+          <a:bodyPr/>
+          <a:lstStyle/>
+          <a:p>
+            <a:pPr marL="0" marR="0" lvl="0" indent="0" algn="r" rtl="0">
+              <a:spcBef>
+                <a:spcPts val="0"/>
+              </a:spcBef>
+              <a:spcAft>
+                <a:spcPts val="0"/>
+              </a:spcAft>
+              <a:buNone/>
+            </a:pPr>
+            <a:fld id="{00000000-1234-1234-1234-123412341234}" type="slidenum">
+              <a:rPr lang="en-US" sz="2000" b="0" i="0" u="none" strike="noStrike" cap="none" smtClean="0">
+                <a:solidFill>
+                  <a:schemeClr val="dk1"/>
+                </a:solidFill>
+                <a:latin typeface="Times New Roman"/>
+                <a:ea typeface="Times New Roman"/>
+                <a:cs typeface="Times New Roman"/>
+                <a:sym typeface="Times New Roman"/>
+              </a:rPr>
+              <a:t>7</a:t>
+            </a:fld>
+            <a:endParaRPr lang="en-US" sz="2000" b="0" i="0" u="none" strike="noStrike" cap="none" dirty="0">
+              <a:solidFill>
+                <a:schemeClr val="dk1"/>
+              </a:solidFill>
+              <a:latin typeface="Times New Roman"/>
+              <a:ea typeface="Times New Roman"/>
+              <a:cs typeface="Times New Roman"/>
+              <a:sym typeface="Times New Roman"/>
+            </a:endParaRPr>
+          </a:p>
+        </p:txBody>
+      </p:sp>
+    </p:spTree>
+    <p:extLst>
+      <p:ext uri="{BB962C8B-B14F-4D97-AF65-F5344CB8AC3E}">
+        <p14:creationId xmlns:p14="http://schemas.microsoft.com/office/powerpoint/2010/main" val="34526613"/>
+      </p:ext>
+    </p:extLst>
+  </p:cSld>
+  <p:clrMapOvr>
+    <a:masterClrMapping/>
+  </p:clrMapOvr>
+</p:notes>
+</file>
+
+<file path=ppt/notesSlides/notesSlide8.xml><?xml version="1.0" encoding="utf-8"?>
+<p:notes xmlns:a="http://schemas.openxmlformats.org/drawingml/2006/main" xmlns:r="http://schemas.openxmlformats.org/officeDocument/2006/relationships" xmlns:p="http://schemas.openxmlformats.org/presentationml/2006/main">
+  <p:cSld>
+    <p:spTree>
+      <p:nvGrpSpPr>
+        <p:cNvPr id="1" name="">
+          <a:extLst>
+            <a:ext uri="{FF2B5EF4-FFF2-40B4-BE49-F238E27FC236}">
               <a16:creationId xmlns:a16="http://schemas.microsoft.com/office/drawing/2014/main" id="{CFFE527B-4000-F206-6AFC-75F0676BC382}"/>
             </a:ext>
           </a:extLst>
@@ -2522,7 +2658,7 @@
                 <a:cs typeface="Times New Roman"/>
                 <a:sym typeface="Times New Roman"/>
               </a:rPr>
-              <a:t>7</a:t>
+              <a:t>8</a:t>
             </a:fld>
             <a:endParaRPr lang="en-US" sz="2000" b="0" i="0" u="none" strike="noStrike" cap="none" dirty="0">
               <a:solidFill>
@@ -2549,7 +2685,7 @@
 </p:notes>
 </file>
 
-<file path=ppt/notesSlides/notesSlide8.xml><?xml version="1.0" encoding="utf-8"?>
+<file path=ppt/notesSlides/notesSlide9.xml><?xml version="1.0" encoding="utf-8"?>
 <p:notes xmlns:a="http://schemas.openxmlformats.org/drawingml/2006/main" xmlns:r="http://schemas.openxmlformats.org/officeDocument/2006/relationships" xmlns:p="http://schemas.openxmlformats.org/presentationml/2006/main">
   <p:cSld>
     <p:spTree>
@@ -2617,7 +2753,7 @@
           <a:p>
             <a:fld id="{F5753A29-9D77-4C26-8BEC-432FE5D4B0A4}" type="slidenum">
               <a:rPr lang="en-US" altLang="zh-TW" smtClean="0"/>
-              <a:t>8</a:t>
+              <a:t>9</a:t>
             </a:fld>
             <a:endParaRPr lang="en-US" altLang="zh-TW" dirty="0"/>
           </a:p>
@@ -10560,6 +10696,38 @@
               </a:rPr>
               <a:t>Xilinx ZCU106</a:t>
             </a:r>
+            <a:r>
+              <a:rPr lang="zh-TW" altLang="en-US" dirty="0">
+                <a:latin typeface="Times New Roman" panose="02020603050405020304" pitchFamily="18" charset="0"/>
+                <a:ea typeface="標楷體" panose="03000509000000000000" pitchFamily="65" charset="-120"/>
+                <a:cs typeface="Times New Roman" panose="02020603050405020304" pitchFamily="18" charset="0"/>
+              </a:rPr>
+              <a:t> </a:t>
+            </a:r>
+            <a:r>
+              <a:rPr lang="en-US" altLang="zh-TW" dirty="0">
+                <a:latin typeface="Times New Roman" panose="02020603050405020304" pitchFamily="18" charset="0"/>
+                <a:ea typeface="標楷體" panose="03000509000000000000" pitchFamily="65" charset="-120"/>
+                <a:cs typeface="Times New Roman" panose="02020603050405020304" pitchFamily="18" charset="0"/>
+              </a:rPr>
+              <a:t>/</a:t>
+            </a:r>
+            <a:r>
+              <a:rPr lang="zh-TW" altLang="en-US" dirty="0">
+                <a:latin typeface="Times New Roman" panose="02020603050405020304" pitchFamily="18" charset="0"/>
+                <a:ea typeface="標楷體" panose="03000509000000000000" pitchFamily="65" charset="-120"/>
+                <a:cs typeface="Times New Roman" panose="02020603050405020304" pitchFamily="18" charset="0"/>
+              </a:rPr>
+              <a:t> </a:t>
+            </a:r>
+            <a:r>
+              <a:rPr lang="en-US" altLang="zh-TW" dirty="0" err="1">
+                <a:latin typeface="Times New Roman" panose="02020603050405020304" pitchFamily="18" charset="0"/>
+                <a:ea typeface="標楷體" panose="03000509000000000000" pitchFamily="65" charset="-120"/>
+                <a:cs typeface="Times New Roman" panose="02020603050405020304" pitchFamily="18" charset="0"/>
+              </a:rPr>
+              <a:t>LiteX</a:t>
+            </a:r>
             <a:endParaRPr lang="zh-TW" altLang="en-US" dirty="0">
               <a:latin typeface="Times New Roman" panose="02020603050405020304" pitchFamily="18" charset="0"/>
               <a:ea typeface="標楷體" panose="03000509000000000000" pitchFamily="65" charset="-120"/>
@@ -10883,10 +11051,10 @@
         </p:nvGrpSpPr>
         <p:grpSpPr>
           <a:xfrm>
-            <a:off x="7496924" y="1954930"/>
+            <a:off x="7496924" y="1954932"/>
             <a:ext cx="2125752" cy="1894039"/>
             <a:chOff x="6986296" y="3782285"/>
-            <a:chExt cx="2310101" cy="2058293"/>
+            <a:chExt cx="2310101" cy="2058292"/>
           </a:xfrm>
         </p:grpSpPr>
         <p:pic>
@@ -10933,7 +11101,7 @@
           </p:nvSpPr>
           <p:spPr>
             <a:xfrm>
-              <a:off x="7212168" y="5506110"/>
+              <a:off x="7212168" y="5506109"/>
               <a:ext cx="1951555" cy="334468"/>
             </a:xfrm>
             <a:prstGeom prst="rect">
@@ -11214,6 +11382,163 @@
         <p:cNvPr id="1" name="">
           <a:extLst>
             <a:ext uri="{FF2B5EF4-FFF2-40B4-BE49-F238E27FC236}">
+              <a16:creationId xmlns:a16="http://schemas.microsoft.com/office/drawing/2014/main" id="{2B75B238-6305-8C1D-F131-1131B383DB80}"/>
+            </a:ext>
+          </a:extLst>
+        </p:cNvPr>
+        <p:cNvGrpSpPr/>
+        <p:nvPr/>
+      </p:nvGrpSpPr>
+      <p:grpSpPr>
+        <a:xfrm>
+          <a:off x="0" y="0"/>
+          <a:ext cx="0" cy="0"/>
+          <a:chOff x="0" y="0"/>
+          <a:chExt cx="0" cy="0"/>
+        </a:xfrm>
+      </p:grpSpPr>
+      <p:sp>
+        <p:nvSpPr>
+          <p:cNvPr id="15" name="標題 1">
+            <a:extLst>
+              <a:ext uri="{FF2B5EF4-FFF2-40B4-BE49-F238E27FC236}">
+                <a16:creationId xmlns:a16="http://schemas.microsoft.com/office/drawing/2014/main" id="{67EBDB1E-821A-915C-2DD3-F7DD8CB9D993}"/>
+              </a:ext>
+            </a:extLst>
+          </p:cNvPr>
+          <p:cNvSpPr>
+            <a:spLocks noGrp="1"/>
+          </p:cNvSpPr>
+          <p:nvPr>
+            <p:ph type="title"/>
+          </p:nvPr>
+        </p:nvSpPr>
+        <p:spPr>
+          <a:xfrm>
+            <a:off x="609602" y="609600"/>
+            <a:ext cx="8077200" cy="533400"/>
+          </a:xfrm>
+          <a:ln>
+            <a:noFill/>
+          </a:ln>
+        </p:spPr>
+        <p:txBody>
+          <a:bodyPr/>
+          <a:lstStyle/>
+          <a:p>
+            <a:r>
+              <a:rPr lang="zh-TW" altLang="en-US">
+                <a:latin typeface="Times New Roman" panose="02020603050405020304" pitchFamily="18" charset="0"/>
+                <a:ea typeface="標楷體" panose="03000509000000000000" pitchFamily="65" charset="-120"/>
+                <a:cs typeface="Times New Roman" panose="02020603050405020304" pitchFamily="18" charset="0"/>
+              </a:rPr>
+              <a:t>本次進度</a:t>
+            </a:r>
+            <a:r>
+              <a:rPr lang="en-US" altLang="zh-TW">
+                <a:latin typeface="Times New Roman" panose="02020603050405020304" pitchFamily="18" charset="0"/>
+                <a:ea typeface="標楷體" panose="03000509000000000000" pitchFamily="65" charset="-120"/>
+                <a:cs typeface="Times New Roman" panose="02020603050405020304" pitchFamily="18" charset="0"/>
+              </a:rPr>
+              <a:t>: </a:t>
+            </a:r>
+            <a:r>
+              <a:rPr lang="zh-TW" altLang="zh-TW">
+                <a:latin typeface="Times New Roman" panose="02020603050405020304" pitchFamily="18" charset="0"/>
+                <a:ea typeface="標楷體" panose="03000509000000000000" pitchFamily="65" charset="-120"/>
+                <a:cs typeface="Times New Roman" panose="02020603050405020304" pitchFamily="18" charset="0"/>
+              </a:rPr>
+              <a:t>Xilinx ZCU106</a:t>
+            </a:r>
+            <a:endParaRPr lang="zh-TW" altLang="en-US" dirty="0">
+              <a:latin typeface="Times New Roman" panose="02020603050405020304" pitchFamily="18" charset="0"/>
+              <a:ea typeface="標楷體" panose="03000509000000000000" pitchFamily="65" charset="-120"/>
+              <a:cs typeface="Times New Roman" panose="02020603050405020304" pitchFamily="18" charset="0"/>
+            </a:endParaRPr>
+          </a:p>
+        </p:txBody>
+      </p:sp>
+      <p:pic>
+        <p:nvPicPr>
+          <p:cNvPr id="9" name="圖片 8">
+            <a:extLst>
+              <a:ext uri="{FF2B5EF4-FFF2-40B4-BE49-F238E27FC236}">
+                <a16:creationId xmlns:a16="http://schemas.microsoft.com/office/drawing/2014/main" id="{638D5B9D-AD56-A7B8-CEDA-0B26D9CD64F5}"/>
+              </a:ext>
+            </a:extLst>
+          </p:cNvPr>
+          <p:cNvPicPr>
+            <a:picLocks noChangeAspect="1"/>
+          </p:cNvPicPr>
+          <p:nvPr/>
+        </p:nvPicPr>
+        <p:blipFill>
+          <a:blip r:embed="rId3"/>
+          <a:stretch>
+            <a:fillRect/>
+          </a:stretch>
+        </p:blipFill>
+        <p:spPr>
+          <a:xfrm>
+            <a:off x="6007412" y="3011498"/>
+            <a:ext cx="3272734" cy="2117213"/>
+          </a:xfrm>
+          <a:prstGeom prst="rect">
+            <a:avLst/>
+          </a:prstGeom>
+        </p:spPr>
+      </p:pic>
+      <p:pic>
+        <p:nvPicPr>
+          <p:cNvPr id="11" name="圖片 10">
+            <a:extLst>
+              <a:ext uri="{FF2B5EF4-FFF2-40B4-BE49-F238E27FC236}">
+                <a16:creationId xmlns:a16="http://schemas.microsoft.com/office/drawing/2014/main" id="{511170EF-AC1F-C288-65A5-A814F807CD75}"/>
+              </a:ext>
+            </a:extLst>
+          </p:cNvPr>
+          <p:cNvPicPr>
+            <a:picLocks noChangeAspect="1"/>
+          </p:cNvPicPr>
+          <p:nvPr/>
+        </p:nvPicPr>
+        <p:blipFill>
+          <a:blip r:embed="rId4"/>
+          <a:stretch>
+            <a:fillRect/>
+          </a:stretch>
+        </p:blipFill>
+        <p:spPr>
+          <a:xfrm>
+            <a:off x="1531364" y="4070105"/>
+            <a:ext cx="5282699" cy="1383722"/>
+          </a:xfrm>
+          <a:prstGeom prst="rect">
+            <a:avLst/>
+          </a:prstGeom>
+        </p:spPr>
+      </p:pic>
+    </p:spTree>
+    <p:extLst>
+      <p:ext uri="{BB962C8B-B14F-4D97-AF65-F5344CB8AC3E}">
+        <p14:creationId xmlns:p14="http://schemas.microsoft.com/office/powerpoint/2010/main" val="3405360225"/>
+      </p:ext>
+    </p:extLst>
+  </p:cSld>
+  <p:clrMapOvr>
+    <a:masterClrMapping/>
+  </p:clrMapOvr>
+</p:sld>
+</file>
+
+<file path=ppt/slides/slide8.xml><?xml version="1.0" encoding="utf-8"?>
+<p:sld xmlns:a="http://schemas.openxmlformats.org/drawingml/2006/main" xmlns:r="http://schemas.openxmlformats.org/officeDocument/2006/relationships" xmlns:p="http://schemas.openxmlformats.org/presentationml/2006/main">
+  <p:cSld>
+    <p:spTree>
+      <p:nvGrpSpPr>
+        <p:cNvPr id="1" name="">
+          <a:extLst>
+            <a:ext uri="{FF2B5EF4-FFF2-40B4-BE49-F238E27FC236}">
               <a16:creationId xmlns:a16="http://schemas.microsoft.com/office/drawing/2014/main" id="{1FD8BDF0-8203-5101-5AD7-8123D67DB439}"/>
             </a:ext>
           </a:extLst>
@@ -11680,7 +12005,7 @@
 </p:sld>
 </file>
 
-<file path=ppt/slides/slide8.xml><?xml version="1.0" encoding="utf-8"?>
+<file path=ppt/slides/slide9.xml><?xml version="1.0" encoding="utf-8"?>
 <p:sld xmlns:a="http://schemas.openxmlformats.org/drawingml/2006/main" xmlns:r="http://schemas.openxmlformats.org/officeDocument/2006/relationships" xmlns:p="http://schemas.openxmlformats.org/presentationml/2006/main">
   <p:cSld>
     <p:spTree>
